--- a/theory_01/report/GWR_report_01.pptx
+++ b/theory_01/report/GWR_report_01.pptx
@@ -281,7 +281,7 @@
           <a:p>
             <a:fld id="{BBA45493-35B4-4159-803A-59E339B62678}" type="datetimeFigureOut">
               <a:rPr lang="zh-TW" altLang="en-US" smtClean="0"/>
-              <a:t>2026/7/3</a:t>
+              <a:t>2026/7/7</a:t>
             </a:fld>
             <a:endParaRPr lang="zh-TW" altLang="en-US"/>
           </a:p>
@@ -479,7 +479,7 @@
           <a:p>
             <a:fld id="{BBA45493-35B4-4159-803A-59E339B62678}" type="datetimeFigureOut">
               <a:rPr lang="zh-TW" altLang="en-US" smtClean="0"/>
-              <a:t>2026/7/3</a:t>
+              <a:t>2026/7/7</a:t>
             </a:fld>
             <a:endParaRPr lang="zh-TW" altLang="en-US"/>
           </a:p>
@@ -687,7 +687,7 @@
           <a:p>
             <a:fld id="{BBA45493-35B4-4159-803A-59E339B62678}" type="datetimeFigureOut">
               <a:rPr lang="zh-TW" altLang="en-US" smtClean="0"/>
-              <a:t>2026/7/3</a:t>
+              <a:t>2026/7/7</a:t>
             </a:fld>
             <a:endParaRPr lang="zh-TW" altLang="en-US"/>
           </a:p>
@@ -885,7 +885,7 @@
           <a:p>
             <a:fld id="{BBA45493-35B4-4159-803A-59E339B62678}" type="datetimeFigureOut">
               <a:rPr lang="zh-TW" altLang="en-US" smtClean="0"/>
-              <a:t>2026/7/3</a:t>
+              <a:t>2026/7/7</a:t>
             </a:fld>
             <a:endParaRPr lang="zh-TW" altLang="en-US"/>
           </a:p>
@@ -1160,7 +1160,7 @@
           <a:p>
             <a:fld id="{BBA45493-35B4-4159-803A-59E339B62678}" type="datetimeFigureOut">
               <a:rPr lang="zh-TW" altLang="en-US" smtClean="0"/>
-              <a:t>2026/7/3</a:t>
+              <a:t>2026/7/7</a:t>
             </a:fld>
             <a:endParaRPr lang="zh-TW" altLang="en-US"/>
           </a:p>
@@ -1425,7 +1425,7 @@
           <a:p>
             <a:fld id="{BBA45493-35B4-4159-803A-59E339B62678}" type="datetimeFigureOut">
               <a:rPr lang="zh-TW" altLang="en-US" smtClean="0"/>
-              <a:t>2026/7/3</a:t>
+              <a:t>2026/7/7</a:t>
             </a:fld>
             <a:endParaRPr lang="zh-TW" altLang="en-US"/>
           </a:p>
@@ -1837,7 +1837,7 @@
           <a:p>
             <a:fld id="{BBA45493-35B4-4159-803A-59E339B62678}" type="datetimeFigureOut">
               <a:rPr lang="zh-TW" altLang="en-US" smtClean="0"/>
-              <a:t>2026/7/3</a:t>
+              <a:t>2026/7/7</a:t>
             </a:fld>
             <a:endParaRPr lang="zh-TW" altLang="en-US"/>
           </a:p>
@@ -1978,7 +1978,7 @@
           <a:p>
             <a:fld id="{BBA45493-35B4-4159-803A-59E339B62678}" type="datetimeFigureOut">
               <a:rPr lang="zh-TW" altLang="en-US" smtClean="0"/>
-              <a:t>2026/7/3</a:t>
+              <a:t>2026/7/7</a:t>
             </a:fld>
             <a:endParaRPr lang="zh-TW" altLang="en-US"/>
           </a:p>
@@ -2091,7 +2091,7 @@
           <a:p>
             <a:fld id="{BBA45493-35B4-4159-803A-59E339B62678}" type="datetimeFigureOut">
               <a:rPr lang="zh-TW" altLang="en-US" smtClean="0"/>
-              <a:t>2026/7/3</a:t>
+              <a:t>2026/7/7</a:t>
             </a:fld>
             <a:endParaRPr lang="zh-TW" altLang="en-US"/>
           </a:p>
@@ -2402,7 +2402,7 @@
           <a:p>
             <a:fld id="{BBA45493-35B4-4159-803A-59E339B62678}" type="datetimeFigureOut">
               <a:rPr lang="zh-TW" altLang="en-US" smtClean="0"/>
-              <a:t>2026/7/3</a:t>
+              <a:t>2026/7/7</a:t>
             </a:fld>
             <a:endParaRPr lang="zh-TW" altLang="en-US"/>
           </a:p>
@@ -2690,7 +2690,7 @@
           <a:p>
             <a:fld id="{BBA45493-35B4-4159-803A-59E339B62678}" type="datetimeFigureOut">
               <a:rPr lang="zh-TW" altLang="en-US" smtClean="0"/>
-              <a:t>2026/7/3</a:t>
+              <a:t>2026/7/7</a:t>
             </a:fld>
             <a:endParaRPr lang="zh-TW" altLang="en-US"/>
           </a:p>
@@ -2931,7 +2931,7 @@
           <a:p>
             <a:fld id="{BBA45493-35B4-4159-803A-59E339B62678}" type="datetimeFigureOut">
               <a:rPr lang="zh-TW" altLang="en-US" smtClean="0"/>
-              <a:t>2026/7/3</a:t>
+              <a:t>2026/7/7</a:t>
             </a:fld>
             <a:endParaRPr lang="zh-TW" altLang="en-US"/>
           </a:p>
@@ -4859,7 +4859,7 @@
                 <a:ea typeface="標楷體" panose="03000509000000000000" pitchFamily="65" charset="-120"/>
                 <a:cs typeface="CMU Serif" panose="02000603000000000000" pitchFamily="2" charset="0"/>
               </a:rPr>
-              <a:t>資料點多的地方採用小範圍，資料點多的地方採用大範圍，保證每個迴歸點模型都使用合理資料量訓練</a:t>
+              <a:t>資料點多的地方採用小範圍，資料點少的地方採用大範圍，保證每個迴歸點模型都使用合理資料量訓練</a:t>
             </a:r>
             <a:endParaRPr lang="en-US" altLang="zh-TW" sz="2000" dirty="0">
               <a:latin typeface="CMU Serif" panose="02000603000000000000" pitchFamily="2" charset="0"/>
@@ -7558,7 +7558,7 @@
                 <a:ea typeface="標楷體" panose="03000509000000000000" pitchFamily="65" charset="-120"/>
                 <a:cs typeface="CMU Serif" panose="02000603000000000000" pitchFamily="2" charset="0"/>
               </a:rPr>
-              <a:t>Fotheringham et al. (2012). Geographically Weighted Regression. pp.97-102 </a:t>
+              <a:t>Fotheringham et al. (2002). Geographically Weighted Regression. pp.97-102 </a:t>
             </a:r>
             <a:r>
               <a:rPr lang="zh-TW" altLang="en-US" sz="2000" dirty="0">
@@ -8181,7 +8181,7 @@
           <p:nvPr>
             <p:extLst>
               <p:ext uri="{D42A27DB-BD31-4B8C-83A1-F6EECF244321}">
-                <p14:modId xmlns:p14="http://schemas.microsoft.com/office/powerpoint/2010/main" val="1760582301"/>
+                <p14:modId xmlns:p14="http://schemas.microsoft.com/office/powerpoint/2010/main" val="1003987787"/>
               </p:ext>
             </p:extLst>
           </p:nvPr>
@@ -9404,7 +9404,7 @@
                           <a:latin typeface="CMU Serif" panose="02000603000000000000" pitchFamily="2" charset="0"/>
                           <a:ea typeface="標楷體" panose="03000509000000000000" pitchFamily="65" charset="-120"/>
                         </a:rPr>
-                        <a:t>PctRural</a:t>
+                        <a:t>PctBach</a:t>
                       </a:r>
                       <a:endParaRPr lang="en-US" sz="1400" b="0" i="0" u="none" strike="noStrike" baseline="0" dirty="0">
                         <a:solidFill>
@@ -9461,7 +9461,9 @@
                       <a:noFill/>
                       <a:prstDash val="solid"/>
                     </a:lnBlToTr>
-                    <a:noFill/>
+                    <a:solidFill>
+                      <a:srgbClr val="FFFF00"/>
+                    </a:solidFill>
                   </a:tcPr>
                 </a:tc>
                 <a:tc>
@@ -9473,15 +9475,15 @@
                         <a:buNone/>
                       </a:pPr>
                       <a:r>
-                        <a:rPr lang="zh-TW" altLang="en-US" sz="1400" b="0" i="0" u="none" strike="noStrike" baseline="0">
-                          <a:solidFill>
-                            <a:srgbClr val="000000"/>
-                          </a:solidFill>
-                          <a:effectLst/>
-                          <a:latin typeface="CMU Serif" panose="02000603000000000000" pitchFamily="2" charset="0"/>
-                          <a:ea typeface="標楷體" panose="03000509000000000000" pitchFamily="65" charset="-120"/>
-                        </a:rPr>
-                        <a:t>解釋變數</a:t>
+                        <a:rPr lang="zh-TW" altLang="en-US" sz="1400" b="0" i="0" u="none" strike="noStrike" baseline="0" dirty="0">
+                          <a:solidFill>
+                            <a:srgbClr val="000000"/>
+                          </a:solidFill>
+                          <a:effectLst/>
+                          <a:latin typeface="CMU Serif" panose="02000603000000000000" pitchFamily="2" charset="0"/>
+                          <a:ea typeface="標楷體" panose="03000509000000000000" pitchFamily="65" charset="-120"/>
+                        </a:rPr>
+                        <a:t>應變數</a:t>
                       </a:r>
                     </a:p>
                   </a:txBody>
@@ -9530,7 +9532,9 @@
                       <a:noFill/>
                       <a:prstDash val="solid"/>
                     </a:lnBlToTr>
-                    <a:noFill/>
+                    <a:solidFill>
+                      <a:srgbClr val="FFFF00"/>
+                    </a:solidFill>
                   </a:tcPr>
                 </a:tc>
                 <a:tc>
@@ -9553,6 +9557,17 @@
                         <a:t>County </a:t>
                       </a:r>
                       <a:r>
+                        <a:rPr lang="en-US" sz="1400" b="0" i="0" u="none" strike="noStrike" baseline="0" dirty="0" err="1">
+                          <a:solidFill>
+                            <a:srgbClr val="000000"/>
+                          </a:solidFill>
+                          <a:effectLst/>
+                          <a:latin typeface="CMU Serif" panose="02000603000000000000" pitchFamily="2" charset="0"/>
+                          <a:ea typeface="標楷體" panose="03000509000000000000" pitchFamily="65" charset="-120"/>
+                        </a:rPr>
+                        <a:t>中具</a:t>
+                      </a:r>
+                      <a:r>
                         <a:rPr lang="zh-TW" altLang="en-US" sz="1400" b="0" i="0" u="none" strike="noStrike" baseline="0" dirty="0">
                           <a:solidFill>
                             <a:srgbClr val="000000"/>
@@ -9561,21 +9576,10 @@
                           <a:latin typeface="CMU Serif" panose="02000603000000000000" pitchFamily="2" charset="0"/>
                           <a:ea typeface="標楷體" panose="03000509000000000000" pitchFamily="65" charset="-120"/>
                         </a:rPr>
-                        <a:t>中被定義為 </a:t>
-                      </a:r>
-                      <a:r>
-                        <a:rPr lang="en-US" sz="1400" b="0" i="0" u="none" strike="noStrike" baseline="0" dirty="0">
-                          <a:solidFill>
-                            <a:srgbClr val="000000"/>
-                          </a:solidFill>
-                          <a:effectLst/>
-                          <a:latin typeface="CMU Serif" panose="02000603000000000000" pitchFamily="2" charset="0"/>
-                          <a:ea typeface="標楷體" panose="03000509000000000000" pitchFamily="65" charset="-120"/>
-                        </a:rPr>
-                        <a:t>rural population </a:t>
-                      </a:r>
-                      <a:r>
-                        <a:rPr lang="zh-TW" altLang="en-US" sz="1400" b="0" i="0" u="none" strike="noStrike" baseline="0" dirty="0">
+                        <a:t>學士學位</a:t>
+                      </a:r>
+                      <a:r>
+                        <a:rPr lang="en-US" sz="1400" b="0" i="0" u="none" strike="noStrike" baseline="0" dirty="0" err="1">
                           <a:solidFill>
                             <a:srgbClr val="000000"/>
                           </a:solidFill>
@@ -9584,82 +9588,6 @@
                           <a:ea typeface="標楷體" panose="03000509000000000000" pitchFamily="65" charset="-120"/>
                         </a:rPr>
                         <a:t>的人口比例</a:t>
-                      </a:r>
-                    </a:p>
-                  </a:txBody>
-                  <a:tcPr marL="7620" marR="7620" marT="7620" marB="0" anchor="ctr">
-                    <a:lnL w="12700" cap="flat" cmpd="sng" algn="ctr">
-                      <a:solidFill>
-                        <a:schemeClr val="tx1"/>
-                      </a:solidFill>
-                      <a:prstDash val="solid"/>
-                      <a:round/>
-                      <a:headEnd type="none" w="med" len="med"/>
-                      <a:tailEnd type="none" w="med" len="med"/>
-                    </a:lnL>
-                    <a:lnR w="12700" cap="flat" cmpd="sng" algn="ctr">
-                      <a:solidFill>
-                        <a:schemeClr val="tx1"/>
-                      </a:solidFill>
-                      <a:prstDash val="solid"/>
-                      <a:round/>
-                      <a:headEnd type="none" w="med" len="med"/>
-                      <a:tailEnd type="none" w="med" len="med"/>
-                    </a:lnR>
-                    <a:lnT w="12700" cap="flat" cmpd="sng" algn="ctr">
-                      <a:solidFill>
-                        <a:schemeClr val="tx1"/>
-                      </a:solidFill>
-                      <a:prstDash val="solid"/>
-                      <a:round/>
-                      <a:headEnd type="none" w="med" len="med"/>
-                      <a:tailEnd type="none" w="med" len="med"/>
-                    </a:lnT>
-                    <a:lnB w="12700" cap="flat" cmpd="sng" algn="ctr">
-                      <a:solidFill>
-                        <a:schemeClr val="tx1"/>
-                      </a:solidFill>
-                      <a:prstDash val="solid"/>
-                      <a:round/>
-                      <a:headEnd type="none" w="med" len="med"/>
-                      <a:tailEnd type="none" w="med" len="med"/>
-                    </a:lnB>
-                    <a:lnTlToBr w="12700" cmpd="sng">
-                      <a:noFill/>
-                      <a:prstDash val="solid"/>
-                    </a:lnTlToBr>
-                    <a:lnBlToTr w="12700" cmpd="sng">
-                      <a:noFill/>
-                      <a:prstDash val="solid"/>
-                    </a:lnBlToTr>
-                    <a:noFill/>
-                  </a:tcPr>
-                </a:tc>
-                <a:extLst>
-                  <a:ext uri="{0D108BD9-81ED-4DB2-BD59-A6C34878D82A}">
-                    <a16:rowId xmlns:a16="http://schemas.microsoft.com/office/drawing/2014/main" val="2524385668"/>
-                  </a:ext>
-                </a:extLst>
-              </a:tr>
-              <a:tr h="330298">
-                <a:tc>
-                  <a:txBody>
-                    <a:bodyPr/>
-                    <a:lstStyle/>
-                    <a:p>
-                      <a:pPr algn="ctr" fontAlgn="ctr">
-                        <a:buNone/>
-                      </a:pPr>
-                      <a:r>
-                        <a:rPr lang="en-US" sz="1400" b="0" i="0" u="none" strike="noStrike" baseline="0" dirty="0" err="1">
-                          <a:solidFill>
-                            <a:srgbClr val="000000"/>
-                          </a:solidFill>
-                          <a:effectLst/>
-                          <a:latin typeface="CMU Serif" panose="02000603000000000000" pitchFamily="2" charset="0"/>
-                          <a:ea typeface="標楷體" panose="03000509000000000000" pitchFamily="65" charset="-120"/>
-                        </a:rPr>
-                        <a:t>PctBach</a:t>
                       </a:r>
                       <a:endParaRPr lang="en-US" sz="1400" b="0" i="0" u="none" strike="noStrike" baseline="0" dirty="0">
                         <a:solidFill>
@@ -9716,186 +9644,9 @@
                       <a:noFill/>
                       <a:prstDash val="solid"/>
                     </a:lnBlToTr>
-                    <a:noFill/>
-                  </a:tcPr>
-                </a:tc>
-                <a:tc>
-                  <a:txBody>
-                    <a:bodyPr/>
-                    <a:lstStyle/>
-                    <a:p>
-                      <a:pPr algn="ctr" fontAlgn="ctr">
-                        <a:buNone/>
-                      </a:pPr>
-                      <a:r>
-                        <a:rPr lang="zh-TW" altLang="en-US" sz="1400" b="0" i="0" u="none" strike="noStrike" baseline="0">
-                          <a:solidFill>
-                            <a:srgbClr val="000000"/>
-                          </a:solidFill>
-                          <a:effectLst/>
-                          <a:latin typeface="CMU Serif" panose="02000603000000000000" pitchFamily="2" charset="0"/>
-                          <a:ea typeface="標楷體" panose="03000509000000000000" pitchFamily="65" charset="-120"/>
-                        </a:rPr>
-                        <a:t>應變數</a:t>
-                      </a:r>
-                    </a:p>
-                  </a:txBody>
-                  <a:tcPr marL="7620" marR="7620" marT="7620" marB="0" anchor="ctr">
-                    <a:lnL w="12700" cap="flat" cmpd="sng" algn="ctr">
-                      <a:solidFill>
-                        <a:schemeClr val="tx1"/>
-                      </a:solidFill>
-                      <a:prstDash val="solid"/>
-                      <a:round/>
-                      <a:headEnd type="none" w="med" len="med"/>
-                      <a:tailEnd type="none" w="med" len="med"/>
-                    </a:lnL>
-                    <a:lnR w="12700" cap="flat" cmpd="sng" algn="ctr">
-                      <a:solidFill>
-                        <a:schemeClr val="tx1"/>
-                      </a:solidFill>
-                      <a:prstDash val="solid"/>
-                      <a:round/>
-                      <a:headEnd type="none" w="med" len="med"/>
-                      <a:tailEnd type="none" w="med" len="med"/>
-                    </a:lnR>
-                    <a:lnT w="12700" cap="flat" cmpd="sng" algn="ctr">
-                      <a:solidFill>
-                        <a:schemeClr val="tx1"/>
-                      </a:solidFill>
-                      <a:prstDash val="solid"/>
-                      <a:round/>
-                      <a:headEnd type="none" w="med" len="med"/>
-                      <a:tailEnd type="none" w="med" len="med"/>
-                    </a:lnT>
-                    <a:lnB w="12700" cap="flat" cmpd="sng" algn="ctr">
-                      <a:solidFill>
-                        <a:schemeClr val="tx1"/>
-                      </a:solidFill>
-                      <a:prstDash val="solid"/>
-                      <a:round/>
-                      <a:headEnd type="none" w="med" len="med"/>
-                      <a:tailEnd type="none" w="med" len="med"/>
-                    </a:lnB>
-                    <a:lnTlToBr w="12700" cmpd="sng">
-                      <a:noFill/>
-                      <a:prstDash val="solid"/>
-                    </a:lnTlToBr>
-                    <a:lnBlToTr w="12700" cmpd="sng">
-                      <a:noFill/>
-                      <a:prstDash val="solid"/>
-                    </a:lnBlToTr>
-                    <a:noFill/>
-                  </a:tcPr>
-                </a:tc>
-                <a:tc>
-                  <a:txBody>
-                    <a:bodyPr/>
-                    <a:lstStyle/>
-                    <a:p>
-                      <a:pPr algn="ctr" fontAlgn="ctr">
-                        <a:buNone/>
-                      </a:pPr>
-                      <a:r>
-                        <a:rPr lang="en-US" sz="1400" b="0" i="0" u="none" strike="noStrike" baseline="0" dirty="0">
-                          <a:solidFill>
-                            <a:srgbClr val="000000"/>
-                          </a:solidFill>
-                          <a:effectLst/>
-                          <a:latin typeface="CMU Serif" panose="02000603000000000000" pitchFamily="2" charset="0"/>
-                          <a:ea typeface="標楷體" panose="03000509000000000000" pitchFamily="65" charset="-120"/>
-                        </a:rPr>
-                        <a:t>County </a:t>
-                      </a:r>
-                      <a:r>
-                        <a:rPr lang="en-US" sz="1400" b="0" i="0" u="none" strike="noStrike" baseline="0" dirty="0" err="1">
-                          <a:solidFill>
-                            <a:srgbClr val="000000"/>
-                          </a:solidFill>
-                          <a:effectLst/>
-                          <a:latin typeface="CMU Serif" panose="02000603000000000000" pitchFamily="2" charset="0"/>
-                          <a:ea typeface="標楷體" panose="03000509000000000000" pitchFamily="65" charset="-120"/>
-                        </a:rPr>
-                        <a:t>中具</a:t>
-                      </a:r>
-                      <a:r>
-                        <a:rPr lang="zh-TW" altLang="en-US" sz="1400" b="0" i="0" u="none" strike="noStrike" baseline="0" dirty="0">
-                          <a:solidFill>
-                            <a:srgbClr val="000000"/>
-                          </a:solidFill>
-                          <a:effectLst/>
-                          <a:latin typeface="CMU Serif" panose="02000603000000000000" pitchFamily="2" charset="0"/>
-                          <a:ea typeface="標楷體" panose="03000509000000000000" pitchFamily="65" charset="-120"/>
-                        </a:rPr>
-                        <a:t>學士學位</a:t>
-                      </a:r>
-                      <a:r>
-                        <a:rPr lang="en-US" sz="1400" b="0" i="0" u="none" strike="noStrike" baseline="0" dirty="0" err="1">
-                          <a:solidFill>
-                            <a:srgbClr val="000000"/>
-                          </a:solidFill>
-                          <a:effectLst/>
-                          <a:latin typeface="CMU Serif" panose="02000603000000000000" pitchFamily="2" charset="0"/>
-                          <a:ea typeface="標楷體" panose="03000509000000000000" pitchFamily="65" charset="-120"/>
-                        </a:rPr>
-                        <a:t>的人口比例</a:t>
-                      </a:r>
-                      <a:endParaRPr lang="en-US" sz="1400" b="0" i="0" u="none" strike="noStrike" baseline="0" dirty="0">
-                        <a:solidFill>
-                          <a:srgbClr val="000000"/>
-                        </a:solidFill>
-                        <a:effectLst/>
-                        <a:latin typeface="CMU Serif" panose="02000603000000000000" pitchFamily="2" charset="0"/>
-                        <a:ea typeface="標楷體" panose="03000509000000000000" pitchFamily="65" charset="-120"/>
-                      </a:endParaRPr>
-                    </a:p>
-                  </a:txBody>
-                  <a:tcPr marL="7620" marR="7620" marT="7620" marB="0" anchor="ctr">
-                    <a:lnL w="12700" cap="flat" cmpd="sng" algn="ctr">
-                      <a:solidFill>
-                        <a:schemeClr val="tx1"/>
-                      </a:solidFill>
-                      <a:prstDash val="solid"/>
-                      <a:round/>
-                      <a:headEnd type="none" w="med" len="med"/>
-                      <a:tailEnd type="none" w="med" len="med"/>
-                    </a:lnL>
-                    <a:lnR w="12700" cap="flat" cmpd="sng" algn="ctr">
-                      <a:solidFill>
-                        <a:schemeClr val="tx1"/>
-                      </a:solidFill>
-                      <a:prstDash val="solid"/>
-                      <a:round/>
-                      <a:headEnd type="none" w="med" len="med"/>
-                      <a:tailEnd type="none" w="med" len="med"/>
-                    </a:lnR>
-                    <a:lnT w="12700" cap="flat" cmpd="sng" algn="ctr">
-                      <a:solidFill>
-                        <a:schemeClr val="tx1"/>
-                      </a:solidFill>
-                      <a:prstDash val="solid"/>
-                      <a:round/>
-                      <a:headEnd type="none" w="med" len="med"/>
-                      <a:tailEnd type="none" w="med" len="med"/>
-                    </a:lnT>
-                    <a:lnB w="12700" cap="flat" cmpd="sng" algn="ctr">
-                      <a:solidFill>
-                        <a:schemeClr val="tx1"/>
-                      </a:solidFill>
-                      <a:prstDash val="solid"/>
-                      <a:round/>
-                      <a:headEnd type="none" w="med" len="med"/>
-                      <a:tailEnd type="none" w="med" len="med"/>
-                    </a:lnB>
-                    <a:lnTlToBr w="12700" cmpd="sng">
-                      <a:noFill/>
-                      <a:prstDash val="solid"/>
-                    </a:lnTlToBr>
-                    <a:lnBlToTr w="12700" cmpd="sng">
-                      <a:noFill/>
-                      <a:prstDash val="solid"/>
-                    </a:lnBlToTr>
-                    <a:noFill/>
+                    <a:solidFill>
+                      <a:srgbClr val="FFFF00"/>
+                    </a:solidFill>
                   </a:tcPr>
                 </a:tc>
                 <a:extLst>
@@ -9922,7 +9673,7 @@
                           <a:latin typeface="CMU Serif" panose="02000603000000000000" pitchFamily="2" charset="0"/>
                           <a:ea typeface="標楷體" panose="03000509000000000000" pitchFamily="65" charset="-120"/>
                         </a:rPr>
-                        <a:t>PctEld</a:t>
+                        <a:t>PctRural</a:t>
                       </a:r>
                       <a:endParaRPr lang="en-US" sz="1400" b="0" i="0" u="none" strike="noStrike" baseline="0" dirty="0">
                         <a:solidFill>
@@ -9979,7 +9730,9 @@
                       <a:noFill/>
                       <a:prstDash val="solid"/>
                     </a:lnBlToTr>
-                    <a:noFill/>
+                    <a:solidFill>
+                      <a:srgbClr val="FFC000"/>
+                    </a:solidFill>
                   </a:tcPr>
                 </a:tc>
                 <a:tc>
@@ -9991,7 +9744,7 @@
                         <a:buNone/>
                       </a:pPr>
                       <a:r>
-                        <a:rPr lang="zh-TW" altLang="en-US" sz="1400" b="0" i="0" u="none" strike="noStrike" baseline="0">
+                        <a:rPr lang="zh-TW" altLang="en-US" sz="1400" b="0" i="0" u="none" strike="noStrike" baseline="0" dirty="0">
                           <a:solidFill>
                             <a:srgbClr val="000000"/>
                           </a:solidFill>
@@ -10048,7 +9801,9 @@
                       <a:noFill/>
                       <a:prstDash val="solid"/>
                     </a:lnBlToTr>
-                    <a:noFill/>
+                    <a:solidFill>
+                      <a:srgbClr val="FFC000"/>
+                    </a:solidFill>
                   </a:tcPr>
                 </a:tc>
                 <a:tc>
@@ -10060,7 +9815,7 @@
                         <a:buNone/>
                       </a:pPr>
                       <a:r>
-                        <a:rPr lang="en-US" sz="1400" b="0" i="0" u="none" strike="noStrike" baseline="0">
+                        <a:rPr lang="en-US" sz="1400" b="0" i="0" u="none" strike="noStrike" baseline="0" dirty="0">
                           <a:solidFill>
                             <a:srgbClr val="000000"/>
                           </a:solidFill>
@@ -10071,37 +9826,37 @@
                         <a:t>County </a:t>
                       </a:r>
                       <a:r>
-                        <a:rPr lang="zh-TW" altLang="en-US" sz="1400" b="0" i="0" u="none" strike="noStrike" baseline="0">
-                          <a:solidFill>
-                            <a:srgbClr val="000000"/>
-                          </a:solidFill>
-                          <a:effectLst/>
-                          <a:latin typeface="CMU Serif" panose="02000603000000000000" pitchFamily="2" charset="0"/>
-                          <a:ea typeface="標楷體" panose="03000509000000000000" pitchFamily="65" charset="-120"/>
-                        </a:rPr>
-                        <a:t>中 </a:t>
-                      </a:r>
-                      <a:r>
-                        <a:rPr lang="en-US" altLang="zh-TW" sz="1400" b="0" i="0" u="none" strike="noStrike" baseline="0">
-                          <a:solidFill>
-                            <a:srgbClr val="000000"/>
-                          </a:solidFill>
-                          <a:effectLst/>
-                          <a:latin typeface="CMU Serif" panose="02000603000000000000" pitchFamily="2" charset="0"/>
-                          <a:ea typeface="標楷體" panose="03000509000000000000" pitchFamily="65" charset="-120"/>
-                        </a:rPr>
-                        <a:t>65 </a:t>
-                      </a:r>
-                      <a:r>
-                        <a:rPr lang="zh-TW" altLang="en-US" sz="1400" b="0" i="0" u="none" strike="noStrike" baseline="0">
-                          <a:solidFill>
-                            <a:srgbClr val="000000"/>
-                          </a:solidFill>
-                          <a:effectLst/>
-                          <a:latin typeface="CMU Serif" panose="02000603000000000000" pitchFamily="2" charset="0"/>
-                          <a:ea typeface="標楷體" panose="03000509000000000000" pitchFamily="65" charset="-120"/>
-                        </a:rPr>
-                        <a:t>歲以上人口比例</a:t>
+                        <a:rPr lang="zh-TW" altLang="en-US" sz="1400" b="0" i="0" u="none" strike="noStrike" baseline="0" dirty="0">
+                          <a:solidFill>
+                            <a:srgbClr val="000000"/>
+                          </a:solidFill>
+                          <a:effectLst/>
+                          <a:latin typeface="CMU Serif" panose="02000603000000000000" pitchFamily="2" charset="0"/>
+                          <a:ea typeface="標楷體" panose="03000509000000000000" pitchFamily="65" charset="-120"/>
+                        </a:rPr>
+                        <a:t>中被定義為 </a:t>
+                      </a:r>
+                      <a:r>
+                        <a:rPr lang="en-US" sz="1400" b="0" i="0" u="none" strike="noStrike" baseline="0" dirty="0">
+                          <a:solidFill>
+                            <a:srgbClr val="000000"/>
+                          </a:solidFill>
+                          <a:effectLst/>
+                          <a:latin typeface="CMU Serif" panose="02000603000000000000" pitchFamily="2" charset="0"/>
+                          <a:ea typeface="標楷體" panose="03000509000000000000" pitchFamily="65" charset="-120"/>
+                        </a:rPr>
+                        <a:t>rural population </a:t>
+                      </a:r>
+                      <a:r>
+                        <a:rPr lang="zh-TW" altLang="en-US" sz="1400" b="0" i="0" u="none" strike="noStrike" baseline="0" dirty="0">
+                          <a:solidFill>
+                            <a:srgbClr val="000000"/>
+                          </a:solidFill>
+                          <a:effectLst/>
+                          <a:latin typeface="CMU Serif" panose="02000603000000000000" pitchFamily="2" charset="0"/>
+                          <a:ea typeface="標楷體" panose="03000509000000000000" pitchFamily="65" charset="-120"/>
+                        </a:rPr>
+                        <a:t>的人口比例</a:t>
                       </a:r>
                     </a:p>
                   </a:txBody>
@@ -10150,7 +9905,270 @@
                       <a:noFill/>
                       <a:prstDash val="solid"/>
                     </a:lnBlToTr>
-                    <a:noFill/>
+                    <a:solidFill>
+                      <a:srgbClr val="FFC000"/>
+                    </a:solidFill>
+                  </a:tcPr>
+                </a:tc>
+                <a:extLst>
+                  <a:ext uri="{0D108BD9-81ED-4DB2-BD59-A6C34878D82A}">
+                    <a16:rowId xmlns:a16="http://schemas.microsoft.com/office/drawing/2014/main" val="2308621054"/>
+                  </a:ext>
+                </a:extLst>
+              </a:tr>
+              <a:tr h="330298">
+                <a:tc>
+                  <a:txBody>
+                    <a:bodyPr/>
+                    <a:lstStyle/>
+                    <a:p>
+                      <a:pPr algn="ctr" fontAlgn="ctr">
+                        <a:buNone/>
+                      </a:pPr>
+                      <a:r>
+                        <a:rPr lang="en-US" sz="1400" b="0" i="0" u="none" strike="noStrike" baseline="0" dirty="0" err="1">
+                          <a:solidFill>
+                            <a:srgbClr val="000000"/>
+                          </a:solidFill>
+                          <a:effectLst/>
+                          <a:latin typeface="CMU Serif" panose="02000603000000000000" pitchFamily="2" charset="0"/>
+                          <a:ea typeface="標楷體" panose="03000509000000000000" pitchFamily="65" charset="-120"/>
+                        </a:rPr>
+                        <a:t>PctEld</a:t>
+                      </a:r>
+                      <a:endParaRPr lang="en-US" sz="1400" b="0" i="0" u="none" strike="noStrike" baseline="0" dirty="0">
+                        <a:solidFill>
+                          <a:srgbClr val="000000"/>
+                        </a:solidFill>
+                        <a:effectLst/>
+                        <a:latin typeface="CMU Serif" panose="02000603000000000000" pitchFamily="2" charset="0"/>
+                        <a:ea typeface="標楷體" panose="03000509000000000000" pitchFamily="65" charset="-120"/>
+                      </a:endParaRPr>
+                    </a:p>
+                  </a:txBody>
+                  <a:tcPr marL="7620" marR="7620" marT="7620" marB="0" anchor="ctr">
+                    <a:lnL w="12700" cap="flat" cmpd="sng" algn="ctr">
+                      <a:solidFill>
+                        <a:schemeClr val="tx1"/>
+                      </a:solidFill>
+                      <a:prstDash val="solid"/>
+                      <a:round/>
+                      <a:headEnd type="none" w="med" len="med"/>
+                      <a:tailEnd type="none" w="med" len="med"/>
+                    </a:lnL>
+                    <a:lnR w="12700" cap="flat" cmpd="sng" algn="ctr">
+                      <a:solidFill>
+                        <a:schemeClr val="tx1"/>
+                      </a:solidFill>
+                      <a:prstDash val="solid"/>
+                      <a:round/>
+                      <a:headEnd type="none" w="med" len="med"/>
+                      <a:tailEnd type="none" w="med" len="med"/>
+                    </a:lnR>
+                    <a:lnT w="12700" cap="flat" cmpd="sng" algn="ctr">
+                      <a:solidFill>
+                        <a:schemeClr val="tx1"/>
+                      </a:solidFill>
+                      <a:prstDash val="solid"/>
+                      <a:round/>
+                      <a:headEnd type="none" w="med" len="med"/>
+                      <a:tailEnd type="none" w="med" len="med"/>
+                    </a:lnT>
+                    <a:lnB w="12700" cap="flat" cmpd="sng" algn="ctr">
+                      <a:solidFill>
+                        <a:schemeClr val="tx1"/>
+                      </a:solidFill>
+                      <a:prstDash val="solid"/>
+                      <a:round/>
+                      <a:headEnd type="none" w="med" len="med"/>
+                      <a:tailEnd type="none" w="med" len="med"/>
+                    </a:lnB>
+                    <a:lnTlToBr w="12700" cmpd="sng">
+                      <a:noFill/>
+                      <a:prstDash val="solid"/>
+                    </a:lnTlToBr>
+                    <a:lnBlToTr w="12700" cmpd="sng">
+                      <a:noFill/>
+                      <a:prstDash val="solid"/>
+                    </a:lnBlToTr>
+                    <a:solidFill>
+                      <a:srgbClr val="FFC000"/>
+                    </a:solidFill>
+                  </a:tcPr>
+                </a:tc>
+                <a:tc>
+                  <a:txBody>
+                    <a:bodyPr/>
+                    <a:lstStyle/>
+                    <a:p>
+                      <a:pPr algn="ctr" fontAlgn="ctr">
+                        <a:buNone/>
+                      </a:pPr>
+                      <a:r>
+                        <a:rPr lang="zh-TW" altLang="en-US" sz="1400" b="0" i="0" u="none" strike="noStrike" baseline="0" dirty="0">
+                          <a:solidFill>
+                            <a:srgbClr val="000000"/>
+                          </a:solidFill>
+                          <a:effectLst/>
+                          <a:latin typeface="CMU Serif" panose="02000603000000000000" pitchFamily="2" charset="0"/>
+                          <a:ea typeface="標楷體" panose="03000509000000000000" pitchFamily="65" charset="-120"/>
+                        </a:rPr>
+                        <a:t>解釋變數</a:t>
+                      </a:r>
+                    </a:p>
+                  </a:txBody>
+                  <a:tcPr marL="7620" marR="7620" marT="7620" marB="0" anchor="ctr">
+                    <a:lnL w="12700" cap="flat" cmpd="sng" algn="ctr">
+                      <a:solidFill>
+                        <a:schemeClr val="tx1"/>
+                      </a:solidFill>
+                      <a:prstDash val="solid"/>
+                      <a:round/>
+                      <a:headEnd type="none" w="med" len="med"/>
+                      <a:tailEnd type="none" w="med" len="med"/>
+                    </a:lnL>
+                    <a:lnR w="12700" cap="flat" cmpd="sng" algn="ctr">
+                      <a:solidFill>
+                        <a:schemeClr val="tx1"/>
+                      </a:solidFill>
+                      <a:prstDash val="solid"/>
+                      <a:round/>
+                      <a:headEnd type="none" w="med" len="med"/>
+                      <a:tailEnd type="none" w="med" len="med"/>
+                    </a:lnR>
+                    <a:lnT w="12700" cap="flat" cmpd="sng" algn="ctr">
+                      <a:solidFill>
+                        <a:schemeClr val="tx1"/>
+                      </a:solidFill>
+                      <a:prstDash val="solid"/>
+                      <a:round/>
+                      <a:headEnd type="none" w="med" len="med"/>
+                      <a:tailEnd type="none" w="med" len="med"/>
+                    </a:lnT>
+                    <a:lnB w="12700" cap="flat" cmpd="sng" algn="ctr">
+                      <a:solidFill>
+                        <a:schemeClr val="tx1"/>
+                      </a:solidFill>
+                      <a:prstDash val="solid"/>
+                      <a:round/>
+                      <a:headEnd type="none" w="med" len="med"/>
+                      <a:tailEnd type="none" w="med" len="med"/>
+                    </a:lnB>
+                    <a:lnTlToBr w="12700" cmpd="sng">
+                      <a:noFill/>
+                      <a:prstDash val="solid"/>
+                    </a:lnTlToBr>
+                    <a:lnBlToTr w="12700" cmpd="sng">
+                      <a:noFill/>
+                      <a:prstDash val="solid"/>
+                    </a:lnBlToTr>
+                    <a:solidFill>
+                      <a:srgbClr val="FFC000"/>
+                    </a:solidFill>
+                  </a:tcPr>
+                </a:tc>
+                <a:tc>
+                  <a:txBody>
+                    <a:bodyPr/>
+                    <a:lstStyle/>
+                    <a:p>
+                      <a:pPr algn="ctr" fontAlgn="ctr">
+                        <a:buNone/>
+                      </a:pPr>
+                      <a:r>
+                        <a:rPr lang="en-US" sz="1400" b="0" i="0" u="none" strike="noStrike" baseline="0">
+                          <a:solidFill>
+                            <a:srgbClr val="000000"/>
+                          </a:solidFill>
+                          <a:effectLst/>
+                          <a:latin typeface="CMU Serif" panose="02000603000000000000" pitchFamily="2" charset="0"/>
+                          <a:ea typeface="標楷體" panose="03000509000000000000" pitchFamily="65" charset="-120"/>
+                        </a:rPr>
+                        <a:t>County </a:t>
+                      </a:r>
+                      <a:r>
+                        <a:rPr lang="zh-TW" altLang="en-US" sz="1400" b="0" i="0" u="none" strike="noStrike" baseline="0">
+                          <a:solidFill>
+                            <a:srgbClr val="000000"/>
+                          </a:solidFill>
+                          <a:effectLst/>
+                          <a:latin typeface="CMU Serif" panose="02000603000000000000" pitchFamily="2" charset="0"/>
+                          <a:ea typeface="標楷體" panose="03000509000000000000" pitchFamily="65" charset="-120"/>
+                        </a:rPr>
+                        <a:t>中 </a:t>
+                      </a:r>
+                      <a:r>
+                        <a:rPr lang="en-US" altLang="zh-TW" sz="1400" b="0" i="0" u="none" strike="noStrike" baseline="0">
+                          <a:solidFill>
+                            <a:srgbClr val="000000"/>
+                          </a:solidFill>
+                          <a:effectLst/>
+                          <a:latin typeface="CMU Serif" panose="02000603000000000000" pitchFamily="2" charset="0"/>
+                          <a:ea typeface="標楷體" panose="03000509000000000000" pitchFamily="65" charset="-120"/>
+                        </a:rPr>
+                        <a:t>65 </a:t>
+                      </a:r>
+                      <a:r>
+                        <a:rPr lang="zh-TW" altLang="en-US" sz="1400" b="0" i="0" u="none" strike="noStrike" baseline="0">
+                          <a:solidFill>
+                            <a:srgbClr val="000000"/>
+                          </a:solidFill>
+                          <a:effectLst/>
+                          <a:latin typeface="CMU Serif" panose="02000603000000000000" pitchFamily="2" charset="0"/>
+                          <a:ea typeface="標楷體" panose="03000509000000000000" pitchFamily="65" charset="-120"/>
+                        </a:rPr>
+                        <a:t>歲以上人口比例</a:t>
+                      </a:r>
+                    </a:p>
+                  </a:txBody>
+                  <a:tcPr marL="7620" marR="7620" marT="7620" marB="0" anchor="ctr">
+                    <a:lnL w="12700" cap="flat" cmpd="sng" algn="ctr">
+                      <a:solidFill>
+                        <a:schemeClr val="tx1"/>
+                      </a:solidFill>
+                      <a:prstDash val="solid"/>
+                      <a:round/>
+                      <a:headEnd type="none" w="med" len="med"/>
+                      <a:tailEnd type="none" w="med" len="med"/>
+                    </a:lnL>
+                    <a:lnR w="12700" cap="flat" cmpd="sng" algn="ctr">
+                      <a:solidFill>
+                        <a:schemeClr val="tx1"/>
+                      </a:solidFill>
+                      <a:prstDash val="solid"/>
+                      <a:round/>
+                      <a:headEnd type="none" w="med" len="med"/>
+                      <a:tailEnd type="none" w="med" len="med"/>
+                    </a:lnR>
+                    <a:lnT w="12700" cap="flat" cmpd="sng" algn="ctr">
+                      <a:solidFill>
+                        <a:schemeClr val="tx1"/>
+                      </a:solidFill>
+                      <a:prstDash val="solid"/>
+                      <a:round/>
+                      <a:headEnd type="none" w="med" len="med"/>
+                      <a:tailEnd type="none" w="med" len="med"/>
+                    </a:lnT>
+                    <a:lnB w="12700" cap="flat" cmpd="sng" algn="ctr">
+                      <a:solidFill>
+                        <a:schemeClr val="tx1"/>
+                      </a:solidFill>
+                      <a:prstDash val="solid"/>
+                      <a:round/>
+                      <a:headEnd type="none" w="med" len="med"/>
+                      <a:tailEnd type="none" w="med" len="med"/>
+                    </a:lnB>
+                    <a:lnTlToBr w="12700" cmpd="sng">
+                      <a:noFill/>
+                      <a:prstDash val="solid"/>
+                    </a:lnTlToBr>
+                    <a:lnBlToTr w="12700" cmpd="sng">
+                      <a:noFill/>
+                      <a:prstDash val="solid"/>
+                    </a:lnBlToTr>
+                    <a:solidFill>
+                      <a:srgbClr val="FFC000"/>
+                    </a:solidFill>
                   </a:tcPr>
                 </a:tc>
                 <a:extLst>
@@ -10234,7 +10252,9 @@
                       <a:noFill/>
                       <a:prstDash val="solid"/>
                     </a:lnBlToTr>
-                    <a:noFill/>
+                    <a:solidFill>
+                      <a:srgbClr val="FFC000"/>
+                    </a:solidFill>
                   </a:tcPr>
                 </a:tc>
                 <a:tc>
@@ -10303,7 +10323,9 @@
                       <a:noFill/>
                       <a:prstDash val="solid"/>
                     </a:lnBlToTr>
-                    <a:noFill/>
+                    <a:solidFill>
+                      <a:srgbClr val="FFC000"/>
+                    </a:solidFill>
                   </a:tcPr>
                 </a:tc>
                 <a:tc>
@@ -10383,7 +10405,9 @@
                       <a:noFill/>
                       <a:prstDash val="solid"/>
                     </a:lnBlToTr>
-                    <a:noFill/>
+                    <a:solidFill>
+                      <a:srgbClr val="FFC000"/>
+                    </a:solidFill>
                   </a:tcPr>
                 </a:tc>
                 <a:extLst>
@@ -10467,7 +10491,9 @@
                       <a:noFill/>
                       <a:prstDash val="solid"/>
                     </a:lnBlToTr>
-                    <a:noFill/>
+                    <a:solidFill>
+                      <a:srgbClr val="FFC000"/>
+                    </a:solidFill>
                   </a:tcPr>
                 </a:tc>
                 <a:tc>
@@ -10536,7 +10562,9 @@
                       <a:noFill/>
                       <a:prstDash val="solid"/>
                     </a:lnBlToTr>
-                    <a:noFill/>
+                    <a:solidFill>
+                      <a:srgbClr val="FFC000"/>
+                    </a:solidFill>
                   </a:tcPr>
                 </a:tc>
                 <a:tc>
@@ -10616,7 +10644,9 @@
                       <a:noFill/>
                       <a:prstDash val="solid"/>
                     </a:lnBlToTr>
-                    <a:noFill/>
+                    <a:solidFill>
+                      <a:srgbClr val="FFC000"/>
+                    </a:solidFill>
                   </a:tcPr>
                 </a:tc>
                 <a:extLst>
@@ -10700,7 +10730,9 @@
                       <a:noFill/>
                       <a:prstDash val="solid"/>
                     </a:lnBlToTr>
-                    <a:noFill/>
+                    <a:solidFill>
+                      <a:srgbClr val="FFC000"/>
+                    </a:solidFill>
                   </a:tcPr>
                 </a:tc>
                 <a:tc>
@@ -10769,7 +10801,9 @@
                       <a:noFill/>
                       <a:prstDash val="solid"/>
                     </a:lnBlToTr>
-                    <a:noFill/>
+                    <a:solidFill>
+                      <a:srgbClr val="FFC000"/>
+                    </a:solidFill>
                   </a:tcPr>
                 </a:tc>
                 <a:tc>
@@ -10868,7 +10902,9 @@
                       <a:noFill/>
                       <a:prstDash val="solid"/>
                     </a:lnBlToTr>
-                    <a:noFill/>
+                    <a:solidFill>
+                      <a:srgbClr val="FFC000"/>
+                    </a:solidFill>
                   </a:tcPr>
                 </a:tc>
                 <a:extLst>
@@ -11025,7 +11061,7 @@
                         <a:buNone/>
                       </a:pPr>
                       <a:r>
-                        <a:rPr lang="zh-TW" altLang="en-US" sz="1400" b="0" i="0" u="none" strike="noStrike" baseline="0">
+                        <a:rPr lang="zh-TW" altLang="en-US" sz="1400" b="0" i="0" u="none" strike="noStrike" baseline="0" dirty="0">
                           <a:solidFill>
                             <a:srgbClr val="000000"/>
                           </a:solidFill>
@@ -11036,7 +11072,7 @@
                         <a:t>數值型 </a:t>
                       </a:r>
                       <a:r>
-                        <a:rPr lang="en-US" sz="1400" b="0" i="0" u="none" strike="noStrike" baseline="0">
+                        <a:rPr lang="en-US" sz="1400" b="0" i="0" u="none" strike="noStrike" baseline="0" dirty="0">
                           <a:solidFill>
                             <a:srgbClr val="000000"/>
                           </a:solidFill>
@@ -11250,7 +11286,7 @@
                         <a:buNone/>
                       </a:pPr>
                       <a:r>
-                        <a:rPr lang="en-US" sz="1400" b="0" i="0" u="none" strike="noStrike" baseline="0">
+                        <a:rPr lang="en-US" sz="1400" b="0" i="0" u="none" strike="noStrike" baseline="0" dirty="0">
                           <a:solidFill>
                             <a:srgbClr val="000000"/>
                           </a:solidFill>
@@ -11261,7 +11297,7 @@
                         <a:t>County centroid </a:t>
                       </a:r>
                       <a:r>
-                        <a:rPr lang="zh-TW" altLang="en-US" sz="1400" b="0" i="0" u="none" strike="noStrike" baseline="0">
+                        <a:rPr lang="zh-TW" altLang="en-US" sz="1400" b="0" i="0" u="none" strike="noStrike" baseline="0" dirty="0">
                           <a:solidFill>
                             <a:srgbClr val="000000"/>
                           </a:solidFill>
@@ -11272,7 +11308,7 @@
                         <a:t>的 </a:t>
                       </a:r>
                       <a:r>
-                        <a:rPr lang="en-US" sz="1400" b="0" i="0" u="none" strike="noStrike" baseline="0">
+                        <a:rPr lang="en-US" sz="1400" b="0" i="0" u="none" strike="noStrike" baseline="0" dirty="0">
                           <a:solidFill>
                             <a:srgbClr val="000000"/>
                           </a:solidFill>
@@ -11283,7 +11319,7 @@
                         <a:t>X </a:t>
                       </a:r>
                       <a:r>
-                        <a:rPr lang="zh-TW" altLang="en-US" sz="1400" b="0" i="0" u="none" strike="noStrike" baseline="0">
+                        <a:rPr lang="zh-TW" altLang="en-US" sz="1400" b="0" i="0" u="none" strike="noStrike" baseline="0" dirty="0">
                           <a:solidFill>
                             <a:srgbClr val="000000"/>
                           </a:solidFill>
@@ -22518,18 +22554,7 @@
                 <a:ea typeface="標楷體" panose="03000509000000000000" pitchFamily="65" charset="-120"/>
                 <a:cs typeface="CMU Serif" panose="02000603000000000000" pitchFamily="2" charset="0"/>
               </a:rPr>
-              <a:t>最佳 </a:t>
-            </a:r>
-            <a:r>
-              <a:rPr lang="en-US" altLang="zh-TW" dirty="0" err="1">
-                <a:solidFill>
-                  <a:srgbClr val="FF0000"/>
-                </a:solidFill>
-                <a:latin typeface="CMU Serif" panose="02000603000000000000" pitchFamily="2" charset="0"/>
-                <a:ea typeface="標楷體" panose="03000509000000000000" pitchFamily="65" charset="-120"/>
-                <a:cs typeface="CMU Serif" panose="02000603000000000000" pitchFamily="2" charset="0"/>
-              </a:rPr>
-              <a:t>bw</a:t>
+              <a:t>最佳近鄰數</a:t>
             </a:r>
             <a:r>
               <a:rPr lang="en-US" altLang="zh-TW" dirty="0">
@@ -28739,7 +28764,7 @@
                 <a:ea typeface="標楷體" panose="03000509000000000000" pitchFamily="65" charset="-120"/>
                 <a:cs typeface="CMU Serif" panose="02000603000000000000" pitchFamily="2" charset="0"/>
               </a:rPr>
-              <a:t>使用其他觀測點的資料訓練模型</a:t>
+              <a:t>除了迴歸點本身，也使用其他觀測點的資料訓練模型</a:t>
             </a:r>
             <a:endParaRPr lang="en-US" altLang="zh-TW" sz="2400" dirty="0">
               <a:latin typeface="CMU Serif" panose="02000603000000000000" pitchFamily="2" charset="0"/>

--- a/theory_01/report/GWR_report_01.pptx
+++ b/theory_01/report/GWR_report_01.pptx
@@ -21,10 +21,10 @@
     <p:sldId id="286" r:id="rId15"/>
     <p:sldId id="287" r:id="rId16"/>
     <p:sldId id="289" r:id="rId17"/>
-    <p:sldId id="291" r:id="rId18"/>
-    <p:sldId id="292" r:id="rId19"/>
-    <p:sldId id="293" r:id="rId20"/>
-    <p:sldId id="294" r:id="rId21"/>
+    <p:sldId id="294" r:id="rId18"/>
+    <p:sldId id="291" r:id="rId19"/>
+    <p:sldId id="292" r:id="rId20"/>
+    <p:sldId id="293" r:id="rId21"/>
     <p:sldId id="295" r:id="rId22"/>
     <p:sldId id="296" r:id="rId23"/>
     <p:sldId id="297" r:id="rId24"/>
@@ -11806,6 +11806,687 @@
         <p:cNvPr id="1" name="">
           <a:extLst>
             <a:ext uri="{FF2B5EF4-FFF2-40B4-BE49-F238E27FC236}">
+              <a16:creationId xmlns:a16="http://schemas.microsoft.com/office/drawing/2014/main" id="{591C40E2-50FE-365F-00D9-45FC12CC25DA}"/>
+            </a:ext>
+          </a:extLst>
+        </p:cNvPr>
+        <p:cNvGrpSpPr/>
+        <p:nvPr/>
+      </p:nvGrpSpPr>
+      <p:grpSpPr>
+        <a:xfrm>
+          <a:off x="0" y="0"/>
+          <a:ext cx="0" cy="0"/>
+          <a:chOff x="0" y="0"/>
+          <a:chExt cx="0" cy="0"/>
+        </a:xfrm>
+      </p:grpSpPr>
+      <p:sp>
+        <p:nvSpPr>
+          <p:cNvPr id="4" name="矩形 3">
+            <a:extLst>
+              <a:ext uri="{FF2B5EF4-FFF2-40B4-BE49-F238E27FC236}">
+                <a16:creationId xmlns:a16="http://schemas.microsoft.com/office/drawing/2014/main" id="{74CC0E3E-6FC9-F6BE-9C03-FFD140EBFE1E}"/>
+              </a:ext>
+            </a:extLst>
+          </p:cNvPr>
+          <p:cNvSpPr/>
+          <p:nvPr/>
+        </p:nvSpPr>
+        <p:spPr>
+          <a:xfrm>
+            <a:off x="0" y="6562726"/>
+            <a:ext cx="12192000" cy="295274"/>
+          </a:xfrm>
+          <a:prstGeom prst="rect">
+            <a:avLst/>
+          </a:prstGeom>
+          <a:solidFill>
+            <a:srgbClr val="3333B3"/>
+          </a:solidFill>
+        </p:spPr>
+        <p:style>
+          <a:lnRef idx="2">
+            <a:schemeClr val="accent1">
+              <a:shade val="15000"/>
+            </a:schemeClr>
+          </a:lnRef>
+          <a:fillRef idx="1">
+            <a:schemeClr val="accent1"/>
+          </a:fillRef>
+          <a:effectRef idx="0">
+            <a:schemeClr val="accent1"/>
+          </a:effectRef>
+          <a:fontRef idx="minor">
+            <a:schemeClr val="lt1"/>
+          </a:fontRef>
+        </p:style>
+        <p:txBody>
+          <a:bodyPr rtlCol="0" anchor="ctr"/>
+          <a:lstStyle/>
+          <a:p>
+            <a:pPr algn="r"/>
+            <a:r>
+              <a:rPr lang="en-US" altLang="zh-TW" dirty="0">
+                <a:latin typeface="標楷體" panose="03000509000000000000" pitchFamily="65" charset="-120"/>
+                <a:ea typeface="CMU Serif" panose="02000603000000000000" pitchFamily="2" charset="0"/>
+                <a:cs typeface="CMU Serif" panose="02000603000000000000" pitchFamily="2" charset="0"/>
+              </a:rPr>
+              <a:t> </a:t>
+            </a:r>
+            <a:endParaRPr lang="zh-TW" altLang="en-US" dirty="0">
+              <a:latin typeface="標楷體" panose="03000509000000000000" pitchFamily="65" charset="-120"/>
+              <a:cs typeface="CMU Serif" panose="02000603000000000000" pitchFamily="2" charset="0"/>
+            </a:endParaRPr>
+          </a:p>
+        </p:txBody>
+      </p:sp>
+      <p:sp>
+        <p:nvSpPr>
+          <p:cNvPr id="5" name="矩形 4">
+            <a:extLst>
+              <a:ext uri="{FF2B5EF4-FFF2-40B4-BE49-F238E27FC236}">
+                <a16:creationId xmlns:a16="http://schemas.microsoft.com/office/drawing/2014/main" id="{70622523-F8CB-AD13-8111-0D9B7698EB0A}"/>
+              </a:ext>
+            </a:extLst>
+          </p:cNvPr>
+          <p:cNvSpPr/>
+          <p:nvPr/>
+        </p:nvSpPr>
+        <p:spPr>
+          <a:xfrm>
+            <a:off x="0" y="0"/>
+            <a:ext cx="12192000" cy="666750"/>
+          </a:xfrm>
+          <a:prstGeom prst="rect">
+            <a:avLst/>
+          </a:prstGeom>
+          <a:solidFill>
+            <a:srgbClr val="3333B3"/>
+          </a:solidFill>
+        </p:spPr>
+        <p:style>
+          <a:lnRef idx="2">
+            <a:schemeClr val="accent1">
+              <a:shade val="15000"/>
+            </a:schemeClr>
+          </a:lnRef>
+          <a:fillRef idx="1">
+            <a:schemeClr val="accent1"/>
+          </a:fillRef>
+          <a:effectRef idx="0">
+            <a:schemeClr val="accent1"/>
+          </a:effectRef>
+          <a:fontRef idx="minor">
+            <a:schemeClr val="lt1"/>
+          </a:fontRef>
+        </p:style>
+        <p:txBody>
+          <a:bodyPr rtlCol="0" anchor="ctr"/>
+          <a:lstStyle/>
+          <a:p>
+            <a:r>
+              <a:rPr lang="en-US" altLang="zh-TW" sz="2800" dirty="0">
+                <a:latin typeface="CMU Serif" panose="02000603000000000000" pitchFamily="2" charset="0"/>
+                <a:ea typeface="標楷體" panose="03000509000000000000" pitchFamily="65" charset="-120"/>
+                <a:cs typeface="CMU Serif" panose="02000603000000000000" pitchFamily="2" charset="0"/>
+              </a:rPr>
+              <a:t> GWR</a:t>
+            </a:r>
+            <a:r>
+              <a:rPr lang="zh-TW" altLang="en-US" sz="2800" dirty="0">
+                <a:latin typeface="CMU Serif" panose="02000603000000000000" pitchFamily="2" charset="0"/>
+                <a:ea typeface="標楷體" panose="03000509000000000000" pitchFamily="65" charset="-120"/>
+                <a:cs typeface="CMU Serif" panose="02000603000000000000" pitchFamily="2" charset="0"/>
+              </a:rPr>
+              <a:t> 實作</a:t>
+            </a:r>
+            <a:r>
+              <a:rPr lang="en-US" altLang="zh-TW" sz="2800" dirty="0">
+                <a:latin typeface="CMU Serif" panose="02000603000000000000" pitchFamily="2" charset="0"/>
+                <a:ea typeface="標楷體" panose="03000509000000000000" pitchFamily="65" charset="-120"/>
+                <a:cs typeface="CMU Serif" panose="02000603000000000000" pitchFamily="2" charset="0"/>
+              </a:rPr>
+              <a:t>:</a:t>
+            </a:r>
+            <a:r>
+              <a:rPr lang="zh-TW" altLang="en-US" sz="2800" dirty="0">
+                <a:latin typeface="CMU Serif" panose="02000603000000000000" pitchFamily="2" charset="0"/>
+                <a:ea typeface="標楷體" panose="03000509000000000000" pitchFamily="65" charset="-120"/>
+                <a:cs typeface="CMU Serif" panose="02000603000000000000" pitchFamily="2" charset="0"/>
+              </a:rPr>
+              <a:t> 流程概述</a:t>
+            </a:r>
+          </a:p>
+        </p:txBody>
+      </p:sp>
+      <p:sp>
+        <p:nvSpPr>
+          <p:cNvPr id="7" name="箭號: 五邊形 6">
+            <a:extLst>
+              <a:ext uri="{FF2B5EF4-FFF2-40B4-BE49-F238E27FC236}">
+                <a16:creationId xmlns:a16="http://schemas.microsoft.com/office/drawing/2014/main" id="{FFC58CFD-3C75-6470-F716-253C4085C8A0}"/>
+              </a:ext>
+            </a:extLst>
+          </p:cNvPr>
+          <p:cNvSpPr/>
+          <p:nvPr/>
+        </p:nvSpPr>
+        <p:spPr>
+          <a:xfrm>
+            <a:off x="1432674" y="3071813"/>
+            <a:ext cx="1722903" cy="1085850"/>
+          </a:xfrm>
+          <a:prstGeom prst="homePlate">
+            <a:avLst>
+              <a:gd name="adj" fmla="val 42570"/>
+            </a:avLst>
+          </a:prstGeom>
+          <a:noFill/>
+          <a:ln>
+            <a:solidFill>
+              <a:schemeClr val="tx1"/>
+            </a:solidFill>
+          </a:ln>
+        </p:spPr>
+        <p:style>
+          <a:lnRef idx="2">
+            <a:schemeClr val="accent1">
+              <a:shade val="15000"/>
+            </a:schemeClr>
+          </a:lnRef>
+          <a:fillRef idx="1">
+            <a:schemeClr val="accent1"/>
+          </a:fillRef>
+          <a:effectRef idx="0">
+            <a:schemeClr val="accent1"/>
+          </a:effectRef>
+          <a:fontRef idx="minor">
+            <a:schemeClr val="lt1"/>
+          </a:fontRef>
+        </p:style>
+        <p:txBody>
+          <a:bodyPr rtlCol="0" anchor="ctr"/>
+          <a:lstStyle/>
+          <a:p>
+            <a:pPr algn="ctr"/>
+            <a:r>
+              <a:rPr lang="zh-TW" altLang="en-US" sz="2000" dirty="0">
+                <a:solidFill>
+                  <a:sysClr val="windowText" lastClr="000000"/>
+                </a:solidFill>
+                <a:latin typeface="CMU Serif" panose="02000603000000000000" pitchFamily="2" charset="0"/>
+                <a:ea typeface="標楷體" panose="03000509000000000000" pitchFamily="65" charset="-120"/>
+              </a:rPr>
+              <a:t>引入</a:t>
+            </a:r>
+            <a:r>
+              <a:rPr lang="en-US" altLang="zh-TW" sz="2000" dirty="0">
+                <a:solidFill>
+                  <a:sysClr val="windowText" lastClr="000000"/>
+                </a:solidFill>
+                <a:latin typeface="CMU Serif" panose="02000603000000000000" pitchFamily="2" charset="0"/>
+                <a:ea typeface="標楷體" panose="03000509000000000000" pitchFamily="65" charset="-120"/>
+              </a:rPr>
+              <a:t> </a:t>
+            </a:r>
+          </a:p>
+          <a:p>
+            <a:pPr algn="ctr"/>
+            <a:r>
+              <a:rPr lang="en-US" altLang="zh-TW" sz="2000" dirty="0">
+                <a:solidFill>
+                  <a:sysClr val="windowText" lastClr="000000"/>
+                </a:solidFill>
+                <a:latin typeface="CMU Serif" panose="02000603000000000000" pitchFamily="2" charset="0"/>
+                <a:ea typeface="標楷體" panose="03000509000000000000" pitchFamily="65" charset="-120"/>
+              </a:rPr>
+              <a:t>Georgia</a:t>
+            </a:r>
+          </a:p>
+          <a:p>
+            <a:pPr algn="ctr"/>
+            <a:r>
+              <a:rPr lang="zh-TW" altLang="en-US" sz="2000" dirty="0">
+                <a:solidFill>
+                  <a:sysClr val="windowText" lastClr="000000"/>
+                </a:solidFill>
+                <a:latin typeface="CMU Serif" panose="02000603000000000000" pitchFamily="2" charset="0"/>
+                <a:ea typeface="標楷體" panose="03000509000000000000" pitchFamily="65" charset="-120"/>
+              </a:rPr>
+              <a:t>資料</a:t>
+            </a:r>
+            <a:endParaRPr lang="en-US" altLang="zh-TW" sz="2000" dirty="0">
+              <a:solidFill>
+                <a:sysClr val="windowText" lastClr="000000"/>
+              </a:solidFill>
+              <a:latin typeface="CMU Serif" panose="02000603000000000000" pitchFamily="2" charset="0"/>
+              <a:ea typeface="標楷體" panose="03000509000000000000" pitchFamily="65" charset="-120"/>
+            </a:endParaRPr>
+          </a:p>
+        </p:txBody>
+      </p:sp>
+      <p:sp>
+        <p:nvSpPr>
+          <p:cNvPr id="16" name="箭號: 五邊形 15">
+            <a:extLst>
+              <a:ext uri="{FF2B5EF4-FFF2-40B4-BE49-F238E27FC236}">
+                <a16:creationId xmlns:a16="http://schemas.microsoft.com/office/drawing/2014/main" id="{686B263C-2EB6-A471-6E2E-6D476BD4952C}"/>
+              </a:ext>
+            </a:extLst>
+          </p:cNvPr>
+          <p:cNvSpPr/>
+          <p:nvPr/>
+        </p:nvSpPr>
+        <p:spPr>
+          <a:xfrm>
+            <a:off x="3288368" y="3071813"/>
+            <a:ext cx="1722903" cy="1085850"/>
+          </a:xfrm>
+          <a:prstGeom prst="homePlate">
+            <a:avLst>
+              <a:gd name="adj" fmla="val 42570"/>
+            </a:avLst>
+          </a:prstGeom>
+          <a:noFill/>
+          <a:ln>
+            <a:solidFill>
+              <a:schemeClr val="tx1"/>
+            </a:solidFill>
+          </a:ln>
+        </p:spPr>
+        <p:style>
+          <a:lnRef idx="2">
+            <a:schemeClr val="accent1">
+              <a:shade val="15000"/>
+            </a:schemeClr>
+          </a:lnRef>
+          <a:fillRef idx="1">
+            <a:schemeClr val="accent1"/>
+          </a:fillRef>
+          <a:effectRef idx="0">
+            <a:schemeClr val="accent1"/>
+          </a:effectRef>
+          <a:fontRef idx="minor">
+            <a:schemeClr val="lt1"/>
+          </a:fontRef>
+        </p:style>
+        <p:txBody>
+          <a:bodyPr rtlCol="0" anchor="ctr"/>
+          <a:lstStyle/>
+          <a:p>
+            <a:pPr algn="ctr"/>
+            <a:r>
+              <a:rPr lang="zh-TW" altLang="en-US" sz="2000" dirty="0">
+                <a:solidFill>
+                  <a:sysClr val="windowText" lastClr="000000"/>
+                </a:solidFill>
+                <a:latin typeface="CMU Serif" panose="02000603000000000000" pitchFamily="2" charset="0"/>
+                <a:ea typeface="標楷體" panose="03000509000000000000" pitchFamily="65" charset="-120"/>
+              </a:rPr>
+              <a:t>變數選擇</a:t>
+            </a:r>
+            <a:endParaRPr lang="en-US" altLang="zh-TW" sz="2000" dirty="0">
+              <a:solidFill>
+                <a:sysClr val="windowText" lastClr="000000"/>
+              </a:solidFill>
+              <a:latin typeface="CMU Serif" panose="02000603000000000000" pitchFamily="2" charset="0"/>
+              <a:ea typeface="標楷體" panose="03000509000000000000" pitchFamily="65" charset="-120"/>
+            </a:endParaRPr>
+          </a:p>
+        </p:txBody>
+      </p:sp>
+      <p:sp>
+        <p:nvSpPr>
+          <p:cNvPr id="17" name="箭號: 五邊形 16">
+            <a:extLst>
+              <a:ext uri="{FF2B5EF4-FFF2-40B4-BE49-F238E27FC236}">
+                <a16:creationId xmlns:a16="http://schemas.microsoft.com/office/drawing/2014/main" id="{E35CB248-282F-B643-E871-F213B62496BE}"/>
+              </a:ext>
+            </a:extLst>
+          </p:cNvPr>
+          <p:cNvSpPr/>
+          <p:nvPr/>
+        </p:nvSpPr>
+        <p:spPr>
+          <a:xfrm>
+            <a:off x="5215780" y="3071813"/>
+            <a:ext cx="1722903" cy="1085850"/>
+          </a:xfrm>
+          <a:prstGeom prst="homePlate">
+            <a:avLst>
+              <a:gd name="adj" fmla="val 42570"/>
+            </a:avLst>
+          </a:prstGeom>
+          <a:noFill/>
+          <a:ln>
+            <a:solidFill>
+              <a:schemeClr val="tx1"/>
+            </a:solidFill>
+          </a:ln>
+        </p:spPr>
+        <p:style>
+          <a:lnRef idx="2">
+            <a:schemeClr val="accent1">
+              <a:shade val="15000"/>
+            </a:schemeClr>
+          </a:lnRef>
+          <a:fillRef idx="1">
+            <a:schemeClr val="accent1"/>
+          </a:fillRef>
+          <a:effectRef idx="0">
+            <a:schemeClr val="accent1"/>
+          </a:effectRef>
+          <a:fontRef idx="minor">
+            <a:schemeClr val="lt1"/>
+          </a:fontRef>
+        </p:style>
+        <p:txBody>
+          <a:bodyPr rtlCol="0" anchor="ctr"/>
+          <a:lstStyle/>
+          <a:p>
+            <a:pPr algn="ctr"/>
+            <a:r>
+              <a:rPr lang="en-US" altLang="zh-TW" sz="2000" dirty="0" err="1">
+                <a:solidFill>
+                  <a:sysClr val="windowText" lastClr="000000"/>
+                </a:solidFill>
+                <a:latin typeface="CMU Serif" panose="02000603000000000000" pitchFamily="2" charset="0"/>
+                <a:ea typeface="標楷體" panose="03000509000000000000" pitchFamily="65" charset="-120"/>
+              </a:rPr>
+              <a:t>bw.gwr</a:t>
+            </a:r>
+            <a:r>
+              <a:rPr lang="en-US" altLang="zh-TW" sz="2000" dirty="0">
+                <a:solidFill>
+                  <a:sysClr val="windowText" lastClr="000000"/>
+                </a:solidFill>
+                <a:latin typeface="CMU Serif" panose="02000603000000000000" pitchFamily="2" charset="0"/>
+                <a:ea typeface="標楷體" panose="03000509000000000000" pitchFamily="65" charset="-120"/>
+              </a:rPr>
+              <a:t>()</a:t>
+            </a:r>
+          </a:p>
+          <a:p>
+            <a:pPr algn="ctr"/>
+            <a:r>
+              <a:rPr lang="zh-TW" altLang="en-US" sz="2000" dirty="0">
+                <a:solidFill>
+                  <a:sysClr val="windowText" lastClr="000000"/>
+                </a:solidFill>
+                <a:latin typeface="CMU Serif" panose="02000603000000000000" pitchFamily="2" charset="0"/>
+                <a:ea typeface="標楷體" panose="03000509000000000000" pitchFamily="65" charset="-120"/>
+              </a:rPr>
+              <a:t>帶寬選擇</a:t>
+            </a:r>
+            <a:endParaRPr lang="en-US" altLang="zh-TW" sz="2000" dirty="0">
+              <a:solidFill>
+                <a:sysClr val="windowText" lastClr="000000"/>
+              </a:solidFill>
+              <a:latin typeface="CMU Serif" panose="02000603000000000000" pitchFamily="2" charset="0"/>
+              <a:ea typeface="標楷體" panose="03000509000000000000" pitchFamily="65" charset="-120"/>
+            </a:endParaRPr>
+          </a:p>
+        </p:txBody>
+      </p:sp>
+      <p:sp>
+        <p:nvSpPr>
+          <p:cNvPr id="18" name="箭號: 五邊形 17">
+            <a:extLst>
+              <a:ext uri="{FF2B5EF4-FFF2-40B4-BE49-F238E27FC236}">
+                <a16:creationId xmlns:a16="http://schemas.microsoft.com/office/drawing/2014/main" id="{31E061A4-46E0-9EF3-E7A9-40B188F168F1}"/>
+              </a:ext>
+            </a:extLst>
+          </p:cNvPr>
+          <p:cNvSpPr/>
+          <p:nvPr/>
+        </p:nvSpPr>
+        <p:spPr>
+          <a:xfrm>
+            <a:off x="7143192" y="3071813"/>
+            <a:ext cx="1722903" cy="1085850"/>
+          </a:xfrm>
+          <a:prstGeom prst="homePlate">
+            <a:avLst>
+              <a:gd name="adj" fmla="val 42570"/>
+            </a:avLst>
+          </a:prstGeom>
+          <a:noFill/>
+          <a:ln>
+            <a:solidFill>
+              <a:schemeClr val="tx1"/>
+            </a:solidFill>
+          </a:ln>
+        </p:spPr>
+        <p:style>
+          <a:lnRef idx="2">
+            <a:schemeClr val="accent1">
+              <a:shade val="15000"/>
+            </a:schemeClr>
+          </a:lnRef>
+          <a:fillRef idx="1">
+            <a:schemeClr val="accent1"/>
+          </a:fillRef>
+          <a:effectRef idx="0">
+            <a:schemeClr val="accent1"/>
+          </a:effectRef>
+          <a:fontRef idx="minor">
+            <a:schemeClr val="lt1"/>
+          </a:fontRef>
+        </p:style>
+        <p:txBody>
+          <a:bodyPr rtlCol="0" anchor="ctr"/>
+          <a:lstStyle/>
+          <a:p>
+            <a:pPr algn="ctr"/>
+            <a:r>
+              <a:rPr lang="zh-TW" altLang="en-US" sz="2000" dirty="0">
+                <a:solidFill>
+                  <a:sysClr val="windowText" lastClr="000000"/>
+                </a:solidFill>
+                <a:latin typeface="CMU Serif" panose="02000603000000000000" pitchFamily="2" charset="0"/>
+                <a:ea typeface="標楷體" panose="03000509000000000000" pitchFamily="65" charset="-120"/>
+              </a:rPr>
+              <a:t>建構 </a:t>
+            </a:r>
+            <a:r>
+              <a:rPr lang="en-US" altLang="zh-TW" sz="2000" dirty="0">
+                <a:solidFill>
+                  <a:sysClr val="windowText" lastClr="000000"/>
+                </a:solidFill>
+                <a:latin typeface="CMU Serif" panose="02000603000000000000" pitchFamily="2" charset="0"/>
+                <a:ea typeface="標楷體" panose="03000509000000000000" pitchFamily="65" charset="-120"/>
+              </a:rPr>
+              <a:t>40</a:t>
+            </a:r>
+            <a:r>
+              <a:rPr lang="zh-TW" altLang="en-US" sz="2000" dirty="0">
+                <a:solidFill>
+                  <a:sysClr val="windowText" lastClr="000000"/>
+                </a:solidFill>
+                <a:latin typeface="CMU Serif" panose="02000603000000000000" pitchFamily="2" charset="0"/>
+                <a:ea typeface="標楷體" panose="03000509000000000000" pitchFamily="65" charset="-120"/>
+              </a:rPr>
+              <a:t>*</a:t>
+            </a:r>
+            <a:r>
+              <a:rPr lang="en-US" altLang="zh-TW" sz="2000" dirty="0">
+                <a:solidFill>
+                  <a:sysClr val="windowText" lastClr="000000"/>
+                </a:solidFill>
+                <a:latin typeface="CMU Serif" panose="02000603000000000000" pitchFamily="2" charset="0"/>
+                <a:ea typeface="標楷體" panose="03000509000000000000" pitchFamily="65" charset="-120"/>
+              </a:rPr>
+              <a:t>40</a:t>
+            </a:r>
+          </a:p>
+          <a:p>
+            <a:pPr algn="ctr"/>
+            <a:r>
+              <a:rPr lang="zh-TW" altLang="en-US" sz="2000" dirty="0">
+                <a:solidFill>
+                  <a:sysClr val="windowText" lastClr="000000"/>
+                </a:solidFill>
+                <a:latin typeface="CMU Serif" panose="02000603000000000000" pitchFamily="2" charset="0"/>
+                <a:ea typeface="標楷體" panose="03000509000000000000" pitchFamily="65" charset="-120"/>
+              </a:rPr>
+              <a:t>迴歸點</a:t>
+            </a:r>
+            <a:endParaRPr lang="en-US" altLang="zh-TW" sz="2000" dirty="0">
+              <a:solidFill>
+                <a:sysClr val="windowText" lastClr="000000"/>
+              </a:solidFill>
+              <a:latin typeface="CMU Serif" panose="02000603000000000000" pitchFamily="2" charset="0"/>
+              <a:ea typeface="標楷體" panose="03000509000000000000" pitchFamily="65" charset="-120"/>
+            </a:endParaRPr>
+          </a:p>
+        </p:txBody>
+      </p:sp>
+      <p:sp>
+        <p:nvSpPr>
+          <p:cNvPr id="19" name="箭號: 五邊形 18">
+            <a:extLst>
+              <a:ext uri="{FF2B5EF4-FFF2-40B4-BE49-F238E27FC236}">
+                <a16:creationId xmlns:a16="http://schemas.microsoft.com/office/drawing/2014/main" id="{F448FC09-B087-7B31-A7C7-4F875428B13A}"/>
+              </a:ext>
+            </a:extLst>
+          </p:cNvPr>
+          <p:cNvSpPr/>
+          <p:nvPr/>
+        </p:nvSpPr>
+        <p:spPr>
+          <a:xfrm>
+            <a:off x="9064158" y="3071813"/>
+            <a:ext cx="1722903" cy="1085850"/>
+          </a:xfrm>
+          <a:prstGeom prst="homePlate">
+            <a:avLst>
+              <a:gd name="adj" fmla="val 42570"/>
+            </a:avLst>
+          </a:prstGeom>
+          <a:noFill/>
+          <a:ln>
+            <a:solidFill>
+              <a:schemeClr val="tx1"/>
+            </a:solidFill>
+          </a:ln>
+        </p:spPr>
+        <p:style>
+          <a:lnRef idx="2">
+            <a:schemeClr val="accent1">
+              <a:shade val="15000"/>
+            </a:schemeClr>
+          </a:lnRef>
+          <a:fillRef idx="1">
+            <a:schemeClr val="accent1"/>
+          </a:fillRef>
+          <a:effectRef idx="0">
+            <a:schemeClr val="accent1"/>
+          </a:effectRef>
+          <a:fontRef idx="minor">
+            <a:schemeClr val="lt1"/>
+          </a:fontRef>
+        </p:style>
+        <p:txBody>
+          <a:bodyPr rtlCol="0" anchor="ctr"/>
+          <a:lstStyle/>
+          <a:p>
+            <a:pPr algn="ctr"/>
+            <a:r>
+              <a:rPr lang="zh-TW" altLang="en-US" sz="2000" dirty="0">
+                <a:solidFill>
+                  <a:sysClr val="windowText" lastClr="000000"/>
+                </a:solidFill>
+                <a:latin typeface="CMU Serif" panose="02000603000000000000" pitchFamily="2" charset="0"/>
+                <a:ea typeface="標楷體" panose="03000509000000000000" pitchFamily="65" charset="-120"/>
+              </a:rPr>
+              <a:t>配適模型</a:t>
+            </a:r>
+            <a:endParaRPr lang="en-US" altLang="zh-TW" sz="2000" dirty="0">
+              <a:solidFill>
+                <a:sysClr val="windowText" lastClr="000000"/>
+              </a:solidFill>
+              <a:latin typeface="CMU Serif" panose="02000603000000000000" pitchFamily="2" charset="0"/>
+              <a:ea typeface="標楷體" panose="03000509000000000000" pitchFamily="65" charset="-120"/>
+            </a:endParaRPr>
+          </a:p>
+        </p:txBody>
+      </p:sp>
+      <p:sp>
+        <p:nvSpPr>
+          <p:cNvPr id="21" name="文字方塊 20">
+            <a:extLst>
+              <a:ext uri="{FF2B5EF4-FFF2-40B4-BE49-F238E27FC236}">
+                <a16:creationId xmlns:a16="http://schemas.microsoft.com/office/drawing/2014/main" id="{36F7D3B4-012F-5C8C-966B-E31D417BF016}"/>
+              </a:ext>
+            </a:extLst>
+          </p:cNvPr>
+          <p:cNvSpPr txBox="1"/>
+          <p:nvPr/>
+        </p:nvSpPr>
+        <p:spPr>
+          <a:xfrm>
+            <a:off x="5144062" y="4157663"/>
+            <a:ext cx="1987362" cy="369332"/>
+          </a:xfrm>
+          <a:prstGeom prst="rect">
+            <a:avLst/>
+          </a:prstGeom>
+          <a:noFill/>
+        </p:spPr>
+        <p:txBody>
+          <a:bodyPr wrap="square">
+            <a:spAutoFit/>
+          </a:bodyPr>
+          <a:lstStyle/>
+          <a:p>
+            <a:r>
+              <a:rPr lang="zh-TW" altLang="en-US" dirty="0">
+                <a:solidFill>
+                  <a:srgbClr val="FF0000"/>
+                </a:solidFill>
+                <a:latin typeface="CMU Serif" panose="02000603000000000000" pitchFamily="2" charset="0"/>
+                <a:ea typeface="標楷體" panose="03000509000000000000" pitchFamily="65" charset="-120"/>
+                <a:cs typeface="CMU Serif" panose="02000603000000000000" pitchFamily="2" charset="0"/>
+              </a:rPr>
+              <a:t>最佳近鄰數</a:t>
+            </a:r>
+            <a:r>
+              <a:rPr lang="en-US" altLang="zh-TW" dirty="0">
+                <a:solidFill>
+                  <a:srgbClr val="FF0000"/>
+                </a:solidFill>
+                <a:latin typeface="CMU Serif" panose="02000603000000000000" pitchFamily="2" charset="0"/>
+                <a:ea typeface="標楷體" panose="03000509000000000000" pitchFamily="65" charset="-120"/>
+                <a:cs typeface="CMU Serif" panose="02000603000000000000" pitchFamily="2" charset="0"/>
+              </a:rPr>
+              <a:t> : 136</a:t>
+            </a:r>
+            <a:endParaRPr lang="zh-TW" altLang="en-US" dirty="0"/>
+          </a:p>
+        </p:txBody>
+      </p:sp>
+    </p:spTree>
+    <p:extLst>
+      <p:ext uri="{BB962C8B-B14F-4D97-AF65-F5344CB8AC3E}">
+        <p14:creationId xmlns:p14="http://schemas.microsoft.com/office/powerpoint/2010/main" val="4027056687"/>
+      </p:ext>
+    </p:extLst>
+  </p:cSld>
+  <p:clrMapOvr>
+    <a:masterClrMapping/>
+  </p:clrMapOvr>
+</p:sld>
+</file>
+
+<file path=ppt/slides/slide18.xml><?xml version="1.0" encoding="utf-8"?>
+<p:sld xmlns:a="http://schemas.openxmlformats.org/drawingml/2006/main" xmlns:r="http://schemas.openxmlformats.org/officeDocument/2006/relationships" xmlns:p="http://schemas.openxmlformats.org/presentationml/2006/main">
+  <p:cSld>
+    <p:spTree>
+      <p:nvGrpSpPr>
+        <p:cNvPr id="1" name="">
+          <a:extLst>
+            <a:ext uri="{FF2B5EF4-FFF2-40B4-BE49-F238E27FC236}">
               <a16:creationId xmlns:a16="http://schemas.microsoft.com/office/drawing/2014/main" id="{969DA5F9-0209-64EC-49F1-46F6BE55E4F2}"/>
             </a:ext>
           </a:extLst>
@@ -15081,7 +15762,7 @@
 </p:sld>
 </file>
 
-<file path=ppt/slides/slide18.xml><?xml version="1.0" encoding="utf-8"?>
+<file path=ppt/slides/slide19.xml><?xml version="1.0" encoding="utf-8"?>
 <p:sld xmlns:a="http://schemas.openxmlformats.org/drawingml/2006/main" xmlns:r="http://schemas.openxmlformats.org/officeDocument/2006/relationships" xmlns:p="http://schemas.openxmlformats.org/presentationml/2006/main">
   <p:cSld>
     <p:spTree>
@@ -19333,2180 +20014,6 @@
     <p:extLst>
       <p:ext uri="{BB962C8B-B14F-4D97-AF65-F5344CB8AC3E}">
         <p14:creationId xmlns:p14="http://schemas.microsoft.com/office/powerpoint/2010/main" val="1215226116"/>
-      </p:ext>
-    </p:extLst>
-  </p:cSld>
-  <p:clrMapOvr>
-    <a:masterClrMapping/>
-  </p:clrMapOvr>
-</p:sld>
-</file>
-
-<file path=ppt/slides/slide19.xml><?xml version="1.0" encoding="utf-8"?>
-<p:sld xmlns:a="http://schemas.openxmlformats.org/drawingml/2006/main" xmlns:r="http://schemas.openxmlformats.org/officeDocument/2006/relationships" xmlns:p="http://schemas.openxmlformats.org/presentationml/2006/main">
-  <p:cSld>
-    <p:spTree>
-      <p:nvGrpSpPr>
-        <p:cNvPr id="1" name="">
-          <a:extLst>
-            <a:ext uri="{FF2B5EF4-FFF2-40B4-BE49-F238E27FC236}">
-              <a16:creationId xmlns:a16="http://schemas.microsoft.com/office/drawing/2014/main" id="{E6B586D2-C368-D2F0-D365-1DCC11A01B35}"/>
-            </a:ext>
-          </a:extLst>
-        </p:cNvPr>
-        <p:cNvGrpSpPr/>
-        <p:nvPr/>
-      </p:nvGrpSpPr>
-      <p:grpSpPr>
-        <a:xfrm>
-          <a:off x="0" y="0"/>
-          <a:ext cx="0" cy="0"/>
-          <a:chOff x="0" y="0"/>
-          <a:chExt cx="0" cy="0"/>
-        </a:xfrm>
-      </p:grpSpPr>
-      <p:sp>
-        <p:nvSpPr>
-          <p:cNvPr id="4" name="矩形 3">
-            <a:extLst>
-              <a:ext uri="{FF2B5EF4-FFF2-40B4-BE49-F238E27FC236}">
-                <a16:creationId xmlns:a16="http://schemas.microsoft.com/office/drawing/2014/main" id="{EBF8C0C8-84C1-40CD-360B-EE31B7A9CF84}"/>
-              </a:ext>
-            </a:extLst>
-          </p:cNvPr>
-          <p:cNvSpPr/>
-          <p:nvPr/>
-        </p:nvSpPr>
-        <p:spPr>
-          <a:xfrm>
-            <a:off x="0" y="6562726"/>
-            <a:ext cx="12192000" cy="295274"/>
-          </a:xfrm>
-          <a:prstGeom prst="rect">
-            <a:avLst/>
-          </a:prstGeom>
-          <a:solidFill>
-            <a:srgbClr val="3333B3"/>
-          </a:solidFill>
-        </p:spPr>
-        <p:style>
-          <a:lnRef idx="2">
-            <a:schemeClr val="accent1">
-              <a:shade val="15000"/>
-            </a:schemeClr>
-          </a:lnRef>
-          <a:fillRef idx="1">
-            <a:schemeClr val="accent1"/>
-          </a:fillRef>
-          <a:effectRef idx="0">
-            <a:schemeClr val="accent1"/>
-          </a:effectRef>
-          <a:fontRef idx="minor">
-            <a:schemeClr val="lt1"/>
-          </a:fontRef>
-        </p:style>
-        <p:txBody>
-          <a:bodyPr rtlCol="0" anchor="ctr"/>
-          <a:lstStyle/>
-          <a:p>
-            <a:pPr algn="r"/>
-            <a:r>
-              <a:rPr lang="en-US" altLang="zh-TW" dirty="0">
-                <a:latin typeface="標楷體" panose="03000509000000000000" pitchFamily="65" charset="-120"/>
-                <a:ea typeface="CMU Serif" panose="02000603000000000000" pitchFamily="2" charset="0"/>
-                <a:cs typeface="CMU Serif" panose="02000603000000000000" pitchFamily="2" charset="0"/>
-              </a:rPr>
-              <a:t> </a:t>
-            </a:r>
-            <a:endParaRPr lang="zh-TW" altLang="en-US" dirty="0">
-              <a:latin typeface="標楷體" panose="03000509000000000000" pitchFamily="65" charset="-120"/>
-              <a:cs typeface="CMU Serif" panose="02000603000000000000" pitchFamily="2" charset="0"/>
-            </a:endParaRPr>
-          </a:p>
-        </p:txBody>
-      </p:sp>
-      <p:sp>
-        <p:nvSpPr>
-          <p:cNvPr id="5" name="矩形 4">
-            <a:extLst>
-              <a:ext uri="{FF2B5EF4-FFF2-40B4-BE49-F238E27FC236}">
-                <a16:creationId xmlns:a16="http://schemas.microsoft.com/office/drawing/2014/main" id="{E7D31879-CA96-01E4-70D2-1FF71967ED73}"/>
-              </a:ext>
-            </a:extLst>
-          </p:cNvPr>
-          <p:cNvSpPr/>
-          <p:nvPr/>
-        </p:nvSpPr>
-        <p:spPr>
-          <a:xfrm>
-            <a:off x="0" y="0"/>
-            <a:ext cx="12192000" cy="666750"/>
-          </a:xfrm>
-          <a:prstGeom prst="rect">
-            <a:avLst/>
-          </a:prstGeom>
-          <a:solidFill>
-            <a:srgbClr val="3333B3"/>
-          </a:solidFill>
-        </p:spPr>
-        <p:style>
-          <a:lnRef idx="2">
-            <a:schemeClr val="accent1">
-              <a:shade val="15000"/>
-            </a:schemeClr>
-          </a:lnRef>
-          <a:fillRef idx="1">
-            <a:schemeClr val="accent1"/>
-          </a:fillRef>
-          <a:effectRef idx="0">
-            <a:schemeClr val="accent1"/>
-          </a:effectRef>
-          <a:fontRef idx="minor">
-            <a:schemeClr val="lt1"/>
-          </a:fontRef>
-        </p:style>
-        <p:txBody>
-          <a:bodyPr rtlCol="0" anchor="ctr"/>
-          <a:lstStyle/>
-          <a:p>
-            <a:r>
-              <a:rPr lang="en-US" altLang="zh-TW" sz="2800" dirty="0">
-                <a:latin typeface="CMU Serif" panose="02000603000000000000" pitchFamily="2" charset="0"/>
-                <a:ea typeface="標楷體" panose="03000509000000000000" pitchFamily="65" charset="-120"/>
-                <a:cs typeface="CMU Serif" panose="02000603000000000000" pitchFamily="2" charset="0"/>
-              </a:rPr>
-              <a:t> GWR</a:t>
-            </a:r>
-            <a:r>
-              <a:rPr lang="zh-TW" altLang="en-US" sz="2800" dirty="0">
-                <a:latin typeface="CMU Serif" panose="02000603000000000000" pitchFamily="2" charset="0"/>
-                <a:ea typeface="標楷體" panose="03000509000000000000" pitchFamily="65" charset="-120"/>
-                <a:cs typeface="CMU Serif" panose="02000603000000000000" pitchFamily="2" charset="0"/>
-              </a:rPr>
-              <a:t> 實作</a:t>
-            </a:r>
-            <a:r>
-              <a:rPr lang="en-US" altLang="zh-TW" sz="2800" dirty="0">
-                <a:latin typeface="CMU Serif" panose="02000603000000000000" pitchFamily="2" charset="0"/>
-                <a:ea typeface="標楷體" panose="03000509000000000000" pitchFamily="65" charset="-120"/>
-                <a:cs typeface="CMU Serif" panose="02000603000000000000" pitchFamily="2" charset="0"/>
-              </a:rPr>
-              <a:t>:</a:t>
-            </a:r>
-            <a:r>
-              <a:rPr lang="zh-TW" altLang="en-US" sz="2800" dirty="0">
-                <a:latin typeface="CMU Serif" panose="02000603000000000000" pitchFamily="2" charset="0"/>
-                <a:ea typeface="標楷體" panose="03000509000000000000" pitchFamily="65" charset="-120"/>
-                <a:cs typeface="CMU Serif" panose="02000603000000000000" pitchFamily="2" charset="0"/>
-              </a:rPr>
-              <a:t> 使用 </a:t>
-            </a:r>
-            <a:r>
-              <a:rPr lang="en-US" altLang="zh-TW" sz="2800" dirty="0">
-                <a:latin typeface="CMU Serif" panose="02000603000000000000" pitchFamily="2" charset="0"/>
-                <a:ea typeface="標楷體" panose="03000509000000000000" pitchFamily="65" charset="-120"/>
-                <a:cs typeface="CMU Serif" panose="02000603000000000000" pitchFamily="2" charset="0"/>
-              </a:rPr>
-              <a:t>R Package “</a:t>
-            </a:r>
-            <a:r>
-              <a:rPr lang="en-US" altLang="zh-TW" sz="2800" dirty="0" err="1">
-                <a:latin typeface="CMU Serif" panose="02000603000000000000" pitchFamily="2" charset="0"/>
-                <a:ea typeface="標楷體" panose="03000509000000000000" pitchFamily="65" charset="-120"/>
-                <a:cs typeface="CMU Serif" panose="02000603000000000000" pitchFamily="2" charset="0"/>
-              </a:rPr>
-              <a:t>GWmodel</a:t>
-            </a:r>
-            <a:r>
-              <a:rPr lang="en-US" altLang="zh-TW" sz="2800" dirty="0">
-                <a:latin typeface="CMU Serif" panose="02000603000000000000" pitchFamily="2" charset="0"/>
-                <a:ea typeface="標楷體" panose="03000509000000000000" pitchFamily="65" charset="-120"/>
-                <a:cs typeface="CMU Serif" panose="02000603000000000000" pitchFamily="2" charset="0"/>
-              </a:rPr>
-              <a:t>”</a:t>
-            </a:r>
-            <a:endParaRPr lang="zh-TW" altLang="en-US" sz="2800" dirty="0">
-              <a:latin typeface="CMU Serif" panose="02000603000000000000" pitchFamily="2" charset="0"/>
-              <a:ea typeface="標楷體" panose="03000509000000000000" pitchFamily="65" charset="-120"/>
-              <a:cs typeface="CMU Serif" panose="02000603000000000000" pitchFamily="2" charset="0"/>
-            </a:endParaRPr>
-          </a:p>
-        </p:txBody>
-      </p:sp>
-      <p:sp>
-        <p:nvSpPr>
-          <p:cNvPr id="10" name="文字方塊 9">
-            <a:extLst>
-              <a:ext uri="{FF2B5EF4-FFF2-40B4-BE49-F238E27FC236}">
-                <a16:creationId xmlns:a16="http://schemas.microsoft.com/office/drawing/2014/main" id="{BFB483B1-1C52-D533-5685-89C3CF16CFE8}"/>
-              </a:ext>
-            </a:extLst>
-          </p:cNvPr>
-          <p:cNvSpPr txBox="1"/>
-          <p:nvPr/>
-        </p:nvSpPr>
-        <p:spPr>
-          <a:xfrm>
-            <a:off x="1405215" y="1397983"/>
-            <a:ext cx="3023349" cy="400110"/>
-          </a:xfrm>
-          <a:prstGeom prst="rect">
-            <a:avLst/>
-          </a:prstGeom>
-          <a:noFill/>
-        </p:spPr>
-        <p:txBody>
-          <a:bodyPr wrap="square">
-            <a:spAutoFit/>
-          </a:bodyPr>
-          <a:lstStyle/>
-          <a:p>
-            <a:r>
-              <a:rPr lang="en-US" altLang="zh-TW" sz="2000" b="1" dirty="0" err="1">
-                <a:latin typeface="CMU Serif" panose="02000603000000000000" pitchFamily="2" charset="0"/>
-                <a:ea typeface="標楷體" panose="03000509000000000000" pitchFamily="65" charset="-120"/>
-                <a:cs typeface="CMU Serif" panose="02000603000000000000" pitchFamily="2" charset="0"/>
-              </a:rPr>
-              <a:t>gwr.basic</a:t>
-            </a:r>
-            <a:r>
-              <a:rPr lang="en-US" altLang="zh-TW" sz="2000" b="1" dirty="0">
-                <a:latin typeface="CMU Serif" panose="02000603000000000000" pitchFamily="2" charset="0"/>
-                <a:ea typeface="標楷體" panose="03000509000000000000" pitchFamily="65" charset="-120"/>
-                <a:cs typeface="CMU Serif" panose="02000603000000000000" pitchFamily="2" charset="0"/>
-              </a:rPr>
-              <a:t>()</a:t>
-            </a:r>
-            <a:r>
-              <a:rPr lang="zh-TW" altLang="en-US" sz="2000" b="1" dirty="0">
-                <a:latin typeface="CMU Serif" panose="02000603000000000000" pitchFamily="2" charset="0"/>
-                <a:ea typeface="標楷體" panose="03000509000000000000" pitchFamily="65" charset="-120"/>
-                <a:cs typeface="CMU Serif" panose="02000603000000000000" pitchFamily="2" charset="0"/>
-              </a:rPr>
-              <a:t> 回傳內容</a:t>
-            </a:r>
-            <a:endParaRPr lang="zh-TW" altLang="en-US" sz="2000" b="1" dirty="0"/>
-          </a:p>
-        </p:txBody>
-      </p:sp>
-      <p:sp>
-        <p:nvSpPr>
-          <p:cNvPr id="13" name="文字方塊 12">
-            <a:extLst>
-              <a:ext uri="{FF2B5EF4-FFF2-40B4-BE49-F238E27FC236}">
-                <a16:creationId xmlns:a16="http://schemas.microsoft.com/office/drawing/2014/main" id="{D8088EE7-321C-197A-D49F-1C8A3223D8B7}"/>
-              </a:ext>
-            </a:extLst>
-          </p:cNvPr>
-          <p:cNvSpPr txBox="1"/>
-          <p:nvPr/>
-        </p:nvSpPr>
-        <p:spPr>
-          <a:xfrm>
-            <a:off x="6735856" y="5540188"/>
-            <a:ext cx="3797674" cy="276999"/>
-          </a:xfrm>
-          <a:prstGeom prst="rect">
-            <a:avLst/>
-          </a:prstGeom>
-          <a:noFill/>
-        </p:spPr>
-        <p:txBody>
-          <a:bodyPr wrap="square">
-            <a:spAutoFit/>
-          </a:bodyPr>
-          <a:lstStyle/>
-          <a:p>
-            <a:pPr algn="ctr"/>
-            <a:r>
-              <a:rPr lang="en-US" altLang="zh-TW" sz="1200" dirty="0">
-                <a:latin typeface="CMU Serif" panose="02000603000000000000" pitchFamily="2" charset="0"/>
-                <a:ea typeface="標楷體" panose="03000509000000000000" pitchFamily="65" charset="-120"/>
-                <a:cs typeface="CMU Serif" panose="02000603000000000000" pitchFamily="2" charset="0"/>
-              </a:rPr>
-              <a:t>Source: package ‘</a:t>
-            </a:r>
-            <a:r>
-              <a:rPr lang="en-US" altLang="zh-TW" sz="1200" dirty="0" err="1">
-                <a:latin typeface="CMU Serif" panose="02000603000000000000" pitchFamily="2" charset="0"/>
-                <a:ea typeface="標楷體" panose="03000509000000000000" pitchFamily="65" charset="-120"/>
-                <a:cs typeface="CMU Serif" panose="02000603000000000000" pitchFamily="2" charset="0"/>
-              </a:rPr>
-              <a:t>GWmodel</a:t>
-            </a:r>
-            <a:r>
-              <a:rPr lang="en-US" altLang="zh-TW" sz="1200" dirty="0">
-                <a:latin typeface="CMU Serif" panose="02000603000000000000" pitchFamily="2" charset="0"/>
-                <a:ea typeface="標楷體" panose="03000509000000000000" pitchFamily="65" charset="-120"/>
-                <a:cs typeface="CMU Serif" panose="02000603000000000000" pitchFamily="2" charset="0"/>
-              </a:rPr>
-              <a:t>’ documentation p.40</a:t>
-            </a:r>
-            <a:endParaRPr lang="zh-TW" altLang="en-US" sz="1200" dirty="0">
-              <a:latin typeface="CMU Serif" panose="02000603000000000000" pitchFamily="2" charset="0"/>
-              <a:ea typeface="標楷體" panose="03000509000000000000" pitchFamily="65" charset="-120"/>
-              <a:cs typeface="CMU Serif" panose="02000603000000000000" pitchFamily="2" charset="0"/>
-            </a:endParaRPr>
-          </a:p>
-        </p:txBody>
-      </p:sp>
-      <p:graphicFrame>
-        <p:nvGraphicFramePr>
-          <p:cNvPr id="3" name="表格 2">
-            <a:extLst>
-              <a:ext uri="{FF2B5EF4-FFF2-40B4-BE49-F238E27FC236}">
-                <a16:creationId xmlns:a16="http://schemas.microsoft.com/office/drawing/2014/main" id="{5900EB47-CF1A-0BB8-392D-277741D5F247}"/>
-              </a:ext>
-            </a:extLst>
-          </p:cNvPr>
-          <p:cNvGraphicFramePr>
-            <a:graphicFrameLocks noGrp="1"/>
-          </p:cNvGraphicFramePr>
-          <p:nvPr>
-            <p:extLst>
-              <p:ext uri="{D42A27DB-BD31-4B8C-83A1-F6EECF244321}">
-                <p14:modId xmlns:p14="http://schemas.microsoft.com/office/powerpoint/2010/main" val="2124978920"/>
-              </p:ext>
-            </p:extLst>
-          </p:nvPr>
-        </p:nvGraphicFramePr>
-        <p:xfrm>
-          <a:off x="1990165" y="1859714"/>
-          <a:ext cx="8211671" cy="3680474"/>
-        </p:xfrm>
-        <a:graphic>
-          <a:graphicData uri="http://schemas.openxmlformats.org/drawingml/2006/table">
-            <a:tbl>
-              <a:tblPr/>
-              <a:tblGrid>
-                <a:gridCol w="1568856">
-                  <a:extLst>
-                    <a:ext uri="{9D8B030D-6E8A-4147-A177-3AD203B41FA5}">
-                      <a16:colId xmlns:a16="http://schemas.microsoft.com/office/drawing/2014/main" val="3775910832"/>
-                    </a:ext>
-                  </a:extLst>
-                </a:gridCol>
-                <a:gridCol w="5381772">
-                  <a:extLst>
-                    <a:ext uri="{9D8B030D-6E8A-4147-A177-3AD203B41FA5}">
-                      <a16:colId xmlns:a16="http://schemas.microsoft.com/office/drawing/2014/main" val="3609686065"/>
-                    </a:ext>
-                  </a:extLst>
-                </a:gridCol>
-                <a:gridCol w="1261043">
-                  <a:extLst>
-                    <a:ext uri="{9D8B030D-6E8A-4147-A177-3AD203B41FA5}">
-                      <a16:colId xmlns:a16="http://schemas.microsoft.com/office/drawing/2014/main" val="4043273732"/>
-                    </a:ext>
-                  </a:extLst>
-                </a:gridCol>
-              </a:tblGrid>
-              <a:tr h="445855">
-                <a:tc>
-                  <a:txBody>
-                    <a:bodyPr/>
-                    <a:lstStyle/>
-                    <a:p>
-                      <a:pPr algn="ctr" fontAlgn="ctr">
-                        <a:buNone/>
-                      </a:pPr>
-                      <a:r>
-                        <a:rPr lang="zh-TW" altLang="en-US" sz="1600" b="1" i="0" u="none" strike="noStrike" baseline="0" dirty="0">
-                          <a:solidFill>
-                            <a:srgbClr val="000000"/>
-                          </a:solidFill>
-                          <a:effectLst/>
-                          <a:latin typeface="CMU Serif" panose="02000603000000000000" pitchFamily="2" charset="0"/>
-                          <a:ea typeface="標楷體" panose="03000509000000000000" pitchFamily="65" charset="-120"/>
-                        </a:rPr>
-                        <a:t>回傳項目</a:t>
-                      </a:r>
-                    </a:p>
-                  </a:txBody>
-                  <a:tcPr marL="5262" marR="5262" marT="5262" marB="0" anchor="ctr">
-                    <a:lnL w="12700" cap="flat" cmpd="sng" algn="ctr">
-                      <a:solidFill>
-                        <a:schemeClr val="tx1"/>
-                      </a:solidFill>
-                      <a:prstDash val="solid"/>
-                      <a:round/>
-                      <a:headEnd type="none" w="med" len="med"/>
-                      <a:tailEnd type="none" w="med" len="med"/>
-                    </a:lnL>
-                    <a:lnR w="12700" cap="flat" cmpd="sng" algn="ctr">
-                      <a:solidFill>
-                        <a:schemeClr val="tx1"/>
-                      </a:solidFill>
-                      <a:prstDash val="solid"/>
-                      <a:round/>
-                      <a:headEnd type="none" w="med" len="med"/>
-                      <a:tailEnd type="none" w="med" len="med"/>
-                    </a:lnR>
-                    <a:lnT w="12700" cap="flat" cmpd="sng" algn="ctr">
-                      <a:solidFill>
-                        <a:schemeClr val="tx1"/>
-                      </a:solidFill>
-                      <a:prstDash val="solid"/>
-                      <a:round/>
-                      <a:headEnd type="none" w="med" len="med"/>
-                      <a:tailEnd type="none" w="med" len="med"/>
-                    </a:lnT>
-                    <a:lnB w="12700" cap="flat" cmpd="sng" algn="ctr">
-                      <a:solidFill>
-                        <a:schemeClr val="tx1"/>
-                      </a:solidFill>
-                      <a:prstDash val="solid"/>
-                      <a:round/>
-                      <a:headEnd type="none" w="med" len="med"/>
-                      <a:tailEnd type="none" w="med" len="med"/>
-                    </a:lnB>
-                    <a:solidFill>
-                      <a:srgbClr val="BEBEEC"/>
-                    </a:solidFill>
-                  </a:tcPr>
-                </a:tc>
-                <a:tc>
-                  <a:txBody>
-                    <a:bodyPr/>
-                    <a:lstStyle/>
-                    <a:p>
-                      <a:pPr algn="ctr" fontAlgn="ctr">
-                        <a:buNone/>
-                      </a:pPr>
-                      <a:r>
-                        <a:rPr lang="zh-TW" altLang="en-US" sz="1600" b="1" i="0" u="none" strike="noStrike" baseline="0" dirty="0">
-                          <a:solidFill>
-                            <a:srgbClr val="000000"/>
-                          </a:solidFill>
-                          <a:effectLst/>
-                          <a:latin typeface="CMU Serif" panose="02000603000000000000" pitchFamily="2" charset="0"/>
-                          <a:ea typeface="標楷體" panose="03000509000000000000" pitchFamily="65" charset="-120"/>
-                        </a:rPr>
-                        <a:t>意義</a:t>
-                      </a:r>
-                    </a:p>
-                  </a:txBody>
-                  <a:tcPr marL="5262" marR="5262" marT="5262" marB="0" anchor="ctr">
-                    <a:lnL w="12700" cap="flat" cmpd="sng" algn="ctr">
-                      <a:solidFill>
-                        <a:schemeClr val="tx1"/>
-                      </a:solidFill>
-                      <a:prstDash val="solid"/>
-                      <a:round/>
-                      <a:headEnd type="none" w="med" len="med"/>
-                      <a:tailEnd type="none" w="med" len="med"/>
-                    </a:lnL>
-                    <a:lnR w="12700" cap="flat" cmpd="sng" algn="ctr">
-                      <a:solidFill>
-                        <a:schemeClr val="tx1"/>
-                      </a:solidFill>
-                      <a:prstDash val="solid"/>
-                      <a:round/>
-                      <a:headEnd type="none" w="med" len="med"/>
-                      <a:tailEnd type="none" w="med" len="med"/>
-                    </a:lnR>
-                    <a:lnT w="12700" cap="flat" cmpd="sng" algn="ctr">
-                      <a:solidFill>
-                        <a:schemeClr val="tx1"/>
-                      </a:solidFill>
-                      <a:prstDash val="solid"/>
-                      <a:round/>
-                      <a:headEnd type="none" w="med" len="med"/>
-                      <a:tailEnd type="none" w="med" len="med"/>
-                    </a:lnT>
-                    <a:lnB w="12700" cap="flat" cmpd="sng" algn="ctr">
-                      <a:solidFill>
-                        <a:schemeClr val="tx1"/>
-                      </a:solidFill>
-                      <a:prstDash val="solid"/>
-                      <a:round/>
-                      <a:headEnd type="none" w="med" len="med"/>
-                      <a:tailEnd type="none" w="med" len="med"/>
-                    </a:lnB>
-                    <a:solidFill>
-                      <a:srgbClr val="BEBEEC"/>
-                    </a:solidFill>
-                  </a:tcPr>
-                </a:tc>
-                <a:tc>
-                  <a:txBody>
-                    <a:bodyPr/>
-                    <a:lstStyle/>
-                    <a:p>
-                      <a:pPr algn="ctr" fontAlgn="ctr">
-                        <a:buNone/>
-                      </a:pPr>
-                      <a:r>
-                        <a:rPr lang="zh-TW" altLang="en-US" sz="1600" b="1" i="0" u="none" strike="noStrike" baseline="0" dirty="0">
-                          <a:solidFill>
-                            <a:srgbClr val="000000"/>
-                          </a:solidFill>
-                          <a:effectLst/>
-                          <a:latin typeface="CMU Serif" panose="02000603000000000000" pitchFamily="2" charset="0"/>
-                          <a:ea typeface="標楷體" panose="03000509000000000000" pitchFamily="65" charset="-120"/>
-                        </a:rPr>
-                        <a:t>報告設定</a:t>
-                      </a:r>
-                    </a:p>
-                  </a:txBody>
-                  <a:tcPr marL="5262" marR="5262" marT="5262" marB="0" anchor="ctr">
-                    <a:lnL w="12700" cap="flat" cmpd="sng" algn="ctr">
-                      <a:solidFill>
-                        <a:schemeClr val="tx1"/>
-                      </a:solidFill>
-                      <a:prstDash val="solid"/>
-                      <a:round/>
-                      <a:headEnd type="none" w="med" len="med"/>
-                      <a:tailEnd type="none" w="med" len="med"/>
-                    </a:lnL>
-                    <a:lnR w="12700" cap="flat" cmpd="sng" algn="ctr">
-                      <a:solidFill>
-                        <a:schemeClr val="tx1"/>
-                      </a:solidFill>
-                      <a:prstDash val="solid"/>
-                      <a:round/>
-                      <a:headEnd type="none" w="med" len="med"/>
-                      <a:tailEnd type="none" w="med" len="med"/>
-                    </a:lnR>
-                    <a:lnT w="12700" cap="flat" cmpd="sng" algn="ctr">
-                      <a:solidFill>
-                        <a:schemeClr val="tx1"/>
-                      </a:solidFill>
-                      <a:prstDash val="solid"/>
-                      <a:round/>
-                      <a:headEnd type="none" w="med" len="med"/>
-                      <a:tailEnd type="none" w="med" len="med"/>
-                    </a:lnT>
-                    <a:lnB w="12700" cap="flat" cmpd="sng" algn="ctr">
-                      <a:solidFill>
-                        <a:schemeClr val="tx1"/>
-                      </a:solidFill>
-                      <a:prstDash val="solid"/>
-                      <a:round/>
-                      <a:headEnd type="none" w="med" len="med"/>
-                      <a:tailEnd type="none" w="med" len="med"/>
-                    </a:lnB>
-                    <a:solidFill>
-                      <a:srgbClr val="BEBEEC"/>
-                    </a:solidFill>
-                  </a:tcPr>
-                </a:tc>
-                <a:extLst>
-                  <a:ext uri="{0D108BD9-81ED-4DB2-BD59-A6C34878D82A}">
-                    <a16:rowId xmlns:a16="http://schemas.microsoft.com/office/drawing/2014/main" val="3116086268"/>
-                  </a:ext>
-                </a:extLst>
-              </a:tr>
-              <a:tr h="445855">
-                <a:tc>
-                  <a:txBody>
-                    <a:bodyPr/>
-                    <a:lstStyle/>
-                    <a:p>
-                      <a:pPr algn="ctr" fontAlgn="ctr">
-                        <a:buNone/>
-                      </a:pPr>
-                      <a:r>
-                        <a:rPr lang="en-US" sz="1600" b="0" i="0" u="none" strike="noStrike" baseline="0" dirty="0" err="1">
-                          <a:solidFill>
-                            <a:srgbClr val="000000"/>
-                          </a:solidFill>
-                          <a:effectLst/>
-                          <a:latin typeface="CMU Serif" panose="02000603000000000000" pitchFamily="2" charset="0"/>
-                          <a:ea typeface="標楷體" panose="03000509000000000000" pitchFamily="65" charset="-120"/>
-                        </a:rPr>
-                        <a:t>GW.arguments</a:t>
-                      </a:r>
-                      <a:endParaRPr lang="en-US" sz="1600" b="0" i="0" u="none" strike="noStrike" baseline="0" dirty="0">
-                        <a:solidFill>
-                          <a:srgbClr val="000000"/>
-                        </a:solidFill>
-                        <a:effectLst/>
-                        <a:latin typeface="CMU Serif" panose="02000603000000000000" pitchFamily="2" charset="0"/>
-                        <a:ea typeface="標楷體" panose="03000509000000000000" pitchFamily="65" charset="-120"/>
-                      </a:endParaRPr>
-                    </a:p>
-                  </a:txBody>
-                  <a:tcPr marL="5262" marR="5262" marT="5262" marB="0" anchor="ctr">
-                    <a:lnL w="12700" cap="flat" cmpd="sng" algn="ctr">
-                      <a:solidFill>
-                        <a:schemeClr val="tx1"/>
-                      </a:solidFill>
-                      <a:prstDash val="solid"/>
-                      <a:round/>
-                      <a:headEnd type="none" w="med" len="med"/>
-                      <a:tailEnd type="none" w="med" len="med"/>
-                    </a:lnL>
-                    <a:lnR w="12700" cap="flat" cmpd="sng" algn="ctr">
-                      <a:solidFill>
-                        <a:schemeClr val="tx1"/>
-                      </a:solidFill>
-                      <a:prstDash val="solid"/>
-                      <a:round/>
-                      <a:headEnd type="none" w="med" len="med"/>
-                      <a:tailEnd type="none" w="med" len="med"/>
-                    </a:lnR>
-                    <a:lnT w="12700" cap="flat" cmpd="sng" algn="ctr">
-                      <a:solidFill>
-                        <a:schemeClr val="tx1"/>
-                      </a:solidFill>
-                      <a:prstDash val="solid"/>
-                      <a:round/>
-                      <a:headEnd type="none" w="med" len="med"/>
-                      <a:tailEnd type="none" w="med" len="med"/>
-                    </a:lnT>
-                    <a:lnB w="12700" cap="flat" cmpd="sng" algn="ctr">
-                      <a:solidFill>
-                        <a:schemeClr val="tx1"/>
-                      </a:solidFill>
-                      <a:prstDash val="solid"/>
-                      <a:round/>
-                      <a:headEnd type="none" w="med" len="med"/>
-                      <a:tailEnd type="none" w="med" len="med"/>
-                    </a:lnB>
-                    <a:noFill/>
-                  </a:tcPr>
-                </a:tc>
-                <a:tc>
-                  <a:txBody>
-                    <a:bodyPr/>
-                    <a:lstStyle/>
-                    <a:p>
-                      <a:pPr algn="ctr" fontAlgn="ctr">
-                        <a:buNone/>
-                      </a:pPr>
-                      <a:r>
-                        <a:rPr lang="zh-TW" altLang="en-US" sz="1600" b="0" i="0" u="none" strike="noStrike" baseline="0" dirty="0">
-                          <a:solidFill>
-                            <a:srgbClr val="000000"/>
-                          </a:solidFill>
-                          <a:effectLst/>
-                          <a:latin typeface="CMU Serif" panose="02000603000000000000" pitchFamily="2" charset="0"/>
-                          <a:ea typeface="標楷體" panose="03000509000000000000" pitchFamily="65" charset="-120"/>
-                        </a:rPr>
-                        <a:t>儲存 </a:t>
-                      </a:r>
-                      <a:r>
-                        <a:rPr lang="en-US" sz="1600" b="0" i="0" u="none" strike="noStrike" baseline="0" dirty="0">
-                          <a:solidFill>
-                            <a:srgbClr val="000000"/>
-                          </a:solidFill>
-                          <a:effectLst/>
-                          <a:latin typeface="CMU Serif" panose="02000603000000000000" pitchFamily="2" charset="0"/>
-                          <a:ea typeface="標楷體" panose="03000509000000000000" pitchFamily="65" charset="-120"/>
-                        </a:rPr>
-                        <a:t>GWR </a:t>
-                      </a:r>
-                      <a:r>
-                        <a:rPr lang="zh-TW" altLang="en-US" sz="1600" b="0" i="0" u="none" strike="noStrike" baseline="0" dirty="0">
-                          <a:solidFill>
-                            <a:srgbClr val="000000"/>
-                          </a:solidFill>
-                          <a:effectLst/>
-                          <a:latin typeface="CMU Serif" panose="02000603000000000000" pitchFamily="2" charset="0"/>
-                          <a:ea typeface="標楷體" panose="03000509000000000000" pitchFamily="65" charset="-120"/>
-                        </a:rPr>
-                        <a:t>模型參數設定</a:t>
-                      </a:r>
-                    </a:p>
-                  </a:txBody>
-                  <a:tcPr marL="5262" marR="5262" marT="5262" marB="0" anchor="ctr">
-                    <a:lnL w="12700" cap="flat" cmpd="sng" algn="ctr">
-                      <a:solidFill>
-                        <a:schemeClr val="tx1"/>
-                      </a:solidFill>
-                      <a:prstDash val="solid"/>
-                      <a:round/>
-                      <a:headEnd type="none" w="med" len="med"/>
-                      <a:tailEnd type="none" w="med" len="med"/>
-                    </a:lnL>
-                    <a:lnR w="12700" cap="flat" cmpd="sng" algn="ctr">
-                      <a:solidFill>
-                        <a:schemeClr val="tx1"/>
-                      </a:solidFill>
-                      <a:prstDash val="solid"/>
-                      <a:round/>
-                      <a:headEnd type="none" w="med" len="med"/>
-                      <a:tailEnd type="none" w="med" len="med"/>
-                    </a:lnR>
-                    <a:lnT w="12700" cap="flat" cmpd="sng" algn="ctr">
-                      <a:solidFill>
-                        <a:schemeClr val="tx1"/>
-                      </a:solidFill>
-                      <a:prstDash val="solid"/>
-                      <a:round/>
-                      <a:headEnd type="none" w="med" len="med"/>
-                      <a:tailEnd type="none" w="med" len="med"/>
-                    </a:lnT>
-                    <a:lnB w="12700" cap="flat" cmpd="sng" algn="ctr">
-                      <a:solidFill>
-                        <a:schemeClr val="tx1"/>
-                      </a:solidFill>
-                      <a:prstDash val="solid"/>
-                      <a:round/>
-                      <a:headEnd type="none" w="med" len="med"/>
-                      <a:tailEnd type="none" w="med" len="med"/>
-                    </a:lnB>
-                    <a:noFill/>
-                  </a:tcPr>
-                </a:tc>
-                <a:tc>
-                  <a:txBody>
-                    <a:bodyPr/>
-                    <a:lstStyle/>
-                    <a:p>
-                      <a:pPr algn="ctr" fontAlgn="ctr">
-                        <a:buNone/>
-                      </a:pPr>
-                      <a:r>
-                        <a:rPr lang="en-US" sz="1600" b="0" i="0" u="none" strike="noStrike" baseline="0">
-                          <a:solidFill>
-                            <a:srgbClr val="000000"/>
-                          </a:solidFill>
-                          <a:effectLst/>
-                          <a:latin typeface="CMU Serif" panose="02000603000000000000" pitchFamily="2" charset="0"/>
-                          <a:ea typeface="標楷體" panose="03000509000000000000" pitchFamily="65" charset="-120"/>
-                        </a:rPr>
-                        <a:t>V</a:t>
-                      </a:r>
-                    </a:p>
-                  </a:txBody>
-                  <a:tcPr marL="5262" marR="5262" marT="5262" marB="0" anchor="ctr">
-                    <a:lnL w="12700" cap="flat" cmpd="sng" algn="ctr">
-                      <a:solidFill>
-                        <a:schemeClr val="tx1"/>
-                      </a:solidFill>
-                      <a:prstDash val="solid"/>
-                      <a:round/>
-                      <a:headEnd type="none" w="med" len="med"/>
-                      <a:tailEnd type="none" w="med" len="med"/>
-                    </a:lnL>
-                    <a:lnR w="12700" cap="flat" cmpd="sng" algn="ctr">
-                      <a:solidFill>
-                        <a:schemeClr val="tx1"/>
-                      </a:solidFill>
-                      <a:prstDash val="solid"/>
-                      <a:round/>
-                      <a:headEnd type="none" w="med" len="med"/>
-                      <a:tailEnd type="none" w="med" len="med"/>
-                    </a:lnR>
-                    <a:lnT w="12700" cap="flat" cmpd="sng" algn="ctr">
-                      <a:solidFill>
-                        <a:schemeClr val="tx1"/>
-                      </a:solidFill>
-                      <a:prstDash val="solid"/>
-                      <a:round/>
-                      <a:headEnd type="none" w="med" len="med"/>
-                      <a:tailEnd type="none" w="med" len="med"/>
-                    </a:lnT>
-                    <a:lnB w="12700" cap="flat" cmpd="sng" algn="ctr">
-                      <a:solidFill>
-                        <a:schemeClr val="tx1"/>
-                      </a:solidFill>
-                      <a:prstDash val="solid"/>
-                      <a:round/>
-                      <a:headEnd type="none" w="med" len="med"/>
-                      <a:tailEnd type="none" w="med" len="med"/>
-                    </a:lnB>
-                    <a:noFill/>
-                  </a:tcPr>
-                </a:tc>
-                <a:extLst>
-                  <a:ext uri="{0D108BD9-81ED-4DB2-BD59-A6C34878D82A}">
-                    <a16:rowId xmlns:a16="http://schemas.microsoft.com/office/drawing/2014/main" val="3486506065"/>
-                  </a:ext>
-                </a:extLst>
-              </a:tr>
-              <a:tr h="445855">
-                <a:tc>
-                  <a:txBody>
-                    <a:bodyPr/>
-                    <a:lstStyle/>
-                    <a:p>
-                      <a:pPr algn="ctr" fontAlgn="ctr">
-                        <a:buNone/>
-                      </a:pPr>
-                      <a:r>
-                        <a:rPr lang="en-US" sz="1600" b="0" i="0" u="none" strike="noStrike" baseline="0">
-                          <a:solidFill>
-                            <a:srgbClr val="000000"/>
-                          </a:solidFill>
-                          <a:effectLst/>
-                          <a:latin typeface="CMU Serif" panose="02000603000000000000" pitchFamily="2" charset="0"/>
-                          <a:ea typeface="標楷體" panose="03000509000000000000" pitchFamily="65" charset="-120"/>
-                        </a:rPr>
-                        <a:t>GW.diagnostic</a:t>
-                      </a:r>
-                    </a:p>
-                  </a:txBody>
-                  <a:tcPr marL="5262" marR="5262" marT="5262" marB="0" anchor="ctr">
-                    <a:lnL w="12700" cap="flat" cmpd="sng" algn="ctr">
-                      <a:solidFill>
-                        <a:schemeClr val="tx1"/>
-                      </a:solidFill>
-                      <a:prstDash val="solid"/>
-                      <a:round/>
-                      <a:headEnd type="none" w="med" len="med"/>
-                      <a:tailEnd type="none" w="med" len="med"/>
-                    </a:lnL>
-                    <a:lnR w="12700" cap="flat" cmpd="sng" algn="ctr">
-                      <a:solidFill>
-                        <a:schemeClr val="tx1"/>
-                      </a:solidFill>
-                      <a:prstDash val="solid"/>
-                      <a:round/>
-                      <a:headEnd type="none" w="med" len="med"/>
-                      <a:tailEnd type="none" w="med" len="med"/>
-                    </a:lnR>
-                    <a:lnT w="12700" cap="flat" cmpd="sng" algn="ctr">
-                      <a:solidFill>
-                        <a:schemeClr val="tx1"/>
-                      </a:solidFill>
-                      <a:prstDash val="solid"/>
-                      <a:round/>
-                      <a:headEnd type="none" w="med" len="med"/>
-                      <a:tailEnd type="none" w="med" len="med"/>
-                    </a:lnT>
-                    <a:lnB w="12700" cap="flat" cmpd="sng" algn="ctr">
-                      <a:solidFill>
-                        <a:schemeClr val="tx1"/>
-                      </a:solidFill>
-                      <a:prstDash val="solid"/>
-                      <a:round/>
-                      <a:headEnd type="none" w="med" len="med"/>
-                      <a:tailEnd type="none" w="med" len="med"/>
-                    </a:lnB>
-                    <a:noFill/>
-                  </a:tcPr>
-                </a:tc>
-                <a:tc>
-                  <a:txBody>
-                    <a:bodyPr/>
-                    <a:lstStyle/>
-                    <a:p>
-                      <a:pPr algn="ctr" fontAlgn="ctr">
-                        <a:buNone/>
-                      </a:pPr>
-                      <a:r>
-                        <a:rPr lang="zh-TW" altLang="en-US" sz="1600" b="0" i="0" u="none" strike="noStrike" baseline="0" dirty="0">
-                          <a:solidFill>
-                            <a:srgbClr val="000000"/>
-                          </a:solidFill>
-                          <a:effectLst/>
-                          <a:latin typeface="CMU Serif" panose="02000603000000000000" pitchFamily="2" charset="0"/>
-                          <a:ea typeface="標楷體" panose="03000509000000000000" pitchFamily="65" charset="-120"/>
-                        </a:rPr>
-                        <a:t>模型診斷結果，如 </a:t>
-                      </a:r>
-                      <a:r>
-                        <a:rPr lang="en-US" altLang="zh-TW" sz="1600" b="0" i="0" u="none" strike="noStrike" baseline="0" dirty="0">
-                          <a:solidFill>
-                            <a:srgbClr val="000000"/>
-                          </a:solidFill>
-                          <a:effectLst/>
-                          <a:latin typeface="CMU Serif" panose="02000603000000000000" pitchFamily="2" charset="0"/>
-                          <a:ea typeface="標楷體" panose="03000509000000000000" pitchFamily="65" charset="-120"/>
-                        </a:rPr>
-                        <a:t>RSS</a:t>
-                      </a:r>
-                      <a:r>
-                        <a:rPr lang="zh-TW" altLang="en-US" sz="1600" b="0" i="0" u="none" strike="noStrike" baseline="0" dirty="0">
-                          <a:solidFill>
-                            <a:srgbClr val="000000"/>
-                          </a:solidFill>
-                          <a:effectLst/>
-                          <a:latin typeface="CMU Serif" panose="02000603000000000000" pitchFamily="2" charset="0"/>
-                          <a:ea typeface="標楷體" panose="03000509000000000000" pitchFamily="65" charset="-120"/>
-                        </a:rPr>
-                        <a:t>、</a:t>
-                      </a:r>
-                      <a:r>
-                        <a:rPr lang="en-US" altLang="zh-TW" sz="1600" b="0" i="0" u="none" strike="noStrike" baseline="0" dirty="0" err="1">
-                          <a:solidFill>
-                            <a:srgbClr val="000000"/>
-                          </a:solidFill>
-                          <a:effectLst/>
-                          <a:latin typeface="CMU Serif" panose="02000603000000000000" pitchFamily="2" charset="0"/>
-                          <a:ea typeface="標楷體" panose="03000509000000000000" pitchFamily="65" charset="-120"/>
-                        </a:rPr>
-                        <a:t>AICc</a:t>
-                      </a:r>
-                      <a:r>
-                        <a:rPr lang="zh-TW" altLang="en-US" sz="1600" b="0" i="0" u="none" strike="noStrike" baseline="0" dirty="0">
-                          <a:solidFill>
-                            <a:srgbClr val="000000"/>
-                          </a:solidFill>
-                          <a:effectLst/>
-                          <a:latin typeface="CMU Serif" panose="02000603000000000000" pitchFamily="2" charset="0"/>
-                          <a:ea typeface="標楷體" panose="03000509000000000000" pitchFamily="65" charset="-120"/>
-                        </a:rPr>
-                        <a:t>、</a:t>
-                      </a:r>
-                      <a:r>
-                        <a:rPr lang="en-US" altLang="zh-TW" sz="1600" b="0" i="0" u="none" strike="noStrike" baseline="0" dirty="0">
-                          <a:solidFill>
-                            <a:srgbClr val="000000"/>
-                          </a:solidFill>
-                          <a:effectLst/>
-                          <a:latin typeface="CMU Serif" panose="02000603000000000000" pitchFamily="2" charset="0"/>
-                          <a:ea typeface="標楷體" panose="03000509000000000000" pitchFamily="65" charset="-120"/>
-                        </a:rPr>
-                        <a:t>R²</a:t>
-                      </a:r>
-                    </a:p>
-                  </a:txBody>
-                  <a:tcPr marL="5262" marR="5262" marT="5262" marB="0" anchor="ctr">
-                    <a:lnL w="12700" cap="flat" cmpd="sng" algn="ctr">
-                      <a:solidFill>
-                        <a:schemeClr val="tx1"/>
-                      </a:solidFill>
-                      <a:prstDash val="solid"/>
-                      <a:round/>
-                      <a:headEnd type="none" w="med" len="med"/>
-                      <a:tailEnd type="none" w="med" len="med"/>
-                    </a:lnL>
-                    <a:lnR w="12700" cap="flat" cmpd="sng" algn="ctr">
-                      <a:solidFill>
-                        <a:schemeClr val="tx1"/>
-                      </a:solidFill>
-                      <a:prstDash val="solid"/>
-                      <a:round/>
-                      <a:headEnd type="none" w="med" len="med"/>
-                      <a:tailEnd type="none" w="med" len="med"/>
-                    </a:lnR>
-                    <a:lnT w="12700" cap="flat" cmpd="sng" algn="ctr">
-                      <a:solidFill>
-                        <a:schemeClr val="tx1"/>
-                      </a:solidFill>
-                      <a:prstDash val="solid"/>
-                      <a:round/>
-                      <a:headEnd type="none" w="med" len="med"/>
-                      <a:tailEnd type="none" w="med" len="med"/>
-                    </a:lnT>
-                    <a:lnB w="12700" cap="flat" cmpd="sng" algn="ctr">
-                      <a:solidFill>
-                        <a:schemeClr val="tx1"/>
-                      </a:solidFill>
-                      <a:prstDash val="solid"/>
-                      <a:round/>
-                      <a:headEnd type="none" w="med" len="med"/>
-                      <a:tailEnd type="none" w="med" len="med"/>
-                    </a:lnB>
-                    <a:noFill/>
-                  </a:tcPr>
-                </a:tc>
-                <a:tc>
-                  <a:txBody>
-                    <a:bodyPr/>
-                    <a:lstStyle/>
-                    <a:p>
-                      <a:pPr algn="ctr" fontAlgn="ctr">
-                        <a:buNone/>
-                      </a:pPr>
-                      <a:r>
-                        <a:rPr lang="en-US" sz="1600" b="0" i="0" u="none" strike="noStrike" baseline="0">
-                          <a:solidFill>
-                            <a:srgbClr val="000000"/>
-                          </a:solidFill>
-                          <a:effectLst/>
-                          <a:latin typeface="CMU Serif" panose="02000603000000000000" pitchFamily="2" charset="0"/>
-                          <a:ea typeface="標楷體" panose="03000509000000000000" pitchFamily="65" charset="-120"/>
-                        </a:rPr>
-                        <a:t>V</a:t>
-                      </a:r>
-                    </a:p>
-                  </a:txBody>
-                  <a:tcPr marL="5262" marR="5262" marT="5262" marB="0" anchor="ctr">
-                    <a:lnL w="12700" cap="flat" cmpd="sng" algn="ctr">
-                      <a:solidFill>
-                        <a:schemeClr val="tx1"/>
-                      </a:solidFill>
-                      <a:prstDash val="solid"/>
-                      <a:round/>
-                      <a:headEnd type="none" w="med" len="med"/>
-                      <a:tailEnd type="none" w="med" len="med"/>
-                    </a:lnL>
-                    <a:lnR w="12700" cap="flat" cmpd="sng" algn="ctr">
-                      <a:solidFill>
-                        <a:schemeClr val="tx1"/>
-                      </a:solidFill>
-                      <a:prstDash val="solid"/>
-                      <a:round/>
-                      <a:headEnd type="none" w="med" len="med"/>
-                      <a:tailEnd type="none" w="med" len="med"/>
-                    </a:lnR>
-                    <a:lnT w="12700" cap="flat" cmpd="sng" algn="ctr">
-                      <a:solidFill>
-                        <a:schemeClr val="tx1"/>
-                      </a:solidFill>
-                      <a:prstDash val="solid"/>
-                      <a:round/>
-                      <a:headEnd type="none" w="med" len="med"/>
-                      <a:tailEnd type="none" w="med" len="med"/>
-                    </a:lnT>
-                    <a:lnB w="12700" cap="flat" cmpd="sng" algn="ctr">
-                      <a:solidFill>
-                        <a:schemeClr val="tx1"/>
-                      </a:solidFill>
-                      <a:prstDash val="solid"/>
-                      <a:round/>
-                      <a:headEnd type="none" w="med" len="med"/>
-                      <a:tailEnd type="none" w="med" len="med"/>
-                    </a:lnB>
-                    <a:noFill/>
-                  </a:tcPr>
-                </a:tc>
-                <a:extLst>
-                  <a:ext uri="{0D108BD9-81ED-4DB2-BD59-A6C34878D82A}">
-                    <a16:rowId xmlns:a16="http://schemas.microsoft.com/office/drawing/2014/main" val="3666576205"/>
-                  </a:ext>
-                </a:extLst>
-              </a:tr>
-              <a:tr h="445855">
-                <a:tc>
-                  <a:txBody>
-                    <a:bodyPr/>
-                    <a:lstStyle/>
-                    <a:p>
-                      <a:pPr algn="ctr" fontAlgn="ctr">
-                        <a:buNone/>
-                      </a:pPr>
-                      <a:r>
-                        <a:rPr lang="en-US" sz="1600" b="0" i="0" u="none" strike="noStrike" baseline="0" dirty="0" err="1">
-                          <a:solidFill>
-                            <a:srgbClr val="000000"/>
-                          </a:solidFill>
-                          <a:effectLst/>
-                          <a:latin typeface="CMU Serif" panose="02000603000000000000" pitchFamily="2" charset="0"/>
-                          <a:ea typeface="標楷體" panose="03000509000000000000" pitchFamily="65" charset="-120"/>
-                        </a:rPr>
-                        <a:t>lm</a:t>
-                      </a:r>
-                      <a:endParaRPr lang="en-US" sz="1600" b="0" i="0" u="none" strike="noStrike" baseline="0" dirty="0">
-                        <a:solidFill>
-                          <a:srgbClr val="000000"/>
-                        </a:solidFill>
-                        <a:effectLst/>
-                        <a:latin typeface="CMU Serif" panose="02000603000000000000" pitchFamily="2" charset="0"/>
-                        <a:ea typeface="標楷體" panose="03000509000000000000" pitchFamily="65" charset="-120"/>
-                      </a:endParaRPr>
-                    </a:p>
-                  </a:txBody>
-                  <a:tcPr marL="5262" marR="5262" marT="5262" marB="0" anchor="ctr">
-                    <a:lnL w="12700" cap="flat" cmpd="sng" algn="ctr">
-                      <a:solidFill>
-                        <a:schemeClr val="tx1"/>
-                      </a:solidFill>
-                      <a:prstDash val="solid"/>
-                      <a:round/>
-                      <a:headEnd type="none" w="med" len="med"/>
-                      <a:tailEnd type="none" w="med" len="med"/>
-                    </a:lnL>
-                    <a:lnR w="12700" cap="flat" cmpd="sng" algn="ctr">
-                      <a:solidFill>
-                        <a:schemeClr val="tx1"/>
-                      </a:solidFill>
-                      <a:prstDash val="solid"/>
-                      <a:round/>
-                      <a:headEnd type="none" w="med" len="med"/>
-                      <a:tailEnd type="none" w="med" len="med"/>
-                    </a:lnR>
-                    <a:lnT w="12700" cap="flat" cmpd="sng" algn="ctr">
-                      <a:solidFill>
-                        <a:schemeClr val="tx1"/>
-                      </a:solidFill>
-                      <a:prstDash val="solid"/>
-                      <a:round/>
-                      <a:headEnd type="none" w="med" len="med"/>
-                      <a:tailEnd type="none" w="med" len="med"/>
-                    </a:lnT>
-                    <a:lnB w="12700" cap="flat" cmpd="sng" algn="ctr">
-                      <a:solidFill>
-                        <a:schemeClr val="tx1"/>
-                      </a:solidFill>
-                      <a:prstDash val="solid"/>
-                      <a:round/>
-                      <a:headEnd type="none" w="med" len="med"/>
-                      <a:tailEnd type="none" w="med" len="med"/>
-                    </a:lnB>
-                    <a:noFill/>
-                  </a:tcPr>
-                </a:tc>
-                <a:tc>
-                  <a:txBody>
-                    <a:bodyPr/>
-                    <a:lstStyle/>
-                    <a:p>
-                      <a:pPr algn="ctr" fontAlgn="ctr">
-                        <a:buNone/>
-                      </a:pPr>
-                      <a:r>
-                        <a:rPr lang="zh-TW" altLang="en-US" sz="1600" b="0" i="0" u="none" strike="noStrike" baseline="0" dirty="0">
-                          <a:solidFill>
-                            <a:srgbClr val="000000"/>
-                          </a:solidFill>
-                          <a:effectLst/>
-                          <a:latin typeface="CMU Serif" panose="02000603000000000000" pitchFamily="2" charset="0"/>
-                          <a:ea typeface="標楷體" panose="03000509000000000000" pitchFamily="65" charset="-120"/>
-                        </a:rPr>
-                        <a:t>對應的 </a:t>
-                      </a:r>
-                      <a:r>
-                        <a:rPr lang="en-US" sz="1600" b="0" i="0" u="none" strike="noStrike" baseline="0" dirty="0">
-                          <a:solidFill>
-                            <a:srgbClr val="000000"/>
-                          </a:solidFill>
-                          <a:effectLst/>
-                          <a:latin typeface="CMU Serif" panose="02000603000000000000" pitchFamily="2" charset="0"/>
-                          <a:ea typeface="標楷體" panose="03000509000000000000" pitchFamily="65" charset="-120"/>
-                        </a:rPr>
-                        <a:t>global linear regression </a:t>
-                      </a:r>
-                      <a:r>
-                        <a:rPr lang="zh-TW" altLang="en-US" sz="1600" b="0" i="0" u="none" strike="noStrike" baseline="0" dirty="0">
-                          <a:solidFill>
-                            <a:srgbClr val="000000"/>
-                          </a:solidFill>
-                          <a:effectLst/>
-                          <a:latin typeface="CMU Serif" panose="02000603000000000000" pitchFamily="2" charset="0"/>
-                          <a:ea typeface="標楷體" panose="03000509000000000000" pitchFamily="65" charset="-120"/>
-                        </a:rPr>
-                        <a:t>結果</a:t>
-                      </a:r>
-                    </a:p>
-                  </a:txBody>
-                  <a:tcPr marL="5262" marR="5262" marT="5262" marB="0" anchor="ctr">
-                    <a:lnL w="12700" cap="flat" cmpd="sng" algn="ctr">
-                      <a:solidFill>
-                        <a:schemeClr val="tx1"/>
-                      </a:solidFill>
-                      <a:prstDash val="solid"/>
-                      <a:round/>
-                      <a:headEnd type="none" w="med" len="med"/>
-                      <a:tailEnd type="none" w="med" len="med"/>
-                    </a:lnL>
-                    <a:lnR w="12700" cap="flat" cmpd="sng" algn="ctr">
-                      <a:solidFill>
-                        <a:schemeClr val="tx1"/>
-                      </a:solidFill>
-                      <a:prstDash val="solid"/>
-                      <a:round/>
-                      <a:headEnd type="none" w="med" len="med"/>
-                      <a:tailEnd type="none" w="med" len="med"/>
-                    </a:lnR>
-                    <a:lnT w="12700" cap="flat" cmpd="sng" algn="ctr">
-                      <a:solidFill>
-                        <a:schemeClr val="tx1"/>
-                      </a:solidFill>
-                      <a:prstDash val="solid"/>
-                      <a:round/>
-                      <a:headEnd type="none" w="med" len="med"/>
-                      <a:tailEnd type="none" w="med" len="med"/>
-                    </a:lnT>
-                    <a:lnB w="12700" cap="flat" cmpd="sng" algn="ctr">
-                      <a:solidFill>
-                        <a:schemeClr val="tx1"/>
-                      </a:solidFill>
-                      <a:prstDash val="solid"/>
-                      <a:round/>
-                      <a:headEnd type="none" w="med" len="med"/>
-                      <a:tailEnd type="none" w="med" len="med"/>
-                    </a:lnB>
-                    <a:noFill/>
-                  </a:tcPr>
-                </a:tc>
-                <a:tc>
-                  <a:txBody>
-                    <a:bodyPr/>
-                    <a:lstStyle/>
-                    <a:p>
-                      <a:pPr algn="ctr" fontAlgn="ctr">
-                        <a:buNone/>
-                      </a:pPr>
-                      <a:r>
-                        <a:rPr lang="en-US" sz="1600" b="0" i="0" u="none" strike="noStrike" baseline="0">
-                          <a:solidFill>
-                            <a:srgbClr val="000000"/>
-                          </a:solidFill>
-                          <a:effectLst/>
-                          <a:latin typeface="CMU Serif" panose="02000603000000000000" pitchFamily="2" charset="0"/>
-                          <a:ea typeface="標楷體" panose="03000509000000000000" pitchFamily="65" charset="-120"/>
-                        </a:rPr>
-                        <a:t>V</a:t>
-                      </a:r>
-                    </a:p>
-                  </a:txBody>
-                  <a:tcPr marL="5262" marR="5262" marT="5262" marB="0" anchor="ctr">
-                    <a:lnL w="12700" cap="flat" cmpd="sng" algn="ctr">
-                      <a:solidFill>
-                        <a:schemeClr val="tx1"/>
-                      </a:solidFill>
-                      <a:prstDash val="solid"/>
-                      <a:round/>
-                      <a:headEnd type="none" w="med" len="med"/>
-                      <a:tailEnd type="none" w="med" len="med"/>
-                    </a:lnL>
-                    <a:lnR w="12700" cap="flat" cmpd="sng" algn="ctr">
-                      <a:solidFill>
-                        <a:schemeClr val="tx1"/>
-                      </a:solidFill>
-                      <a:prstDash val="solid"/>
-                      <a:round/>
-                      <a:headEnd type="none" w="med" len="med"/>
-                      <a:tailEnd type="none" w="med" len="med"/>
-                    </a:lnR>
-                    <a:lnT w="12700" cap="flat" cmpd="sng" algn="ctr">
-                      <a:solidFill>
-                        <a:schemeClr val="tx1"/>
-                      </a:solidFill>
-                      <a:prstDash val="solid"/>
-                      <a:round/>
-                      <a:headEnd type="none" w="med" len="med"/>
-                      <a:tailEnd type="none" w="med" len="med"/>
-                    </a:lnT>
-                    <a:lnB w="12700" cap="flat" cmpd="sng" algn="ctr">
-                      <a:solidFill>
-                        <a:schemeClr val="tx1"/>
-                      </a:solidFill>
-                      <a:prstDash val="solid"/>
-                      <a:round/>
-                      <a:headEnd type="none" w="med" len="med"/>
-                      <a:tailEnd type="none" w="med" len="med"/>
-                    </a:lnB>
-                    <a:noFill/>
-                  </a:tcPr>
-                </a:tc>
-                <a:extLst>
-                  <a:ext uri="{0D108BD9-81ED-4DB2-BD59-A6C34878D82A}">
-                    <a16:rowId xmlns:a16="http://schemas.microsoft.com/office/drawing/2014/main" val="1725581906"/>
-                  </a:ext>
-                </a:extLst>
-              </a:tr>
-              <a:tr h="559489">
-                <a:tc>
-                  <a:txBody>
-                    <a:bodyPr/>
-                    <a:lstStyle/>
-                    <a:p>
-                      <a:pPr algn="ctr" fontAlgn="ctr">
-                        <a:buNone/>
-                      </a:pPr>
-                      <a:r>
-                        <a:rPr lang="en-US" sz="1600" b="0" i="0" u="none" strike="noStrike" baseline="0">
-                          <a:solidFill>
-                            <a:srgbClr val="000000"/>
-                          </a:solidFill>
-                          <a:effectLst/>
-                          <a:latin typeface="CMU Serif" panose="02000603000000000000" pitchFamily="2" charset="0"/>
-                          <a:ea typeface="標楷體" panose="03000509000000000000" pitchFamily="65" charset="-120"/>
-                        </a:rPr>
-                        <a:t>SDF</a:t>
-                      </a:r>
-                    </a:p>
-                  </a:txBody>
-                  <a:tcPr marL="5262" marR="5262" marT="5262" marB="0" anchor="ctr">
-                    <a:lnL w="12700" cap="flat" cmpd="sng" algn="ctr">
-                      <a:solidFill>
-                        <a:schemeClr val="tx1"/>
-                      </a:solidFill>
-                      <a:prstDash val="solid"/>
-                      <a:round/>
-                      <a:headEnd type="none" w="med" len="med"/>
-                      <a:tailEnd type="none" w="med" len="med"/>
-                    </a:lnL>
-                    <a:lnR w="12700" cap="flat" cmpd="sng" algn="ctr">
-                      <a:solidFill>
-                        <a:schemeClr val="tx1"/>
-                      </a:solidFill>
-                      <a:prstDash val="solid"/>
-                      <a:round/>
-                      <a:headEnd type="none" w="med" len="med"/>
-                      <a:tailEnd type="none" w="med" len="med"/>
-                    </a:lnR>
-                    <a:lnT w="12700" cap="flat" cmpd="sng" algn="ctr">
-                      <a:solidFill>
-                        <a:schemeClr val="tx1"/>
-                      </a:solidFill>
-                      <a:prstDash val="solid"/>
-                      <a:round/>
-                      <a:headEnd type="none" w="med" len="med"/>
-                      <a:tailEnd type="none" w="med" len="med"/>
-                    </a:lnT>
-                    <a:lnB w="12700" cap="flat" cmpd="sng" algn="ctr">
-                      <a:solidFill>
-                        <a:schemeClr val="tx1"/>
-                      </a:solidFill>
-                      <a:prstDash val="solid"/>
-                      <a:round/>
-                      <a:headEnd type="none" w="med" len="med"/>
-                      <a:tailEnd type="none" w="med" len="med"/>
-                    </a:lnB>
-                    <a:noFill/>
-                  </a:tcPr>
-                </a:tc>
-                <a:tc>
-                  <a:txBody>
-                    <a:bodyPr/>
-                    <a:lstStyle/>
-                    <a:p>
-                      <a:pPr algn="ctr" fontAlgn="ctr">
-                        <a:buNone/>
-                      </a:pPr>
-                      <a:r>
-                        <a:rPr lang="zh-TW" altLang="en-US" sz="1600" b="0" i="0" u="none" strike="noStrike" baseline="0" dirty="0">
-                          <a:solidFill>
-                            <a:srgbClr val="000000"/>
-                          </a:solidFill>
-                          <a:effectLst/>
-                          <a:latin typeface="CMU Serif" panose="02000603000000000000" pitchFamily="2" charset="0"/>
-                          <a:ea typeface="標楷體" panose="03000509000000000000" pitchFamily="65" charset="-120"/>
-                        </a:rPr>
-                        <a:t>最重要的輸出，包含每個地點的 </a:t>
-                      </a:r>
-                      <a:r>
-                        <a:rPr lang="en-US" sz="1600" b="0" i="0" u="none" strike="noStrike" baseline="0" dirty="0">
-                          <a:solidFill>
-                            <a:srgbClr val="000000"/>
-                          </a:solidFill>
-                          <a:effectLst/>
-                          <a:latin typeface="CMU Serif" panose="02000603000000000000" pitchFamily="2" charset="0"/>
-                          <a:ea typeface="標楷體" panose="03000509000000000000" pitchFamily="65" charset="-120"/>
-                        </a:rPr>
-                        <a:t>local </a:t>
-                      </a:r>
-                      <a:r>
-                        <a:rPr lang="en-US" sz="1600" b="0" i="0" u="none" strike="noStrike" baseline="0" dirty="0" err="1">
-                          <a:solidFill>
-                            <a:srgbClr val="000000"/>
-                          </a:solidFill>
-                          <a:effectLst/>
-                          <a:latin typeface="CMU Serif" panose="02000603000000000000" pitchFamily="2" charset="0"/>
-                          <a:ea typeface="標楷體" panose="03000509000000000000" pitchFamily="65" charset="-120"/>
-                        </a:rPr>
-                        <a:t>coefficients、yhat、residual、standard</a:t>
-                      </a:r>
-                      <a:r>
-                        <a:rPr lang="en-US" sz="1600" b="0" i="0" u="none" strike="noStrike" baseline="0" dirty="0">
-                          <a:solidFill>
-                            <a:srgbClr val="000000"/>
-                          </a:solidFill>
-                          <a:effectLst/>
-                          <a:latin typeface="CMU Serif" panose="02000603000000000000" pitchFamily="2" charset="0"/>
-                          <a:ea typeface="標楷體" panose="03000509000000000000" pitchFamily="65" charset="-120"/>
-                        </a:rPr>
-                        <a:t> </a:t>
-                      </a:r>
-                      <a:r>
-                        <a:rPr lang="en-US" sz="1600" b="0" i="0" u="none" strike="noStrike" baseline="0" dirty="0" err="1">
-                          <a:solidFill>
-                            <a:srgbClr val="000000"/>
-                          </a:solidFill>
-                          <a:effectLst/>
-                          <a:latin typeface="CMU Serif" panose="02000603000000000000" pitchFamily="2" charset="0"/>
-                          <a:ea typeface="標楷體" panose="03000509000000000000" pitchFamily="65" charset="-120"/>
-                        </a:rPr>
-                        <a:t>errors、t-values</a:t>
-                      </a:r>
-                      <a:r>
-                        <a:rPr lang="en-US" sz="1600" b="0" i="0" u="none" strike="noStrike" baseline="0" dirty="0">
-                          <a:solidFill>
-                            <a:srgbClr val="000000"/>
-                          </a:solidFill>
-                          <a:effectLst/>
-                          <a:latin typeface="CMU Serif" panose="02000603000000000000" pitchFamily="2" charset="0"/>
-                          <a:ea typeface="標楷體" panose="03000509000000000000" pitchFamily="65" charset="-120"/>
-                        </a:rPr>
-                        <a:t> </a:t>
-                      </a:r>
-                      <a:r>
-                        <a:rPr lang="zh-TW" altLang="en-US" sz="1600" b="0" i="0" u="none" strike="noStrike" baseline="0" dirty="0">
-                          <a:solidFill>
-                            <a:srgbClr val="000000"/>
-                          </a:solidFill>
-                          <a:effectLst/>
-                          <a:latin typeface="CMU Serif" panose="02000603000000000000" pitchFamily="2" charset="0"/>
-                          <a:ea typeface="標楷體" panose="03000509000000000000" pitchFamily="65" charset="-120"/>
-                        </a:rPr>
-                        <a:t>等</a:t>
-                      </a:r>
-                    </a:p>
-                  </a:txBody>
-                  <a:tcPr marL="5262" marR="5262" marT="5262" marB="0" anchor="ctr">
-                    <a:lnL w="12700" cap="flat" cmpd="sng" algn="ctr">
-                      <a:solidFill>
-                        <a:schemeClr val="tx1"/>
-                      </a:solidFill>
-                      <a:prstDash val="solid"/>
-                      <a:round/>
-                      <a:headEnd type="none" w="med" len="med"/>
-                      <a:tailEnd type="none" w="med" len="med"/>
-                    </a:lnL>
-                    <a:lnR w="12700" cap="flat" cmpd="sng" algn="ctr">
-                      <a:solidFill>
-                        <a:schemeClr val="tx1"/>
-                      </a:solidFill>
-                      <a:prstDash val="solid"/>
-                      <a:round/>
-                      <a:headEnd type="none" w="med" len="med"/>
-                      <a:tailEnd type="none" w="med" len="med"/>
-                    </a:lnR>
-                    <a:lnT w="12700" cap="flat" cmpd="sng" algn="ctr">
-                      <a:solidFill>
-                        <a:schemeClr val="tx1"/>
-                      </a:solidFill>
-                      <a:prstDash val="solid"/>
-                      <a:round/>
-                      <a:headEnd type="none" w="med" len="med"/>
-                      <a:tailEnd type="none" w="med" len="med"/>
-                    </a:lnT>
-                    <a:lnB w="12700" cap="flat" cmpd="sng" algn="ctr">
-                      <a:solidFill>
-                        <a:schemeClr val="tx1"/>
-                      </a:solidFill>
-                      <a:prstDash val="solid"/>
-                      <a:round/>
-                      <a:headEnd type="none" w="med" len="med"/>
-                      <a:tailEnd type="none" w="med" len="med"/>
-                    </a:lnB>
-                    <a:noFill/>
-                  </a:tcPr>
-                </a:tc>
-                <a:tc>
-                  <a:txBody>
-                    <a:bodyPr/>
-                    <a:lstStyle/>
-                    <a:p>
-                      <a:pPr algn="ctr" fontAlgn="ctr">
-                        <a:buNone/>
-                      </a:pPr>
-                      <a:r>
-                        <a:rPr lang="en-US" sz="1600" b="0" i="0" u="none" strike="noStrike" baseline="0">
-                          <a:solidFill>
-                            <a:srgbClr val="000000"/>
-                          </a:solidFill>
-                          <a:effectLst/>
-                          <a:latin typeface="CMU Serif" panose="02000603000000000000" pitchFamily="2" charset="0"/>
-                          <a:ea typeface="標楷體" panose="03000509000000000000" pitchFamily="65" charset="-120"/>
-                        </a:rPr>
-                        <a:t>V</a:t>
-                      </a:r>
-                    </a:p>
-                  </a:txBody>
-                  <a:tcPr marL="5262" marR="5262" marT="5262" marB="0" anchor="ctr">
-                    <a:lnL w="12700" cap="flat" cmpd="sng" algn="ctr">
-                      <a:solidFill>
-                        <a:schemeClr val="tx1"/>
-                      </a:solidFill>
-                      <a:prstDash val="solid"/>
-                      <a:round/>
-                      <a:headEnd type="none" w="med" len="med"/>
-                      <a:tailEnd type="none" w="med" len="med"/>
-                    </a:lnL>
-                    <a:lnR w="12700" cap="flat" cmpd="sng" algn="ctr">
-                      <a:solidFill>
-                        <a:schemeClr val="tx1"/>
-                      </a:solidFill>
-                      <a:prstDash val="solid"/>
-                      <a:round/>
-                      <a:headEnd type="none" w="med" len="med"/>
-                      <a:tailEnd type="none" w="med" len="med"/>
-                    </a:lnR>
-                    <a:lnT w="12700" cap="flat" cmpd="sng" algn="ctr">
-                      <a:solidFill>
-                        <a:schemeClr val="tx1"/>
-                      </a:solidFill>
-                      <a:prstDash val="solid"/>
-                      <a:round/>
-                      <a:headEnd type="none" w="med" len="med"/>
-                      <a:tailEnd type="none" w="med" len="med"/>
-                    </a:lnT>
-                    <a:lnB w="12700" cap="flat" cmpd="sng" algn="ctr">
-                      <a:solidFill>
-                        <a:schemeClr val="tx1"/>
-                      </a:solidFill>
-                      <a:prstDash val="solid"/>
-                      <a:round/>
-                      <a:headEnd type="none" w="med" len="med"/>
-                      <a:tailEnd type="none" w="med" len="med"/>
-                    </a:lnB>
-                    <a:noFill/>
-                  </a:tcPr>
-                </a:tc>
-                <a:extLst>
-                  <a:ext uri="{0D108BD9-81ED-4DB2-BD59-A6C34878D82A}">
-                    <a16:rowId xmlns:a16="http://schemas.microsoft.com/office/drawing/2014/main" val="1090317284"/>
-                  </a:ext>
-                </a:extLst>
-              </a:tr>
-              <a:tr h="445855">
-                <a:tc>
-                  <a:txBody>
-                    <a:bodyPr/>
-                    <a:lstStyle/>
-                    <a:p>
-                      <a:pPr algn="ctr" fontAlgn="ctr">
-                        <a:buNone/>
-                      </a:pPr>
-                      <a:r>
-                        <a:rPr lang="en-US" sz="1600" b="0" i="0" u="none" strike="noStrike" baseline="0">
-                          <a:solidFill>
-                            <a:srgbClr val="000000"/>
-                          </a:solidFill>
-                          <a:effectLst/>
-                          <a:latin typeface="CMU Serif" panose="02000603000000000000" pitchFamily="2" charset="0"/>
-                          <a:ea typeface="標楷體" panose="03000509000000000000" pitchFamily="65" charset="-120"/>
-                        </a:rPr>
-                        <a:t>timings</a:t>
-                      </a:r>
-                    </a:p>
-                  </a:txBody>
-                  <a:tcPr marL="5262" marR="5262" marT="5262" marB="0" anchor="ctr">
-                    <a:lnL w="12700" cap="flat" cmpd="sng" algn="ctr">
-                      <a:solidFill>
-                        <a:schemeClr val="tx1"/>
-                      </a:solidFill>
-                      <a:prstDash val="solid"/>
-                      <a:round/>
-                      <a:headEnd type="none" w="med" len="med"/>
-                      <a:tailEnd type="none" w="med" len="med"/>
-                    </a:lnL>
-                    <a:lnR w="12700" cap="flat" cmpd="sng" algn="ctr">
-                      <a:solidFill>
-                        <a:schemeClr val="tx1"/>
-                      </a:solidFill>
-                      <a:prstDash val="solid"/>
-                      <a:round/>
-                      <a:headEnd type="none" w="med" len="med"/>
-                      <a:tailEnd type="none" w="med" len="med"/>
-                    </a:lnR>
-                    <a:lnT w="12700" cap="flat" cmpd="sng" algn="ctr">
-                      <a:solidFill>
-                        <a:schemeClr val="tx1"/>
-                      </a:solidFill>
-                      <a:prstDash val="solid"/>
-                      <a:round/>
-                      <a:headEnd type="none" w="med" len="med"/>
-                      <a:tailEnd type="none" w="med" len="med"/>
-                    </a:lnT>
-                    <a:lnB w="12700" cap="flat" cmpd="sng" algn="ctr">
-                      <a:solidFill>
-                        <a:schemeClr val="tx1"/>
-                      </a:solidFill>
-                      <a:prstDash val="solid"/>
-                      <a:round/>
-                      <a:headEnd type="none" w="med" len="med"/>
-                      <a:tailEnd type="none" w="med" len="med"/>
-                    </a:lnB>
-                    <a:solidFill>
-                      <a:schemeClr val="bg1">
-                        <a:lumMod val="75000"/>
-                      </a:schemeClr>
-                    </a:solidFill>
-                  </a:tcPr>
-                </a:tc>
-                <a:tc>
-                  <a:txBody>
-                    <a:bodyPr/>
-                    <a:lstStyle/>
-                    <a:p>
-                      <a:pPr algn="ctr" fontAlgn="ctr">
-                        <a:buNone/>
-                      </a:pPr>
-                      <a:r>
-                        <a:rPr lang="zh-TW" altLang="en-US" sz="1600" b="0" i="0" u="none" strike="noStrike" baseline="0" dirty="0">
-                          <a:solidFill>
-                            <a:srgbClr val="000000"/>
-                          </a:solidFill>
-                          <a:effectLst/>
-                          <a:latin typeface="CMU Serif" panose="02000603000000000000" pitchFamily="2" charset="0"/>
-                          <a:ea typeface="標楷體" panose="03000509000000000000" pitchFamily="65" charset="-120"/>
-                        </a:rPr>
-                        <a:t>模型開始與結束時間</a:t>
-                      </a:r>
-                    </a:p>
-                  </a:txBody>
-                  <a:tcPr marL="5262" marR="5262" marT="5262" marB="0" anchor="ctr">
-                    <a:lnL w="12700" cap="flat" cmpd="sng" algn="ctr">
-                      <a:solidFill>
-                        <a:schemeClr val="tx1"/>
-                      </a:solidFill>
-                      <a:prstDash val="solid"/>
-                      <a:round/>
-                      <a:headEnd type="none" w="med" len="med"/>
-                      <a:tailEnd type="none" w="med" len="med"/>
-                    </a:lnL>
-                    <a:lnR w="12700" cap="flat" cmpd="sng" algn="ctr">
-                      <a:solidFill>
-                        <a:schemeClr val="tx1"/>
-                      </a:solidFill>
-                      <a:prstDash val="solid"/>
-                      <a:round/>
-                      <a:headEnd type="none" w="med" len="med"/>
-                      <a:tailEnd type="none" w="med" len="med"/>
-                    </a:lnR>
-                    <a:lnT w="12700" cap="flat" cmpd="sng" algn="ctr">
-                      <a:solidFill>
-                        <a:schemeClr val="tx1"/>
-                      </a:solidFill>
-                      <a:prstDash val="solid"/>
-                      <a:round/>
-                      <a:headEnd type="none" w="med" len="med"/>
-                      <a:tailEnd type="none" w="med" len="med"/>
-                    </a:lnT>
-                    <a:lnB w="12700" cap="flat" cmpd="sng" algn="ctr">
-                      <a:solidFill>
-                        <a:schemeClr val="tx1"/>
-                      </a:solidFill>
-                      <a:prstDash val="solid"/>
-                      <a:round/>
-                      <a:headEnd type="none" w="med" len="med"/>
-                      <a:tailEnd type="none" w="med" len="med"/>
-                    </a:lnB>
-                    <a:solidFill>
-                      <a:schemeClr val="bg1">
-                        <a:lumMod val="75000"/>
-                      </a:schemeClr>
-                    </a:solidFill>
-                  </a:tcPr>
-                </a:tc>
-                <a:tc>
-                  <a:txBody>
-                    <a:bodyPr/>
-                    <a:lstStyle/>
-                    <a:p>
-                      <a:pPr algn="ctr" fontAlgn="ctr">
-                        <a:buNone/>
-                      </a:pPr>
-                      <a:r>
-                        <a:rPr lang="en-US" sz="1600" b="0" i="0" u="none" strike="noStrike" baseline="0">
-                          <a:solidFill>
-                            <a:srgbClr val="000000"/>
-                          </a:solidFill>
-                          <a:effectLst/>
-                          <a:latin typeface="CMU Serif" panose="02000603000000000000" pitchFamily="2" charset="0"/>
-                          <a:ea typeface="標楷體" panose="03000509000000000000" pitchFamily="65" charset="-120"/>
-                        </a:rPr>
-                        <a:t>X</a:t>
-                      </a:r>
-                    </a:p>
-                  </a:txBody>
-                  <a:tcPr marL="5262" marR="5262" marT="5262" marB="0" anchor="ctr">
-                    <a:lnL w="12700" cap="flat" cmpd="sng" algn="ctr">
-                      <a:solidFill>
-                        <a:schemeClr val="tx1"/>
-                      </a:solidFill>
-                      <a:prstDash val="solid"/>
-                      <a:round/>
-                      <a:headEnd type="none" w="med" len="med"/>
-                      <a:tailEnd type="none" w="med" len="med"/>
-                    </a:lnL>
-                    <a:lnR w="12700" cap="flat" cmpd="sng" algn="ctr">
-                      <a:solidFill>
-                        <a:schemeClr val="tx1"/>
-                      </a:solidFill>
-                      <a:prstDash val="solid"/>
-                      <a:round/>
-                      <a:headEnd type="none" w="med" len="med"/>
-                      <a:tailEnd type="none" w="med" len="med"/>
-                    </a:lnR>
-                    <a:lnT w="12700" cap="flat" cmpd="sng" algn="ctr">
-                      <a:solidFill>
-                        <a:schemeClr val="tx1"/>
-                      </a:solidFill>
-                      <a:prstDash val="solid"/>
-                      <a:round/>
-                      <a:headEnd type="none" w="med" len="med"/>
-                      <a:tailEnd type="none" w="med" len="med"/>
-                    </a:lnT>
-                    <a:lnB w="12700" cap="flat" cmpd="sng" algn="ctr">
-                      <a:solidFill>
-                        <a:schemeClr val="tx1"/>
-                      </a:solidFill>
-                      <a:prstDash val="solid"/>
-                      <a:round/>
-                      <a:headEnd type="none" w="med" len="med"/>
-                      <a:tailEnd type="none" w="med" len="med"/>
-                    </a:lnB>
-                    <a:solidFill>
-                      <a:schemeClr val="bg1">
-                        <a:lumMod val="75000"/>
-                      </a:schemeClr>
-                    </a:solidFill>
-                  </a:tcPr>
-                </a:tc>
-                <a:extLst>
-                  <a:ext uri="{0D108BD9-81ED-4DB2-BD59-A6C34878D82A}">
-                    <a16:rowId xmlns:a16="http://schemas.microsoft.com/office/drawing/2014/main" val="1106755338"/>
-                  </a:ext>
-                </a:extLst>
-              </a:tr>
-              <a:tr h="445855">
-                <a:tc>
-                  <a:txBody>
-                    <a:bodyPr/>
-                    <a:lstStyle/>
-                    <a:p>
-                      <a:pPr algn="ctr" fontAlgn="ctr">
-                        <a:buNone/>
-                      </a:pPr>
-                      <a:r>
-                        <a:rPr lang="en-US" sz="1600" b="0" i="0" u="none" strike="noStrike" baseline="0">
-                          <a:solidFill>
-                            <a:srgbClr val="000000"/>
-                          </a:solidFill>
-                          <a:effectLst/>
-                          <a:latin typeface="CMU Serif" panose="02000603000000000000" pitchFamily="2" charset="0"/>
-                          <a:ea typeface="標楷體" panose="03000509000000000000" pitchFamily="65" charset="-120"/>
-                        </a:rPr>
-                        <a:t>this.call</a:t>
-                      </a:r>
-                    </a:p>
-                  </a:txBody>
-                  <a:tcPr marL="5262" marR="5262" marT="5262" marB="0" anchor="ctr">
-                    <a:lnL w="12700" cap="flat" cmpd="sng" algn="ctr">
-                      <a:solidFill>
-                        <a:schemeClr val="tx1"/>
-                      </a:solidFill>
-                      <a:prstDash val="solid"/>
-                      <a:round/>
-                      <a:headEnd type="none" w="med" len="med"/>
-                      <a:tailEnd type="none" w="med" len="med"/>
-                    </a:lnL>
-                    <a:lnR w="12700" cap="flat" cmpd="sng" algn="ctr">
-                      <a:solidFill>
-                        <a:schemeClr val="tx1"/>
-                      </a:solidFill>
-                      <a:prstDash val="solid"/>
-                      <a:round/>
-                      <a:headEnd type="none" w="med" len="med"/>
-                      <a:tailEnd type="none" w="med" len="med"/>
-                    </a:lnR>
-                    <a:lnT w="12700" cap="flat" cmpd="sng" algn="ctr">
-                      <a:solidFill>
-                        <a:schemeClr val="tx1"/>
-                      </a:solidFill>
-                      <a:prstDash val="solid"/>
-                      <a:round/>
-                      <a:headEnd type="none" w="med" len="med"/>
-                      <a:tailEnd type="none" w="med" len="med"/>
-                    </a:lnT>
-                    <a:lnB w="12700" cap="flat" cmpd="sng" algn="ctr">
-                      <a:solidFill>
-                        <a:schemeClr val="tx1"/>
-                      </a:solidFill>
-                      <a:prstDash val="solid"/>
-                      <a:round/>
-                      <a:headEnd type="none" w="med" len="med"/>
-                      <a:tailEnd type="none" w="med" len="med"/>
-                    </a:lnB>
-                    <a:solidFill>
-                      <a:schemeClr val="bg1">
-                        <a:lumMod val="75000"/>
-                      </a:schemeClr>
-                    </a:solidFill>
-                  </a:tcPr>
-                </a:tc>
-                <a:tc>
-                  <a:txBody>
-                    <a:bodyPr/>
-                    <a:lstStyle/>
-                    <a:p>
-                      <a:pPr algn="ctr" fontAlgn="ctr">
-                        <a:buNone/>
-                      </a:pPr>
-                      <a:r>
-                        <a:rPr lang="zh-TW" altLang="en-US" sz="1600" b="0" i="0" u="none" strike="noStrike" baseline="0">
-                          <a:solidFill>
-                            <a:srgbClr val="000000"/>
-                          </a:solidFill>
-                          <a:effectLst/>
-                          <a:latin typeface="CMU Serif" panose="02000603000000000000" pitchFamily="2" charset="0"/>
-                          <a:ea typeface="標楷體" panose="03000509000000000000" pitchFamily="65" charset="-120"/>
-                        </a:rPr>
-                        <a:t>當初執行的 </a:t>
-                      </a:r>
-                      <a:r>
-                        <a:rPr lang="en-US" sz="1600" b="0" i="0" u="none" strike="noStrike" baseline="0">
-                          <a:solidFill>
-                            <a:srgbClr val="000000"/>
-                          </a:solidFill>
-                          <a:effectLst/>
-                          <a:latin typeface="CMU Serif" panose="02000603000000000000" pitchFamily="2" charset="0"/>
-                          <a:ea typeface="標楷體" panose="03000509000000000000" pitchFamily="65" charset="-120"/>
-                        </a:rPr>
-                        <a:t>function call</a:t>
-                      </a:r>
-                    </a:p>
-                  </a:txBody>
-                  <a:tcPr marL="5262" marR="5262" marT="5262" marB="0" anchor="ctr">
-                    <a:lnL w="12700" cap="flat" cmpd="sng" algn="ctr">
-                      <a:solidFill>
-                        <a:schemeClr val="tx1"/>
-                      </a:solidFill>
-                      <a:prstDash val="solid"/>
-                      <a:round/>
-                      <a:headEnd type="none" w="med" len="med"/>
-                      <a:tailEnd type="none" w="med" len="med"/>
-                    </a:lnL>
-                    <a:lnR w="12700" cap="flat" cmpd="sng" algn="ctr">
-                      <a:solidFill>
-                        <a:schemeClr val="tx1"/>
-                      </a:solidFill>
-                      <a:prstDash val="solid"/>
-                      <a:round/>
-                      <a:headEnd type="none" w="med" len="med"/>
-                      <a:tailEnd type="none" w="med" len="med"/>
-                    </a:lnR>
-                    <a:lnT w="12700" cap="flat" cmpd="sng" algn="ctr">
-                      <a:solidFill>
-                        <a:schemeClr val="tx1"/>
-                      </a:solidFill>
-                      <a:prstDash val="solid"/>
-                      <a:round/>
-                      <a:headEnd type="none" w="med" len="med"/>
-                      <a:tailEnd type="none" w="med" len="med"/>
-                    </a:lnT>
-                    <a:lnB w="12700" cap="flat" cmpd="sng" algn="ctr">
-                      <a:solidFill>
-                        <a:schemeClr val="tx1"/>
-                      </a:solidFill>
-                      <a:prstDash val="solid"/>
-                      <a:round/>
-                      <a:headEnd type="none" w="med" len="med"/>
-                      <a:tailEnd type="none" w="med" len="med"/>
-                    </a:lnB>
-                    <a:solidFill>
-                      <a:schemeClr val="bg1">
-                        <a:lumMod val="75000"/>
-                      </a:schemeClr>
-                    </a:solidFill>
-                  </a:tcPr>
-                </a:tc>
-                <a:tc>
-                  <a:txBody>
-                    <a:bodyPr/>
-                    <a:lstStyle/>
-                    <a:p>
-                      <a:pPr algn="ctr" fontAlgn="ctr">
-                        <a:buNone/>
-                      </a:pPr>
-                      <a:r>
-                        <a:rPr lang="en-US" sz="1600" b="0" i="0" u="none" strike="noStrike" baseline="0" dirty="0">
-                          <a:solidFill>
-                            <a:srgbClr val="000000"/>
-                          </a:solidFill>
-                          <a:effectLst/>
-                          <a:latin typeface="CMU Serif" panose="02000603000000000000" pitchFamily="2" charset="0"/>
-                          <a:ea typeface="標楷體" panose="03000509000000000000" pitchFamily="65" charset="-120"/>
-                        </a:rPr>
-                        <a:t>X</a:t>
-                      </a:r>
-                    </a:p>
-                  </a:txBody>
-                  <a:tcPr marL="5262" marR="5262" marT="5262" marB="0" anchor="ctr">
-                    <a:lnL w="12700" cap="flat" cmpd="sng" algn="ctr">
-                      <a:solidFill>
-                        <a:schemeClr val="tx1"/>
-                      </a:solidFill>
-                      <a:prstDash val="solid"/>
-                      <a:round/>
-                      <a:headEnd type="none" w="med" len="med"/>
-                      <a:tailEnd type="none" w="med" len="med"/>
-                    </a:lnL>
-                    <a:lnR w="12700" cap="flat" cmpd="sng" algn="ctr">
-                      <a:solidFill>
-                        <a:schemeClr val="tx1"/>
-                      </a:solidFill>
-                      <a:prstDash val="solid"/>
-                      <a:round/>
-                      <a:headEnd type="none" w="med" len="med"/>
-                      <a:tailEnd type="none" w="med" len="med"/>
-                    </a:lnR>
-                    <a:lnT w="12700" cap="flat" cmpd="sng" algn="ctr">
-                      <a:solidFill>
-                        <a:schemeClr val="tx1"/>
-                      </a:solidFill>
-                      <a:prstDash val="solid"/>
-                      <a:round/>
-                      <a:headEnd type="none" w="med" len="med"/>
-                      <a:tailEnd type="none" w="med" len="med"/>
-                    </a:lnT>
-                    <a:lnB w="12700" cap="flat" cmpd="sng" algn="ctr">
-                      <a:solidFill>
-                        <a:schemeClr val="tx1"/>
-                      </a:solidFill>
-                      <a:prstDash val="solid"/>
-                      <a:round/>
-                      <a:headEnd type="none" w="med" len="med"/>
-                      <a:tailEnd type="none" w="med" len="med"/>
-                    </a:lnB>
-                    <a:solidFill>
-                      <a:schemeClr val="bg1">
-                        <a:lumMod val="75000"/>
-                      </a:schemeClr>
-                    </a:solidFill>
-                  </a:tcPr>
-                </a:tc>
-                <a:extLst>
-                  <a:ext uri="{0D108BD9-81ED-4DB2-BD59-A6C34878D82A}">
-                    <a16:rowId xmlns:a16="http://schemas.microsoft.com/office/drawing/2014/main" val="159445076"/>
-                  </a:ext>
-                </a:extLst>
-              </a:tr>
-              <a:tr h="445855">
-                <a:tc>
-                  <a:txBody>
-                    <a:bodyPr/>
-                    <a:lstStyle/>
-                    <a:p>
-                      <a:pPr algn="ctr" fontAlgn="ctr">
-                        <a:buNone/>
-                      </a:pPr>
-                      <a:r>
-                        <a:rPr lang="en-US" sz="1600" b="0" i="0" u="none" strike="noStrike" baseline="0">
-                          <a:solidFill>
-                            <a:srgbClr val="000000"/>
-                          </a:solidFill>
-                          <a:effectLst/>
-                          <a:latin typeface="CMU Serif" panose="02000603000000000000" pitchFamily="2" charset="0"/>
-                          <a:ea typeface="標楷體" panose="03000509000000000000" pitchFamily="65" charset="-120"/>
-                        </a:rPr>
-                        <a:t>Ftest.res</a:t>
-                      </a:r>
-                    </a:p>
-                  </a:txBody>
-                  <a:tcPr marL="5262" marR="5262" marT="5262" marB="0" anchor="ctr">
-                    <a:lnL w="12700" cap="flat" cmpd="sng" algn="ctr">
-                      <a:solidFill>
-                        <a:schemeClr val="tx1"/>
-                      </a:solidFill>
-                      <a:prstDash val="solid"/>
-                      <a:round/>
-                      <a:headEnd type="none" w="med" len="med"/>
-                      <a:tailEnd type="none" w="med" len="med"/>
-                    </a:lnL>
-                    <a:lnR w="12700" cap="flat" cmpd="sng" algn="ctr">
-                      <a:solidFill>
-                        <a:schemeClr val="tx1"/>
-                      </a:solidFill>
-                      <a:prstDash val="solid"/>
-                      <a:round/>
-                      <a:headEnd type="none" w="med" len="med"/>
-                      <a:tailEnd type="none" w="med" len="med"/>
-                    </a:lnR>
-                    <a:lnT w="12700" cap="flat" cmpd="sng" algn="ctr">
-                      <a:solidFill>
-                        <a:schemeClr val="tx1"/>
-                      </a:solidFill>
-                      <a:prstDash val="solid"/>
-                      <a:round/>
-                      <a:headEnd type="none" w="med" len="med"/>
-                      <a:tailEnd type="none" w="med" len="med"/>
-                    </a:lnT>
-                    <a:lnB w="12700" cap="flat" cmpd="sng" algn="ctr">
-                      <a:solidFill>
-                        <a:schemeClr val="tx1"/>
-                      </a:solidFill>
-                      <a:prstDash val="solid"/>
-                      <a:round/>
-                      <a:headEnd type="none" w="med" len="med"/>
-                      <a:tailEnd type="none" w="med" len="med"/>
-                    </a:lnB>
-                    <a:solidFill>
-                      <a:schemeClr val="bg1">
-                        <a:lumMod val="75000"/>
-                      </a:schemeClr>
-                    </a:solidFill>
-                  </a:tcPr>
-                </a:tc>
-                <a:tc>
-                  <a:txBody>
-                    <a:bodyPr/>
-                    <a:lstStyle/>
-                    <a:p>
-                      <a:pPr algn="ctr" fontAlgn="ctr">
-                        <a:buNone/>
-                      </a:pPr>
-                      <a:r>
-                        <a:rPr lang="zh-TW" altLang="en-US" sz="1600" b="0" i="0" u="none" strike="noStrike" baseline="0">
-                          <a:solidFill>
-                            <a:srgbClr val="000000"/>
-                          </a:solidFill>
-                          <a:effectLst/>
-                          <a:latin typeface="CMU Serif" panose="02000603000000000000" pitchFamily="2" charset="0"/>
-                          <a:ea typeface="標楷體" panose="03000509000000000000" pitchFamily="65" charset="-120"/>
-                        </a:rPr>
-                        <a:t>若 </a:t>
-                      </a:r>
-                      <a:r>
-                        <a:rPr lang="en-US" sz="1600" b="0" i="0" u="none" strike="noStrike" baseline="0">
-                          <a:solidFill>
-                            <a:srgbClr val="000000"/>
-                          </a:solidFill>
-                          <a:effectLst/>
-                          <a:latin typeface="CMU Serif" panose="02000603000000000000" pitchFamily="2" charset="0"/>
-                          <a:ea typeface="標楷體" panose="03000509000000000000" pitchFamily="65" charset="-120"/>
-                        </a:rPr>
-                        <a:t>F123.test = TRUE，</a:t>
-                      </a:r>
-                      <a:r>
-                        <a:rPr lang="zh-TW" altLang="en-US" sz="1600" b="0" i="0" u="none" strike="noStrike" baseline="0">
-                          <a:solidFill>
-                            <a:srgbClr val="000000"/>
-                          </a:solidFill>
-                          <a:effectLst/>
-                          <a:latin typeface="CMU Serif" panose="02000603000000000000" pitchFamily="2" charset="0"/>
-                          <a:ea typeface="標楷體" panose="03000509000000000000" pitchFamily="65" charset="-120"/>
-                        </a:rPr>
-                        <a:t>這裡會存 </a:t>
-                      </a:r>
-                      <a:r>
-                        <a:rPr lang="en-US" sz="1600" b="0" i="0" u="none" strike="noStrike" baseline="0">
-                          <a:solidFill>
-                            <a:srgbClr val="000000"/>
-                          </a:solidFill>
-                          <a:effectLst/>
-                          <a:latin typeface="CMU Serif" panose="02000603000000000000" pitchFamily="2" charset="0"/>
-                          <a:ea typeface="標楷體" panose="03000509000000000000" pitchFamily="65" charset="-120"/>
-                        </a:rPr>
-                        <a:t>Leung’s F-tests </a:t>
-                      </a:r>
-                      <a:r>
-                        <a:rPr lang="zh-TW" altLang="en-US" sz="1600" b="0" i="0" u="none" strike="noStrike" baseline="0">
-                          <a:solidFill>
-                            <a:srgbClr val="000000"/>
-                          </a:solidFill>
-                          <a:effectLst/>
-                          <a:latin typeface="CMU Serif" panose="02000603000000000000" pitchFamily="2" charset="0"/>
-                          <a:ea typeface="標楷體" panose="03000509000000000000" pitchFamily="65" charset="-120"/>
-                        </a:rPr>
-                        <a:t>結果</a:t>
-                      </a:r>
-                    </a:p>
-                  </a:txBody>
-                  <a:tcPr marL="5262" marR="5262" marT="5262" marB="0" anchor="ctr">
-                    <a:lnL w="12700" cap="flat" cmpd="sng" algn="ctr">
-                      <a:solidFill>
-                        <a:schemeClr val="tx1"/>
-                      </a:solidFill>
-                      <a:prstDash val="solid"/>
-                      <a:round/>
-                      <a:headEnd type="none" w="med" len="med"/>
-                      <a:tailEnd type="none" w="med" len="med"/>
-                    </a:lnL>
-                    <a:lnR w="12700" cap="flat" cmpd="sng" algn="ctr">
-                      <a:solidFill>
-                        <a:schemeClr val="tx1"/>
-                      </a:solidFill>
-                      <a:prstDash val="solid"/>
-                      <a:round/>
-                      <a:headEnd type="none" w="med" len="med"/>
-                      <a:tailEnd type="none" w="med" len="med"/>
-                    </a:lnR>
-                    <a:lnT w="12700" cap="flat" cmpd="sng" algn="ctr">
-                      <a:solidFill>
-                        <a:schemeClr val="tx1"/>
-                      </a:solidFill>
-                      <a:prstDash val="solid"/>
-                      <a:round/>
-                      <a:headEnd type="none" w="med" len="med"/>
-                      <a:tailEnd type="none" w="med" len="med"/>
-                    </a:lnT>
-                    <a:lnB w="12700" cap="flat" cmpd="sng" algn="ctr">
-                      <a:solidFill>
-                        <a:schemeClr val="tx1"/>
-                      </a:solidFill>
-                      <a:prstDash val="solid"/>
-                      <a:round/>
-                      <a:headEnd type="none" w="med" len="med"/>
-                      <a:tailEnd type="none" w="med" len="med"/>
-                    </a:lnB>
-                    <a:solidFill>
-                      <a:schemeClr val="bg1">
-                        <a:lumMod val="75000"/>
-                      </a:schemeClr>
-                    </a:solidFill>
-                  </a:tcPr>
-                </a:tc>
-                <a:tc>
-                  <a:txBody>
-                    <a:bodyPr/>
-                    <a:lstStyle/>
-                    <a:p>
-                      <a:pPr algn="ctr" fontAlgn="ctr">
-                        <a:buNone/>
-                      </a:pPr>
-                      <a:r>
-                        <a:rPr lang="en-US" sz="1600" b="0" i="0" u="none" strike="noStrike" baseline="0" dirty="0">
-                          <a:solidFill>
-                            <a:srgbClr val="000000"/>
-                          </a:solidFill>
-                          <a:effectLst/>
-                          <a:latin typeface="CMU Serif" panose="02000603000000000000" pitchFamily="2" charset="0"/>
-                          <a:ea typeface="標楷體" panose="03000509000000000000" pitchFamily="65" charset="-120"/>
-                        </a:rPr>
-                        <a:t>X</a:t>
-                      </a:r>
-                    </a:p>
-                  </a:txBody>
-                  <a:tcPr marL="5262" marR="5262" marT="5262" marB="0" anchor="ctr">
-                    <a:lnL w="12700" cap="flat" cmpd="sng" algn="ctr">
-                      <a:solidFill>
-                        <a:schemeClr val="tx1"/>
-                      </a:solidFill>
-                      <a:prstDash val="solid"/>
-                      <a:round/>
-                      <a:headEnd type="none" w="med" len="med"/>
-                      <a:tailEnd type="none" w="med" len="med"/>
-                    </a:lnL>
-                    <a:lnR w="12700" cap="flat" cmpd="sng" algn="ctr">
-                      <a:solidFill>
-                        <a:schemeClr val="tx1"/>
-                      </a:solidFill>
-                      <a:prstDash val="solid"/>
-                      <a:round/>
-                      <a:headEnd type="none" w="med" len="med"/>
-                      <a:tailEnd type="none" w="med" len="med"/>
-                    </a:lnR>
-                    <a:lnT w="12700" cap="flat" cmpd="sng" algn="ctr">
-                      <a:solidFill>
-                        <a:schemeClr val="tx1"/>
-                      </a:solidFill>
-                      <a:prstDash val="solid"/>
-                      <a:round/>
-                      <a:headEnd type="none" w="med" len="med"/>
-                      <a:tailEnd type="none" w="med" len="med"/>
-                    </a:lnT>
-                    <a:lnB w="12700" cap="flat" cmpd="sng" algn="ctr">
-                      <a:solidFill>
-                        <a:schemeClr val="tx1"/>
-                      </a:solidFill>
-                      <a:prstDash val="solid"/>
-                      <a:round/>
-                      <a:headEnd type="none" w="med" len="med"/>
-                      <a:tailEnd type="none" w="med" len="med"/>
-                    </a:lnB>
-                    <a:solidFill>
-                      <a:schemeClr val="bg1">
-                        <a:lumMod val="75000"/>
-                      </a:schemeClr>
-                    </a:solidFill>
-                  </a:tcPr>
-                </a:tc>
-                <a:extLst>
-                  <a:ext uri="{0D108BD9-81ED-4DB2-BD59-A6C34878D82A}">
-                    <a16:rowId xmlns:a16="http://schemas.microsoft.com/office/drawing/2014/main" val="1669230428"/>
-                  </a:ext>
-                </a:extLst>
-              </a:tr>
-            </a:tbl>
-          </a:graphicData>
-        </a:graphic>
-      </p:graphicFrame>
-    </p:spTree>
-    <p:extLst>
-      <p:ext uri="{BB962C8B-B14F-4D97-AF65-F5344CB8AC3E}">
-        <p14:creationId xmlns:p14="http://schemas.microsoft.com/office/powerpoint/2010/main" val="1503102211"/>
       </p:ext>
     </p:extLst>
   </p:cSld>
@@ -21882,7 +20389,7 @@
         <p:cNvPr id="1" name="">
           <a:extLst>
             <a:ext uri="{FF2B5EF4-FFF2-40B4-BE49-F238E27FC236}">
-              <a16:creationId xmlns:a16="http://schemas.microsoft.com/office/drawing/2014/main" id="{591C40E2-50FE-365F-00D9-45FC12CC25DA}"/>
+              <a16:creationId xmlns:a16="http://schemas.microsoft.com/office/drawing/2014/main" id="{E6B586D2-C368-D2F0-D365-1DCC11A01B35}"/>
             </a:ext>
           </a:extLst>
         </p:cNvPr>
@@ -21902,7 +20409,7 @@
           <p:cNvPr id="4" name="矩形 3">
             <a:extLst>
               <a:ext uri="{FF2B5EF4-FFF2-40B4-BE49-F238E27FC236}">
-                <a16:creationId xmlns:a16="http://schemas.microsoft.com/office/drawing/2014/main" id="{74CC0E3E-6FC9-F6BE-9C03-FFD140EBFE1E}"/>
+                <a16:creationId xmlns:a16="http://schemas.microsoft.com/office/drawing/2014/main" id="{EBF8C0C8-84C1-40CD-360B-EE31B7A9CF84}"/>
               </a:ext>
             </a:extLst>
           </p:cNvPr>
@@ -21962,7 +20469,7 @@
           <p:cNvPr id="5" name="矩形 4">
             <a:extLst>
               <a:ext uri="{FF2B5EF4-FFF2-40B4-BE49-F238E27FC236}">
-                <a16:creationId xmlns:a16="http://schemas.microsoft.com/office/drawing/2014/main" id="{70622523-F8CB-AD13-8111-0D9B7698EB0A}"/>
+                <a16:creationId xmlns:a16="http://schemas.microsoft.com/office/drawing/2014/main" id="{E7D31879-CA96-01E4-70D2-1FF71967ED73}"/>
               </a:ext>
             </a:extLst>
           </p:cNvPr>
@@ -22067,462 +20574,10 @@
       </p:sp>
       <p:sp>
         <p:nvSpPr>
-          <p:cNvPr id="7" name="箭號: 五邊形 6">
+          <p:cNvPr id="10" name="文字方塊 9">
             <a:extLst>
               <a:ext uri="{FF2B5EF4-FFF2-40B4-BE49-F238E27FC236}">
-                <a16:creationId xmlns:a16="http://schemas.microsoft.com/office/drawing/2014/main" id="{FFC58CFD-3C75-6470-F716-253C4085C8A0}"/>
-              </a:ext>
-            </a:extLst>
-          </p:cNvPr>
-          <p:cNvSpPr/>
-          <p:nvPr/>
-        </p:nvSpPr>
-        <p:spPr>
-          <a:xfrm>
-            <a:off x="1432674" y="3071813"/>
-            <a:ext cx="1722903" cy="1085850"/>
-          </a:xfrm>
-          <a:prstGeom prst="homePlate">
-            <a:avLst>
-              <a:gd name="adj" fmla="val 42570"/>
-            </a:avLst>
-          </a:prstGeom>
-          <a:noFill/>
-          <a:ln>
-            <a:solidFill>
-              <a:schemeClr val="tx1"/>
-            </a:solidFill>
-          </a:ln>
-        </p:spPr>
-        <p:style>
-          <a:lnRef idx="2">
-            <a:schemeClr val="accent1">
-              <a:shade val="15000"/>
-            </a:schemeClr>
-          </a:lnRef>
-          <a:fillRef idx="1">
-            <a:schemeClr val="accent1"/>
-          </a:fillRef>
-          <a:effectRef idx="0">
-            <a:schemeClr val="accent1"/>
-          </a:effectRef>
-          <a:fontRef idx="minor">
-            <a:schemeClr val="lt1"/>
-          </a:fontRef>
-        </p:style>
-        <p:txBody>
-          <a:bodyPr rtlCol="0" anchor="ctr"/>
-          <a:lstStyle/>
-          <a:p>
-            <a:pPr algn="ctr"/>
-            <a:r>
-              <a:rPr lang="zh-TW" altLang="en-US" sz="2000" dirty="0">
-                <a:solidFill>
-                  <a:sysClr val="windowText" lastClr="000000"/>
-                </a:solidFill>
-                <a:latin typeface="CMU Serif" panose="02000603000000000000" pitchFamily="2" charset="0"/>
-                <a:ea typeface="標楷體" panose="03000509000000000000" pitchFamily="65" charset="-120"/>
-              </a:rPr>
-              <a:t>引入</a:t>
-            </a:r>
-            <a:r>
-              <a:rPr lang="en-US" altLang="zh-TW" sz="2000" dirty="0">
-                <a:solidFill>
-                  <a:sysClr val="windowText" lastClr="000000"/>
-                </a:solidFill>
-                <a:latin typeface="CMU Serif" panose="02000603000000000000" pitchFamily="2" charset="0"/>
-                <a:ea typeface="標楷體" panose="03000509000000000000" pitchFamily="65" charset="-120"/>
-              </a:rPr>
-              <a:t> </a:t>
-            </a:r>
-          </a:p>
-          <a:p>
-            <a:pPr algn="ctr"/>
-            <a:r>
-              <a:rPr lang="en-US" altLang="zh-TW" sz="2000" dirty="0">
-                <a:solidFill>
-                  <a:sysClr val="windowText" lastClr="000000"/>
-                </a:solidFill>
-                <a:latin typeface="CMU Serif" panose="02000603000000000000" pitchFamily="2" charset="0"/>
-                <a:ea typeface="標楷體" panose="03000509000000000000" pitchFamily="65" charset="-120"/>
-              </a:rPr>
-              <a:t>Georgia</a:t>
-            </a:r>
-          </a:p>
-          <a:p>
-            <a:pPr algn="ctr"/>
-            <a:r>
-              <a:rPr lang="zh-TW" altLang="en-US" sz="2000" dirty="0">
-                <a:solidFill>
-                  <a:sysClr val="windowText" lastClr="000000"/>
-                </a:solidFill>
-                <a:latin typeface="CMU Serif" panose="02000603000000000000" pitchFamily="2" charset="0"/>
-                <a:ea typeface="標楷體" panose="03000509000000000000" pitchFamily="65" charset="-120"/>
-              </a:rPr>
-              <a:t>資料</a:t>
-            </a:r>
-            <a:endParaRPr lang="en-US" altLang="zh-TW" sz="2000" dirty="0">
-              <a:solidFill>
-                <a:sysClr val="windowText" lastClr="000000"/>
-              </a:solidFill>
-              <a:latin typeface="CMU Serif" panose="02000603000000000000" pitchFamily="2" charset="0"/>
-              <a:ea typeface="標楷體" panose="03000509000000000000" pitchFamily="65" charset="-120"/>
-            </a:endParaRPr>
-          </a:p>
-        </p:txBody>
-      </p:sp>
-      <p:sp>
-        <p:nvSpPr>
-          <p:cNvPr id="16" name="箭號: 五邊形 15">
-            <a:extLst>
-              <a:ext uri="{FF2B5EF4-FFF2-40B4-BE49-F238E27FC236}">
-                <a16:creationId xmlns:a16="http://schemas.microsoft.com/office/drawing/2014/main" id="{686B263C-2EB6-A471-6E2E-6D476BD4952C}"/>
-              </a:ext>
-            </a:extLst>
-          </p:cNvPr>
-          <p:cNvSpPr/>
-          <p:nvPr/>
-        </p:nvSpPr>
-        <p:spPr>
-          <a:xfrm>
-            <a:off x="3288368" y="3071813"/>
-            <a:ext cx="1722903" cy="1085850"/>
-          </a:xfrm>
-          <a:prstGeom prst="homePlate">
-            <a:avLst>
-              <a:gd name="adj" fmla="val 42570"/>
-            </a:avLst>
-          </a:prstGeom>
-          <a:noFill/>
-          <a:ln>
-            <a:solidFill>
-              <a:schemeClr val="tx1"/>
-            </a:solidFill>
-          </a:ln>
-        </p:spPr>
-        <p:style>
-          <a:lnRef idx="2">
-            <a:schemeClr val="accent1">
-              <a:shade val="15000"/>
-            </a:schemeClr>
-          </a:lnRef>
-          <a:fillRef idx="1">
-            <a:schemeClr val="accent1"/>
-          </a:fillRef>
-          <a:effectRef idx="0">
-            <a:schemeClr val="accent1"/>
-          </a:effectRef>
-          <a:fontRef idx="minor">
-            <a:schemeClr val="lt1"/>
-          </a:fontRef>
-        </p:style>
-        <p:txBody>
-          <a:bodyPr rtlCol="0" anchor="ctr"/>
-          <a:lstStyle/>
-          <a:p>
-            <a:pPr algn="ctr"/>
-            <a:r>
-              <a:rPr lang="zh-TW" altLang="en-US" sz="2000" dirty="0">
-                <a:solidFill>
-                  <a:sysClr val="windowText" lastClr="000000"/>
-                </a:solidFill>
-                <a:latin typeface="CMU Serif" panose="02000603000000000000" pitchFamily="2" charset="0"/>
-                <a:ea typeface="標楷體" panose="03000509000000000000" pitchFamily="65" charset="-120"/>
-              </a:rPr>
-              <a:t>變數選擇</a:t>
-            </a:r>
-            <a:endParaRPr lang="en-US" altLang="zh-TW" sz="2000" dirty="0">
-              <a:solidFill>
-                <a:sysClr val="windowText" lastClr="000000"/>
-              </a:solidFill>
-              <a:latin typeface="CMU Serif" panose="02000603000000000000" pitchFamily="2" charset="0"/>
-              <a:ea typeface="標楷體" panose="03000509000000000000" pitchFamily="65" charset="-120"/>
-            </a:endParaRPr>
-          </a:p>
-        </p:txBody>
-      </p:sp>
-      <p:sp>
-        <p:nvSpPr>
-          <p:cNvPr id="17" name="箭號: 五邊形 16">
-            <a:extLst>
-              <a:ext uri="{FF2B5EF4-FFF2-40B4-BE49-F238E27FC236}">
-                <a16:creationId xmlns:a16="http://schemas.microsoft.com/office/drawing/2014/main" id="{E35CB248-282F-B643-E871-F213B62496BE}"/>
-              </a:ext>
-            </a:extLst>
-          </p:cNvPr>
-          <p:cNvSpPr/>
-          <p:nvPr/>
-        </p:nvSpPr>
-        <p:spPr>
-          <a:xfrm>
-            <a:off x="5215780" y="3071813"/>
-            <a:ext cx="1722903" cy="1085850"/>
-          </a:xfrm>
-          <a:prstGeom prst="homePlate">
-            <a:avLst>
-              <a:gd name="adj" fmla="val 42570"/>
-            </a:avLst>
-          </a:prstGeom>
-          <a:noFill/>
-          <a:ln>
-            <a:solidFill>
-              <a:schemeClr val="tx1"/>
-            </a:solidFill>
-          </a:ln>
-        </p:spPr>
-        <p:style>
-          <a:lnRef idx="2">
-            <a:schemeClr val="accent1">
-              <a:shade val="15000"/>
-            </a:schemeClr>
-          </a:lnRef>
-          <a:fillRef idx="1">
-            <a:schemeClr val="accent1"/>
-          </a:fillRef>
-          <a:effectRef idx="0">
-            <a:schemeClr val="accent1"/>
-          </a:effectRef>
-          <a:fontRef idx="minor">
-            <a:schemeClr val="lt1"/>
-          </a:fontRef>
-        </p:style>
-        <p:txBody>
-          <a:bodyPr rtlCol="0" anchor="ctr"/>
-          <a:lstStyle/>
-          <a:p>
-            <a:pPr algn="ctr"/>
-            <a:r>
-              <a:rPr lang="en-US" altLang="zh-TW" sz="2000" dirty="0" err="1">
-                <a:solidFill>
-                  <a:sysClr val="windowText" lastClr="000000"/>
-                </a:solidFill>
-                <a:latin typeface="CMU Serif" panose="02000603000000000000" pitchFamily="2" charset="0"/>
-                <a:ea typeface="標楷體" panose="03000509000000000000" pitchFamily="65" charset="-120"/>
-              </a:rPr>
-              <a:t>bw.gwr</a:t>
-            </a:r>
-            <a:r>
-              <a:rPr lang="en-US" altLang="zh-TW" sz="2000" dirty="0">
-                <a:solidFill>
-                  <a:sysClr val="windowText" lastClr="000000"/>
-                </a:solidFill>
-                <a:latin typeface="CMU Serif" panose="02000603000000000000" pitchFamily="2" charset="0"/>
-                <a:ea typeface="標楷體" panose="03000509000000000000" pitchFamily="65" charset="-120"/>
-              </a:rPr>
-              <a:t>()</a:t>
-            </a:r>
-          </a:p>
-          <a:p>
-            <a:pPr algn="ctr"/>
-            <a:r>
-              <a:rPr lang="zh-TW" altLang="en-US" sz="2000" dirty="0">
-                <a:solidFill>
-                  <a:sysClr val="windowText" lastClr="000000"/>
-                </a:solidFill>
-                <a:latin typeface="CMU Serif" panose="02000603000000000000" pitchFamily="2" charset="0"/>
-                <a:ea typeface="標楷體" panose="03000509000000000000" pitchFamily="65" charset="-120"/>
-              </a:rPr>
-              <a:t>帶寬選擇</a:t>
-            </a:r>
-            <a:endParaRPr lang="en-US" altLang="zh-TW" sz="2000" dirty="0">
-              <a:solidFill>
-                <a:sysClr val="windowText" lastClr="000000"/>
-              </a:solidFill>
-              <a:latin typeface="CMU Serif" panose="02000603000000000000" pitchFamily="2" charset="0"/>
-              <a:ea typeface="標楷體" panose="03000509000000000000" pitchFamily="65" charset="-120"/>
-            </a:endParaRPr>
-          </a:p>
-        </p:txBody>
-      </p:sp>
-      <p:sp>
-        <p:nvSpPr>
-          <p:cNvPr id="18" name="箭號: 五邊形 17">
-            <a:extLst>
-              <a:ext uri="{FF2B5EF4-FFF2-40B4-BE49-F238E27FC236}">
-                <a16:creationId xmlns:a16="http://schemas.microsoft.com/office/drawing/2014/main" id="{31E061A4-46E0-9EF3-E7A9-40B188F168F1}"/>
-              </a:ext>
-            </a:extLst>
-          </p:cNvPr>
-          <p:cNvSpPr/>
-          <p:nvPr/>
-        </p:nvSpPr>
-        <p:spPr>
-          <a:xfrm>
-            <a:off x="7143192" y="3071813"/>
-            <a:ext cx="1722903" cy="1085850"/>
-          </a:xfrm>
-          <a:prstGeom prst="homePlate">
-            <a:avLst>
-              <a:gd name="adj" fmla="val 42570"/>
-            </a:avLst>
-          </a:prstGeom>
-          <a:noFill/>
-          <a:ln>
-            <a:solidFill>
-              <a:schemeClr val="tx1"/>
-            </a:solidFill>
-          </a:ln>
-        </p:spPr>
-        <p:style>
-          <a:lnRef idx="2">
-            <a:schemeClr val="accent1">
-              <a:shade val="15000"/>
-            </a:schemeClr>
-          </a:lnRef>
-          <a:fillRef idx="1">
-            <a:schemeClr val="accent1"/>
-          </a:fillRef>
-          <a:effectRef idx="0">
-            <a:schemeClr val="accent1"/>
-          </a:effectRef>
-          <a:fontRef idx="minor">
-            <a:schemeClr val="lt1"/>
-          </a:fontRef>
-        </p:style>
-        <p:txBody>
-          <a:bodyPr rtlCol="0" anchor="ctr"/>
-          <a:lstStyle/>
-          <a:p>
-            <a:pPr algn="ctr"/>
-            <a:r>
-              <a:rPr lang="zh-TW" altLang="en-US" sz="2000" dirty="0">
-                <a:solidFill>
-                  <a:sysClr val="windowText" lastClr="000000"/>
-                </a:solidFill>
-                <a:latin typeface="CMU Serif" panose="02000603000000000000" pitchFamily="2" charset="0"/>
-                <a:ea typeface="標楷體" panose="03000509000000000000" pitchFamily="65" charset="-120"/>
-              </a:rPr>
-              <a:t>建構 </a:t>
-            </a:r>
-            <a:r>
-              <a:rPr lang="en-US" altLang="zh-TW" sz="2000" dirty="0">
-                <a:solidFill>
-                  <a:sysClr val="windowText" lastClr="000000"/>
-                </a:solidFill>
-                <a:latin typeface="CMU Serif" panose="02000603000000000000" pitchFamily="2" charset="0"/>
-                <a:ea typeface="標楷體" panose="03000509000000000000" pitchFamily="65" charset="-120"/>
-              </a:rPr>
-              <a:t>40</a:t>
-            </a:r>
-            <a:r>
-              <a:rPr lang="zh-TW" altLang="en-US" sz="2000" dirty="0">
-                <a:solidFill>
-                  <a:sysClr val="windowText" lastClr="000000"/>
-                </a:solidFill>
-                <a:latin typeface="CMU Serif" panose="02000603000000000000" pitchFamily="2" charset="0"/>
-                <a:ea typeface="標楷體" panose="03000509000000000000" pitchFamily="65" charset="-120"/>
-              </a:rPr>
-              <a:t>*</a:t>
-            </a:r>
-            <a:r>
-              <a:rPr lang="en-US" altLang="zh-TW" sz="2000" dirty="0">
-                <a:solidFill>
-                  <a:sysClr val="windowText" lastClr="000000"/>
-                </a:solidFill>
-                <a:latin typeface="CMU Serif" panose="02000603000000000000" pitchFamily="2" charset="0"/>
-                <a:ea typeface="標楷體" panose="03000509000000000000" pitchFamily="65" charset="-120"/>
-              </a:rPr>
-              <a:t>40</a:t>
-            </a:r>
-          </a:p>
-          <a:p>
-            <a:pPr algn="ctr"/>
-            <a:r>
-              <a:rPr lang="zh-TW" altLang="en-US" sz="2000" dirty="0">
-                <a:solidFill>
-                  <a:sysClr val="windowText" lastClr="000000"/>
-                </a:solidFill>
-                <a:latin typeface="CMU Serif" panose="02000603000000000000" pitchFamily="2" charset="0"/>
-                <a:ea typeface="標楷體" panose="03000509000000000000" pitchFamily="65" charset="-120"/>
-              </a:rPr>
-              <a:t>迴歸點</a:t>
-            </a:r>
-            <a:endParaRPr lang="en-US" altLang="zh-TW" sz="2000" dirty="0">
-              <a:solidFill>
-                <a:sysClr val="windowText" lastClr="000000"/>
-              </a:solidFill>
-              <a:latin typeface="CMU Serif" panose="02000603000000000000" pitchFamily="2" charset="0"/>
-              <a:ea typeface="標楷體" panose="03000509000000000000" pitchFamily="65" charset="-120"/>
-            </a:endParaRPr>
-          </a:p>
-        </p:txBody>
-      </p:sp>
-      <p:sp>
-        <p:nvSpPr>
-          <p:cNvPr id="19" name="箭號: 五邊形 18">
-            <a:extLst>
-              <a:ext uri="{FF2B5EF4-FFF2-40B4-BE49-F238E27FC236}">
-                <a16:creationId xmlns:a16="http://schemas.microsoft.com/office/drawing/2014/main" id="{F448FC09-B087-7B31-A7C7-4F875428B13A}"/>
-              </a:ext>
-            </a:extLst>
-          </p:cNvPr>
-          <p:cNvSpPr/>
-          <p:nvPr/>
-        </p:nvSpPr>
-        <p:spPr>
-          <a:xfrm>
-            <a:off x="9064158" y="3071813"/>
-            <a:ext cx="1722903" cy="1085850"/>
-          </a:xfrm>
-          <a:prstGeom prst="homePlate">
-            <a:avLst>
-              <a:gd name="adj" fmla="val 42570"/>
-            </a:avLst>
-          </a:prstGeom>
-          <a:noFill/>
-          <a:ln>
-            <a:solidFill>
-              <a:schemeClr val="tx1"/>
-            </a:solidFill>
-          </a:ln>
-        </p:spPr>
-        <p:style>
-          <a:lnRef idx="2">
-            <a:schemeClr val="accent1">
-              <a:shade val="15000"/>
-            </a:schemeClr>
-          </a:lnRef>
-          <a:fillRef idx="1">
-            <a:schemeClr val="accent1"/>
-          </a:fillRef>
-          <a:effectRef idx="0">
-            <a:schemeClr val="accent1"/>
-          </a:effectRef>
-          <a:fontRef idx="minor">
-            <a:schemeClr val="lt1"/>
-          </a:fontRef>
-        </p:style>
-        <p:txBody>
-          <a:bodyPr rtlCol="0" anchor="ctr"/>
-          <a:lstStyle/>
-          <a:p>
-            <a:pPr algn="ctr"/>
-            <a:r>
-              <a:rPr lang="zh-TW" altLang="en-US" sz="2000" dirty="0">
-                <a:solidFill>
-                  <a:sysClr val="windowText" lastClr="000000"/>
-                </a:solidFill>
-                <a:latin typeface="CMU Serif" panose="02000603000000000000" pitchFamily="2" charset="0"/>
-                <a:ea typeface="標楷體" panose="03000509000000000000" pitchFamily="65" charset="-120"/>
-              </a:rPr>
-              <a:t>配適模型</a:t>
-            </a:r>
-            <a:endParaRPr lang="en-US" altLang="zh-TW" sz="2000" dirty="0">
-              <a:solidFill>
-                <a:sysClr val="windowText" lastClr="000000"/>
-              </a:solidFill>
-              <a:latin typeface="CMU Serif" panose="02000603000000000000" pitchFamily="2" charset="0"/>
-              <a:ea typeface="標楷體" panose="03000509000000000000" pitchFamily="65" charset="-120"/>
-            </a:endParaRPr>
-          </a:p>
-        </p:txBody>
-      </p:sp>
-      <p:sp>
-        <p:nvSpPr>
-          <p:cNvPr id="21" name="文字方塊 20">
-            <a:extLst>
-              <a:ext uri="{FF2B5EF4-FFF2-40B4-BE49-F238E27FC236}">
-                <a16:creationId xmlns:a16="http://schemas.microsoft.com/office/drawing/2014/main" id="{36F7D3B4-012F-5C8C-966B-E31D417BF016}"/>
+                <a16:creationId xmlns:a16="http://schemas.microsoft.com/office/drawing/2014/main" id="{BFB483B1-1C52-D533-5685-89C3CF16CFE8}"/>
               </a:ext>
             </a:extLst>
           </p:cNvPr>
@@ -22531,8 +20586,8 @@
         </p:nvSpPr>
         <p:spPr>
           <a:xfrm>
-            <a:off x="5144062" y="4157663"/>
-            <a:ext cx="1987362" cy="369332"/>
+            <a:off x="1405215" y="1397983"/>
+            <a:ext cx="3023349" cy="400110"/>
           </a:xfrm>
           <a:prstGeom prst="rect">
             <a:avLst/>
@@ -22546,35 +20601,1951 @@
           <a:lstStyle/>
           <a:p>
             <a:r>
-              <a:rPr lang="zh-TW" altLang="en-US" dirty="0">
-                <a:solidFill>
-                  <a:srgbClr val="FF0000"/>
-                </a:solidFill>
+              <a:rPr lang="en-US" altLang="zh-TW" sz="2000" b="1" dirty="0" err="1">
                 <a:latin typeface="CMU Serif" panose="02000603000000000000" pitchFamily="2" charset="0"/>
                 <a:ea typeface="標楷體" panose="03000509000000000000" pitchFamily="65" charset="-120"/>
                 <a:cs typeface="CMU Serif" panose="02000603000000000000" pitchFamily="2" charset="0"/>
               </a:rPr>
-              <a:t>最佳近鄰數</a:t>
-            </a:r>
-            <a:r>
-              <a:rPr lang="en-US" altLang="zh-TW" dirty="0">
-                <a:solidFill>
-                  <a:srgbClr val="FF0000"/>
-                </a:solidFill>
+              <a:t>gwr.basic</a:t>
+            </a:r>
+            <a:r>
+              <a:rPr lang="en-US" altLang="zh-TW" sz="2000" b="1" dirty="0">
                 <a:latin typeface="CMU Serif" panose="02000603000000000000" pitchFamily="2" charset="0"/>
                 <a:ea typeface="標楷體" panose="03000509000000000000" pitchFamily="65" charset="-120"/>
                 <a:cs typeface="CMU Serif" panose="02000603000000000000" pitchFamily="2" charset="0"/>
               </a:rPr>
-              <a:t> : 136</a:t>
-            </a:r>
-            <a:endParaRPr lang="zh-TW" altLang="en-US" dirty="0"/>
+              <a:t>()</a:t>
+            </a:r>
+            <a:r>
+              <a:rPr lang="zh-TW" altLang="en-US" sz="2000" b="1" dirty="0">
+                <a:latin typeface="CMU Serif" panose="02000603000000000000" pitchFamily="2" charset="0"/>
+                <a:ea typeface="標楷體" panose="03000509000000000000" pitchFamily="65" charset="-120"/>
+                <a:cs typeface="CMU Serif" panose="02000603000000000000" pitchFamily="2" charset="0"/>
+              </a:rPr>
+              <a:t> 回傳內容</a:t>
+            </a:r>
+            <a:endParaRPr lang="zh-TW" altLang="en-US" sz="2000" b="1" dirty="0"/>
           </a:p>
         </p:txBody>
       </p:sp>
+      <p:sp>
+        <p:nvSpPr>
+          <p:cNvPr id="13" name="文字方塊 12">
+            <a:extLst>
+              <a:ext uri="{FF2B5EF4-FFF2-40B4-BE49-F238E27FC236}">
+                <a16:creationId xmlns:a16="http://schemas.microsoft.com/office/drawing/2014/main" id="{D8088EE7-321C-197A-D49F-1C8A3223D8B7}"/>
+              </a:ext>
+            </a:extLst>
+          </p:cNvPr>
+          <p:cNvSpPr txBox="1"/>
+          <p:nvPr/>
+        </p:nvSpPr>
+        <p:spPr>
+          <a:xfrm>
+            <a:off x="6735856" y="5540188"/>
+            <a:ext cx="3797674" cy="276999"/>
+          </a:xfrm>
+          <a:prstGeom prst="rect">
+            <a:avLst/>
+          </a:prstGeom>
+          <a:noFill/>
+        </p:spPr>
+        <p:txBody>
+          <a:bodyPr wrap="square">
+            <a:spAutoFit/>
+          </a:bodyPr>
+          <a:lstStyle/>
+          <a:p>
+            <a:pPr algn="ctr"/>
+            <a:r>
+              <a:rPr lang="en-US" altLang="zh-TW" sz="1200" dirty="0">
+                <a:latin typeface="CMU Serif" panose="02000603000000000000" pitchFamily="2" charset="0"/>
+                <a:ea typeface="標楷體" panose="03000509000000000000" pitchFamily="65" charset="-120"/>
+                <a:cs typeface="CMU Serif" panose="02000603000000000000" pitchFamily="2" charset="0"/>
+              </a:rPr>
+              <a:t>Source: package ‘</a:t>
+            </a:r>
+            <a:r>
+              <a:rPr lang="en-US" altLang="zh-TW" sz="1200" dirty="0" err="1">
+                <a:latin typeface="CMU Serif" panose="02000603000000000000" pitchFamily="2" charset="0"/>
+                <a:ea typeface="標楷體" panose="03000509000000000000" pitchFamily="65" charset="-120"/>
+                <a:cs typeface="CMU Serif" panose="02000603000000000000" pitchFamily="2" charset="0"/>
+              </a:rPr>
+              <a:t>GWmodel</a:t>
+            </a:r>
+            <a:r>
+              <a:rPr lang="en-US" altLang="zh-TW" sz="1200" dirty="0">
+                <a:latin typeface="CMU Serif" panose="02000603000000000000" pitchFamily="2" charset="0"/>
+                <a:ea typeface="標楷體" panose="03000509000000000000" pitchFamily="65" charset="-120"/>
+                <a:cs typeface="CMU Serif" panose="02000603000000000000" pitchFamily="2" charset="0"/>
+              </a:rPr>
+              <a:t>’ documentation p.40</a:t>
+            </a:r>
+            <a:endParaRPr lang="zh-TW" altLang="en-US" sz="1200" dirty="0">
+              <a:latin typeface="CMU Serif" panose="02000603000000000000" pitchFamily="2" charset="0"/>
+              <a:ea typeface="標楷體" panose="03000509000000000000" pitchFamily="65" charset="-120"/>
+              <a:cs typeface="CMU Serif" panose="02000603000000000000" pitchFamily="2" charset="0"/>
+            </a:endParaRPr>
+          </a:p>
+        </p:txBody>
+      </p:sp>
+      <p:graphicFrame>
+        <p:nvGraphicFramePr>
+          <p:cNvPr id="3" name="表格 2">
+            <a:extLst>
+              <a:ext uri="{FF2B5EF4-FFF2-40B4-BE49-F238E27FC236}">
+                <a16:creationId xmlns:a16="http://schemas.microsoft.com/office/drawing/2014/main" id="{5900EB47-CF1A-0BB8-392D-277741D5F247}"/>
+              </a:ext>
+            </a:extLst>
+          </p:cNvPr>
+          <p:cNvGraphicFramePr>
+            <a:graphicFrameLocks noGrp="1"/>
+          </p:cNvGraphicFramePr>
+          <p:nvPr>
+            <p:extLst>
+              <p:ext uri="{D42A27DB-BD31-4B8C-83A1-F6EECF244321}">
+                <p14:modId xmlns:p14="http://schemas.microsoft.com/office/powerpoint/2010/main" val="2124978920"/>
+              </p:ext>
+            </p:extLst>
+          </p:nvPr>
+        </p:nvGraphicFramePr>
+        <p:xfrm>
+          <a:off x="1990165" y="1859714"/>
+          <a:ext cx="8211671" cy="3680474"/>
+        </p:xfrm>
+        <a:graphic>
+          <a:graphicData uri="http://schemas.openxmlformats.org/drawingml/2006/table">
+            <a:tbl>
+              <a:tblPr/>
+              <a:tblGrid>
+                <a:gridCol w="1568856">
+                  <a:extLst>
+                    <a:ext uri="{9D8B030D-6E8A-4147-A177-3AD203B41FA5}">
+                      <a16:colId xmlns:a16="http://schemas.microsoft.com/office/drawing/2014/main" val="3775910832"/>
+                    </a:ext>
+                  </a:extLst>
+                </a:gridCol>
+                <a:gridCol w="5381772">
+                  <a:extLst>
+                    <a:ext uri="{9D8B030D-6E8A-4147-A177-3AD203B41FA5}">
+                      <a16:colId xmlns:a16="http://schemas.microsoft.com/office/drawing/2014/main" val="3609686065"/>
+                    </a:ext>
+                  </a:extLst>
+                </a:gridCol>
+                <a:gridCol w="1261043">
+                  <a:extLst>
+                    <a:ext uri="{9D8B030D-6E8A-4147-A177-3AD203B41FA5}">
+                      <a16:colId xmlns:a16="http://schemas.microsoft.com/office/drawing/2014/main" val="4043273732"/>
+                    </a:ext>
+                  </a:extLst>
+                </a:gridCol>
+              </a:tblGrid>
+              <a:tr h="445855">
+                <a:tc>
+                  <a:txBody>
+                    <a:bodyPr/>
+                    <a:lstStyle/>
+                    <a:p>
+                      <a:pPr algn="ctr" fontAlgn="ctr">
+                        <a:buNone/>
+                      </a:pPr>
+                      <a:r>
+                        <a:rPr lang="zh-TW" altLang="en-US" sz="1600" b="1" i="0" u="none" strike="noStrike" baseline="0" dirty="0">
+                          <a:solidFill>
+                            <a:srgbClr val="000000"/>
+                          </a:solidFill>
+                          <a:effectLst/>
+                          <a:latin typeface="CMU Serif" panose="02000603000000000000" pitchFamily="2" charset="0"/>
+                          <a:ea typeface="標楷體" panose="03000509000000000000" pitchFamily="65" charset="-120"/>
+                        </a:rPr>
+                        <a:t>回傳項目</a:t>
+                      </a:r>
+                    </a:p>
+                  </a:txBody>
+                  <a:tcPr marL="5262" marR="5262" marT="5262" marB="0" anchor="ctr">
+                    <a:lnL w="12700" cap="flat" cmpd="sng" algn="ctr">
+                      <a:solidFill>
+                        <a:schemeClr val="tx1"/>
+                      </a:solidFill>
+                      <a:prstDash val="solid"/>
+                      <a:round/>
+                      <a:headEnd type="none" w="med" len="med"/>
+                      <a:tailEnd type="none" w="med" len="med"/>
+                    </a:lnL>
+                    <a:lnR w="12700" cap="flat" cmpd="sng" algn="ctr">
+                      <a:solidFill>
+                        <a:schemeClr val="tx1"/>
+                      </a:solidFill>
+                      <a:prstDash val="solid"/>
+                      <a:round/>
+                      <a:headEnd type="none" w="med" len="med"/>
+                      <a:tailEnd type="none" w="med" len="med"/>
+                    </a:lnR>
+                    <a:lnT w="12700" cap="flat" cmpd="sng" algn="ctr">
+                      <a:solidFill>
+                        <a:schemeClr val="tx1"/>
+                      </a:solidFill>
+                      <a:prstDash val="solid"/>
+                      <a:round/>
+                      <a:headEnd type="none" w="med" len="med"/>
+                      <a:tailEnd type="none" w="med" len="med"/>
+                    </a:lnT>
+                    <a:lnB w="12700" cap="flat" cmpd="sng" algn="ctr">
+                      <a:solidFill>
+                        <a:schemeClr val="tx1"/>
+                      </a:solidFill>
+                      <a:prstDash val="solid"/>
+                      <a:round/>
+                      <a:headEnd type="none" w="med" len="med"/>
+                      <a:tailEnd type="none" w="med" len="med"/>
+                    </a:lnB>
+                    <a:solidFill>
+                      <a:srgbClr val="BEBEEC"/>
+                    </a:solidFill>
+                  </a:tcPr>
+                </a:tc>
+                <a:tc>
+                  <a:txBody>
+                    <a:bodyPr/>
+                    <a:lstStyle/>
+                    <a:p>
+                      <a:pPr algn="ctr" fontAlgn="ctr">
+                        <a:buNone/>
+                      </a:pPr>
+                      <a:r>
+                        <a:rPr lang="zh-TW" altLang="en-US" sz="1600" b="1" i="0" u="none" strike="noStrike" baseline="0" dirty="0">
+                          <a:solidFill>
+                            <a:srgbClr val="000000"/>
+                          </a:solidFill>
+                          <a:effectLst/>
+                          <a:latin typeface="CMU Serif" panose="02000603000000000000" pitchFamily="2" charset="0"/>
+                          <a:ea typeface="標楷體" panose="03000509000000000000" pitchFamily="65" charset="-120"/>
+                        </a:rPr>
+                        <a:t>意義</a:t>
+                      </a:r>
+                    </a:p>
+                  </a:txBody>
+                  <a:tcPr marL="5262" marR="5262" marT="5262" marB="0" anchor="ctr">
+                    <a:lnL w="12700" cap="flat" cmpd="sng" algn="ctr">
+                      <a:solidFill>
+                        <a:schemeClr val="tx1"/>
+                      </a:solidFill>
+                      <a:prstDash val="solid"/>
+                      <a:round/>
+                      <a:headEnd type="none" w="med" len="med"/>
+                      <a:tailEnd type="none" w="med" len="med"/>
+                    </a:lnL>
+                    <a:lnR w="12700" cap="flat" cmpd="sng" algn="ctr">
+                      <a:solidFill>
+                        <a:schemeClr val="tx1"/>
+                      </a:solidFill>
+                      <a:prstDash val="solid"/>
+                      <a:round/>
+                      <a:headEnd type="none" w="med" len="med"/>
+                      <a:tailEnd type="none" w="med" len="med"/>
+                    </a:lnR>
+                    <a:lnT w="12700" cap="flat" cmpd="sng" algn="ctr">
+                      <a:solidFill>
+                        <a:schemeClr val="tx1"/>
+                      </a:solidFill>
+                      <a:prstDash val="solid"/>
+                      <a:round/>
+                      <a:headEnd type="none" w="med" len="med"/>
+                      <a:tailEnd type="none" w="med" len="med"/>
+                    </a:lnT>
+                    <a:lnB w="12700" cap="flat" cmpd="sng" algn="ctr">
+                      <a:solidFill>
+                        <a:schemeClr val="tx1"/>
+                      </a:solidFill>
+                      <a:prstDash val="solid"/>
+                      <a:round/>
+                      <a:headEnd type="none" w="med" len="med"/>
+                      <a:tailEnd type="none" w="med" len="med"/>
+                    </a:lnB>
+                    <a:solidFill>
+                      <a:srgbClr val="BEBEEC"/>
+                    </a:solidFill>
+                  </a:tcPr>
+                </a:tc>
+                <a:tc>
+                  <a:txBody>
+                    <a:bodyPr/>
+                    <a:lstStyle/>
+                    <a:p>
+                      <a:pPr algn="ctr" fontAlgn="ctr">
+                        <a:buNone/>
+                      </a:pPr>
+                      <a:r>
+                        <a:rPr lang="zh-TW" altLang="en-US" sz="1600" b="1" i="0" u="none" strike="noStrike" baseline="0" dirty="0">
+                          <a:solidFill>
+                            <a:srgbClr val="000000"/>
+                          </a:solidFill>
+                          <a:effectLst/>
+                          <a:latin typeface="CMU Serif" panose="02000603000000000000" pitchFamily="2" charset="0"/>
+                          <a:ea typeface="標楷體" panose="03000509000000000000" pitchFamily="65" charset="-120"/>
+                        </a:rPr>
+                        <a:t>報告設定</a:t>
+                      </a:r>
+                    </a:p>
+                  </a:txBody>
+                  <a:tcPr marL="5262" marR="5262" marT="5262" marB="0" anchor="ctr">
+                    <a:lnL w="12700" cap="flat" cmpd="sng" algn="ctr">
+                      <a:solidFill>
+                        <a:schemeClr val="tx1"/>
+                      </a:solidFill>
+                      <a:prstDash val="solid"/>
+                      <a:round/>
+                      <a:headEnd type="none" w="med" len="med"/>
+                      <a:tailEnd type="none" w="med" len="med"/>
+                    </a:lnL>
+                    <a:lnR w="12700" cap="flat" cmpd="sng" algn="ctr">
+                      <a:solidFill>
+                        <a:schemeClr val="tx1"/>
+                      </a:solidFill>
+                      <a:prstDash val="solid"/>
+                      <a:round/>
+                      <a:headEnd type="none" w="med" len="med"/>
+                      <a:tailEnd type="none" w="med" len="med"/>
+                    </a:lnR>
+                    <a:lnT w="12700" cap="flat" cmpd="sng" algn="ctr">
+                      <a:solidFill>
+                        <a:schemeClr val="tx1"/>
+                      </a:solidFill>
+                      <a:prstDash val="solid"/>
+                      <a:round/>
+                      <a:headEnd type="none" w="med" len="med"/>
+                      <a:tailEnd type="none" w="med" len="med"/>
+                    </a:lnT>
+                    <a:lnB w="12700" cap="flat" cmpd="sng" algn="ctr">
+                      <a:solidFill>
+                        <a:schemeClr val="tx1"/>
+                      </a:solidFill>
+                      <a:prstDash val="solid"/>
+                      <a:round/>
+                      <a:headEnd type="none" w="med" len="med"/>
+                      <a:tailEnd type="none" w="med" len="med"/>
+                    </a:lnB>
+                    <a:solidFill>
+                      <a:srgbClr val="BEBEEC"/>
+                    </a:solidFill>
+                  </a:tcPr>
+                </a:tc>
+                <a:extLst>
+                  <a:ext uri="{0D108BD9-81ED-4DB2-BD59-A6C34878D82A}">
+                    <a16:rowId xmlns:a16="http://schemas.microsoft.com/office/drawing/2014/main" val="3116086268"/>
+                  </a:ext>
+                </a:extLst>
+              </a:tr>
+              <a:tr h="445855">
+                <a:tc>
+                  <a:txBody>
+                    <a:bodyPr/>
+                    <a:lstStyle/>
+                    <a:p>
+                      <a:pPr algn="ctr" fontAlgn="ctr">
+                        <a:buNone/>
+                      </a:pPr>
+                      <a:r>
+                        <a:rPr lang="en-US" sz="1600" b="0" i="0" u="none" strike="noStrike" baseline="0" dirty="0" err="1">
+                          <a:solidFill>
+                            <a:srgbClr val="000000"/>
+                          </a:solidFill>
+                          <a:effectLst/>
+                          <a:latin typeface="CMU Serif" panose="02000603000000000000" pitchFamily="2" charset="0"/>
+                          <a:ea typeface="標楷體" panose="03000509000000000000" pitchFamily="65" charset="-120"/>
+                        </a:rPr>
+                        <a:t>GW.arguments</a:t>
+                      </a:r>
+                      <a:endParaRPr lang="en-US" sz="1600" b="0" i="0" u="none" strike="noStrike" baseline="0" dirty="0">
+                        <a:solidFill>
+                          <a:srgbClr val="000000"/>
+                        </a:solidFill>
+                        <a:effectLst/>
+                        <a:latin typeface="CMU Serif" panose="02000603000000000000" pitchFamily="2" charset="0"/>
+                        <a:ea typeface="標楷體" panose="03000509000000000000" pitchFamily="65" charset="-120"/>
+                      </a:endParaRPr>
+                    </a:p>
+                  </a:txBody>
+                  <a:tcPr marL="5262" marR="5262" marT="5262" marB="0" anchor="ctr">
+                    <a:lnL w="12700" cap="flat" cmpd="sng" algn="ctr">
+                      <a:solidFill>
+                        <a:schemeClr val="tx1"/>
+                      </a:solidFill>
+                      <a:prstDash val="solid"/>
+                      <a:round/>
+                      <a:headEnd type="none" w="med" len="med"/>
+                      <a:tailEnd type="none" w="med" len="med"/>
+                    </a:lnL>
+                    <a:lnR w="12700" cap="flat" cmpd="sng" algn="ctr">
+                      <a:solidFill>
+                        <a:schemeClr val="tx1"/>
+                      </a:solidFill>
+                      <a:prstDash val="solid"/>
+                      <a:round/>
+                      <a:headEnd type="none" w="med" len="med"/>
+                      <a:tailEnd type="none" w="med" len="med"/>
+                    </a:lnR>
+                    <a:lnT w="12700" cap="flat" cmpd="sng" algn="ctr">
+                      <a:solidFill>
+                        <a:schemeClr val="tx1"/>
+                      </a:solidFill>
+                      <a:prstDash val="solid"/>
+                      <a:round/>
+                      <a:headEnd type="none" w="med" len="med"/>
+                      <a:tailEnd type="none" w="med" len="med"/>
+                    </a:lnT>
+                    <a:lnB w="12700" cap="flat" cmpd="sng" algn="ctr">
+                      <a:solidFill>
+                        <a:schemeClr val="tx1"/>
+                      </a:solidFill>
+                      <a:prstDash val="solid"/>
+                      <a:round/>
+                      <a:headEnd type="none" w="med" len="med"/>
+                      <a:tailEnd type="none" w="med" len="med"/>
+                    </a:lnB>
+                    <a:noFill/>
+                  </a:tcPr>
+                </a:tc>
+                <a:tc>
+                  <a:txBody>
+                    <a:bodyPr/>
+                    <a:lstStyle/>
+                    <a:p>
+                      <a:pPr algn="ctr" fontAlgn="ctr">
+                        <a:buNone/>
+                      </a:pPr>
+                      <a:r>
+                        <a:rPr lang="zh-TW" altLang="en-US" sz="1600" b="0" i="0" u="none" strike="noStrike" baseline="0" dirty="0">
+                          <a:solidFill>
+                            <a:srgbClr val="000000"/>
+                          </a:solidFill>
+                          <a:effectLst/>
+                          <a:latin typeface="CMU Serif" panose="02000603000000000000" pitchFamily="2" charset="0"/>
+                          <a:ea typeface="標楷體" panose="03000509000000000000" pitchFamily="65" charset="-120"/>
+                        </a:rPr>
+                        <a:t>儲存 </a:t>
+                      </a:r>
+                      <a:r>
+                        <a:rPr lang="en-US" sz="1600" b="0" i="0" u="none" strike="noStrike" baseline="0" dirty="0">
+                          <a:solidFill>
+                            <a:srgbClr val="000000"/>
+                          </a:solidFill>
+                          <a:effectLst/>
+                          <a:latin typeface="CMU Serif" panose="02000603000000000000" pitchFamily="2" charset="0"/>
+                          <a:ea typeface="標楷體" panose="03000509000000000000" pitchFamily="65" charset="-120"/>
+                        </a:rPr>
+                        <a:t>GWR </a:t>
+                      </a:r>
+                      <a:r>
+                        <a:rPr lang="zh-TW" altLang="en-US" sz="1600" b="0" i="0" u="none" strike="noStrike" baseline="0" dirty="0">
+                          <a:solidFill>
+                            <a:srgbClr val="000000"/>
+                          </a:solidFill>
+                          <a:effectLst/>
+                          <a:latin typeface="CMU Serif" panose="02000603000000000000" pitchFamily="2" charset="0"/>
+                          <a:ea typeface="標楷體" panose="03000509000000000000" pitchFamily="65" charset="-120"/>
+                        </a:rPr>
+                        <a:t>模型參數設定</a:t>
+                      </a:r>
+                    </a:p>
+                  </a:txBody>
+                  <a:tcPr marL="5262" marR="5262" marT="5262" marB="0" anchor="ctr">
+                    <a:lnL w="12700" cap="flat" cmpd="sng" algn="ctr">
+                      <a:solidFill>
+                        <a:schemeClr val="tx1"/>
+                      </a:solidFill>
+                      <a:prstDash val="solid"/>
+                      <a:round/>
+                      <a:headEnd type="none" w="med" len="med"/>
+                      <a:tailEnd type="none" w="med" len="med"/>
+                    </a:lnL>
+                    <a:lnR w="12700" cap="flat" cmpd="sng" algn="ctr">
+                      <a:solidFill>
+                        <a:schemeClr val="tx1"/>
+                      </a:solidFill>
+                      <a:prstDash val="solid"/>
+                      <a:round/>
+                      <a:headEnd type="none" w="med" len="med"/>
+                      <a:tailEnd type="none" w="med" len="med"/>
+                    </a:lnR>
+                    <a:lnT w="12700" cap="flat" cmpd="sng" algn="ctr">
+                      <a:solidFill>
+                        <a:schemeClr val="tx1"/>
+                      </a:solidFill>
+                      <a:prstDash val="solid"/>
+                      <a:round/>
+                      <a:headEnd type="none" w="med" len="med"/>
+                      <a:tailEnd type="none" w="med" len="med"/>
+                    </a:lnT>
+                    <a:lnB w="12700" cap="flat" cmpd="sng" algn="ctr">
+                      <a:solidFill>
+                        <a:schemeClr val="tx1"/>
+                      </a:solidFill>
+                      <a:prstDash val="solid"/>
+                      <a:round/>
+                      <a:headEnd type="none" w="med" len="med"/>
+                      <a:tailEnd type="none" w="med" len="med"/>
+                    </a:lnB>
+                    <a:noFill/>
+                  </a:tcPr>
+                </a:tc>
+                <a:tc>
+                  <a:txBody>
+                    <a:bodyPr/>
+                    <a:lstStyle/>
+                    <a:p>
+                      <a:pPr algn="ctr" fontAlgn="ctr">
+                        <a:buNone/>
+                      </a:pPr>
+                      <a:r>
+                        <a:rPr lang="en-US" sz="1600" b="0" i="0" u="none" strike="noStrike" baseline="0">
+                          <a:solidFill>
+                            <a:srgbClr val="000000"/>
+                          </a:solidFill>
+                          <a:effectLst/>
+                          <a:latin typeface="CMU Serif" panose="02000603000000000000" pitchFamily="2" charset="0"/>
+                          <a:ea typeface="標楷體" panose="03000509000000000000" pitchFamily="65" charset="-120"/>
+                        </a:rPr>
+                        <a:t>V</a:t>
+                      </a:r>
+                    </a:p>
+                  </a:txBody>
+                  <a:tcPr marL="5262" marR="5262" marT="5262" marB="0" anchor="ctr">
+                    <a:lnL w="12700" cap="flat" cmpd="sng" algn="ctr">
+                      <a:solidFill>
+                        <a:schemeClr val="tx1"/>
+                      </a:solidFill>
+                      <a:prstDash val="solid"/>
+                      <a:round/>
+                      <a:headEnd type="none" w="med" len="med"/>
+                      <a:tailEnd type="none" w="med" len="med"/>
+                    </a:lnL>
+                    <a:lnR w="12700" cap="flat" cmpd="sng" algn="ctr">
+                      <a:solidFill>
+                        <a:schemeClr val="tx1"/>
+                      </a:solidFill>
+                      <a:prstDash val="solid"/>
+                      <a:round/>
+                      <a:headEnd type="none" w="med" len="med"/>
+                      <a:tailEnd type="none" w="med" len="med"/>
+                    </a:lnR>
+                    <a:lnT w="12700" cap="flat" cmpd="sng" algn="ctr">
+                      <a:solidFill>
+                        <a:schemeClr val="tx1"/>
+                      </a:solidFill>
+                      <a:prstDash val="solid"/>
+                      <a:round/>
+                      <a:headEnd type="none" w="med" len="med"/>
+                      <a:tailEnd type="none" w="med" len="med"/>
+                    </a:lnT>
+                    <a:lnB w="12700" cap="flat" cmpd="sng" algn="ctr">
+                      <a:solidFill>
+                        <a:schemeClr val="tx1"/>
+                      </a:solidFill>
+                      <a:prstDash val="solid"/>
+                      <a:round/>
+                      <a:headEnd type="none" w="med" len="med"/>
+                      <a:tailEnd type="none" w="med" len="med"/>
+                    </a:lnB>
+                    <a:noFill/>
+                  </a:tcPr>
+                </a:tc>
+                <a:extLst>
+                  <a:ext uri="{0D108BD9-81ED-4DB2-BD59-A6C34878D82A}">
+                    <a16:rowId xmlns:a16="http://schemas.microsoft.com/office/drawing/2014/main" val="3486506065"/>
+                  </a:ext>
+                </a:extLst>
+              </a:tr>
+              <a:tr h="445855">
+                <a:tc>
+                  <a:txBody>
+                    <a:bodyPr/>
+                    <a:lstStyle/>
+                    <a:p>
+                      <a:pPr algn="ctr" fontAlgn="ctr">
+                        <a:buNone/>
+                      </a:pPr>
+                      <a:r>
+                        <a:rPr lang="en-US" sz="1600" b="0" i="0" u="none" strike="noStrike" baseline="0">
+                          <a:solidFill>
+                            <a:srgbClr val="000000"/>
+                          </a:solidFill>
+                          <a:effectLst/>
+                          <a:latin typeface="CMU Serif" panose="02000603000000000000" pitchFamily="2" charset="0"/>
+                          <a:ea typeface="標楷體" panose="03000509000000000000" pitchFamily="65" charset="-120"/>
+                        </a:rPr>
+                        <a:t>GW.diagnostic</a:t>
+                      </a:r>
+                    </a:p>
+                  </a:txBody>
+                  <a:tcPr marL="5262" marR="5262" marT="5262" marB="0" anchor="ctr">
+                    <a:lnL w="12700" cap="flat" cmpd="sng" algn="ctr">
+                      <a:solidFill>
+                        <a:schemeClr val="tx1"/>
+                      </a:solidFill>
+                      <a:prstDash val="solid"/>
+                      <a:round/>
+                      <a:headEnd type="none" w="med" len="med"/>
+                      <a:tailEnd type="none" w="med" len="med"/>
+                    </a:lnL>
+                    <a:lnR w="12700" cap="flat" cmpd="sng" algn="ctr">
+                      <a:solidFill>
+                        <a:schemeClr val="tx1"/>
+                      </a:solidFill>
+                      <a:prstDash val="solid"/>
+                      <a:round/>
+                      <a:headEnd type="none" w="med" len="med"/>
+                      <a:tailEnd type="none" w="med" len="med"/>
+                    </a:lnR>
+                    <a:lnT w="12700" cap="flat" cmpd="sng" algn="ctr">
+                      <a:solidFill>
+                        <a:schemeClr val="tx1"/>
+                      </a:solidFill>
+                      <a:prstDash val="solid"/>
+                      <a:round/>
+                      <a:headEnd type="none" w="med" len="med"/>
+                      <a:tailEnd type="none" w="med" len="med"/>
+                    </a:lnT>
+                    <a:lnB w="12700" cap="flat" cmpd="sng" algn="ctr">
+                      <a:solidFill>
+                        <a:schemeClr val="tx1"/>
+                      </a:solidFill>
+                      <a:prstDash val="solid"/>
+                      <a:round/>
+                      <a:headEnd type="none" w="med" len="med"/>
+                      <a:tailEnd type="none" w="med" len="med"/>
+                    </a:lnB>
+                    <a:noFill/>
+                  </a:tcPr>
+                </a:tc>
+                <a:tc>
+                  <a:txBody>
+                    <a:bodyPr/>
+                    <a:lstStyle/>
+                    <a:p>
+                      <a:pPr algn="ctr" fontAlgn="ctr">
+                        <a:buNone/>
+                      </a:pPr>
+                      <a:r>
+                        <a:rPr lang="zh-TW" altLang="en-US" sz="1600" b="0" i="0" u="none" strike="noStrike" baseline="0" dirty="0">
+                          <a:solidFill>
+                            <a:srgbClr val="000000"/>
+                          </a:solidFill>
+                          <a:effectLst/>
+                          <a:latin typeface="CMU Serif" panose="02000603000000000000" pitchFamily="2" charset="0"/>
+                          <a:ea typeface="標楷體" panose="03000509000000000000" pitchFamily="65" charset="-120"/>
+                        </a:rPr>
+                        <a:t>模型診斷結果，如 </a:t>
+                      </a:r>
+                      <a:r>
+                        <a:rPr lang="en-US" altLang="zh-TW" sz="1600" b="0" i="0" u="none" strike="noStrike" baseline="0" dirty="0">
+                          <a:solidFill>
+                            <a:srgbClr val="000000"/>
+                          </a:solidFill>
+                          <a:effectLst/>
+                          <a:latin typeface="CMU Serif" panose="02000603000000000000" pitchFamily="2" charset="0"/>
+                          <a:ea typeface="標楷體" panose="03000509000000000000" pitchFamily="65" charset="-120"/>
+                        </a:rPr>
+                        <a:t>RSS</a:t>
+                      </a:r>
+                      <a:r>
+                        <a:rPr lang="zh-TW" altLang="en-US" sz="1600" b="0" i="0" u="none" strike="noStrike" baseline="0" dirty="0">
+                          <a:solidFill>
+                            <a:srgbClr val="000000"/>
+                          </a:solidFill>
+                          <a:effectLst/>
+                          <a:latin typeface="CMU Serif" panose="02000603000000000000" pitchFamily="2" charset="0"/>
+                          <a:ea typeface="標楷體" panose="03000509000000000000" pitchFamily="65" charset="-120"/>
+                        </a:rPr>
+                        <a:t>、</a:t>
+                      </a:r>
+                      <a:r>
+                        <a:rPr lang="en-US" altLang="zh-TW" sz="1600" b="0" i="0" u="none" strike="noStrike" baseline="0" dirty="0" err="1">
+                          <a:solidFill>
+                            <a:srgbClr val="000000"/>
+                          </a:solidFill>
+                          <a:effectLst/>
+                          <a:latin typeface="CMU Serif" panose="02000603000000000000" pitchFamily="2" charset="0"/>
+                          <a:ea typeface="標楷體" panose="03000509000000000000" pitchFamily="65" charset="-120"/>
+                        </a:rPr>
+                        <a:t>AICc</a:t>
+                      </a:r>
+                      <a:r>
+                        <a:rPr lang="zh-TW" altLang="en-US" sz="1600" b="0" i="0" u="none" strike="noStrike" baseline="0" dirty="0">
+                          <a:solidFill>
+                            <a:srgbClr val="000000"/>
+                          </a:solidFill>
+                          <a:effectLst/>
+                          <a:latin typeface="CMU Serif" panose="02000603000000000000" pitchFamily="2" charset="0"/>
+                          <a:ea typeface="標楷體" panose="03000509000000000000" pitchFamily="65" charset="-120"/>
+                        </a:rPr>
+                        <a:t>、</a:t>
+                      </a:r>
+                      <a:r>
+                        <a:rPr lang="en-US" altLang="zh-TW" sz="1600" b="0" i="0" u="none" strike="noStrike" baseline="0" dirty="0">
+                          <a:solidFill>
+                            <a:srgbClr val="000000"/>
+                          </a:solidFill>
+                          <a:effectLst/>
+                          <a:latin typeface="CMU Serif" panose="02000603000000000000" pitchFamily="2" charset="0"/>
+                          <a:ea typeface="標楷體" panose="03000509000000000000" pitchFamily="65" charset="-120"/>
+                        </a:rPr>
+                        <a:t>R²</a:t>
+                      </a:r>
+                    </a:p>
+                  </a:txBody>
+                  <a:tcPr marL="5262" marR="5262" marT="5262" marB="0" anchor="ctr">
+                    <a:lnL w="12700" cap="flat" cmpd="sng" algn="ctr">
+                      <a:solidFill>
+                        <a:schemeClr val="tx1"/>
+                      </a:solidFill>
+                      <a:prstDash val="solid"/>
+                      <a:round/>
+                      <a:headEnd type="none" w="med" len="med"/>
+                      <a:tailEnd type="none" w="med" len="med"/>
+                    </a:lnL>
+                    <a:lnR w="12700" cap="flat" cmpd="sng" algn="ctr">
+                      <a:solidFill>
+                        <a:schemeClr val="tx1"/>
+                      </a:solidFill>
+                      <a:prstDash val="solid"/>
+                      <a:round/>
+                      <a:headEnd type="none" w="med" len="med"/>
+                      <a:tailEnd type="none" w="med" len="med"/>
+                    </a:lnR>
+                    <a:lnT w="12700" cap="flat" cmpd="sng" algn="ctr">
+                      <a:solidFill>
+                        <a:schemeClr val="tx1"/>
+                      </a:solidFill>
+                      <a:prstDash val="solid"/>
+                      <a:round/>
+                      <a:headEnd type="none" w="med" len="med"/>
+                      <a:tailEnd type="none" w="med" len="med"/>
+                    </a:lnT>
+                    <a:lnB w="12700" cap="flat" cmpd="sng" algn="ctr">
+                      <a:solidFill>
+                        <a:schemeClr val="tx1"/>
+                      </a:solidFill>
+                      <a:prstDash val="solid"/>
+                      <a:round/>
+                      <a:headEnd type="none" w="med" len="med"/>
+                      <a:tailEnd type="none" w="med" len="med"/>
+                    </a:lnB>
+                    <a:noFill/>
+                  </a:tcPr>
+                </a:tc>
+                <a:tc>
+                  <a:txBody>
+                    <a:bodyPr/>
+                    <a:lstStyle/>
+                    <a:p>
+                      <a:pPr algn="ctr" fontAlgn="ctr">
+                        <a:buNone/>
+                      </a:pPr>
+                      <a:r>
+                        <a:rPr lang="en-US" sz="1600" b="0" i="0" u="none" strike="noStrike" baseline="0">
+                          <a:solidFill>
+                            <a:srgbClr val="000000"/>
+                          </a:solidFill>
+                          <a:effectLst/>
+                          <a:latin typeface="CMU Serif" panose="02000603000000000000" pitchFamily="2" charset="0"/>
+                          <a:ea typeface="標楷體" panose="03000509000000000000" pitchFamily="65" charset="-120"/>
+                        </a:rPr>
+                        <a:t>V</a:t>
+                      </a:r>
+                    </a:p>
+                  </a:txBody>
+                  <a:tcPr marL="5262" marR="5262" marT="5262" marB="0" anchor="ctr">
+                    <a:lnL w="12700" cap="flat" cmpd="sng" algn="ctr">
+                      <a:solidFill>
+                        <a:schemeClr val="tx1"/>
+                      </a:solidFill>
+                      <a:prstDash val="solid"/>
+                      <a:round/>
+                      <a:headEnd type="none" w="med" len="med"/>
+                      <a:tailEnd type="none" w="med" len="med"/>
+                    </a:lnL>
+                    <a:lnR w="12700" cap="flat" cmpd="sng" algn="ctr">
+                      <a:solidFill>
+                        <a:schemeClr val="tx1"/>
+                      </a:solidFill>
+                      <a:prstDash val="solid"/>
+                      <a:round/>
+                      <a:headEnd type="none" w="med" len="med"/>
+                      <a:tailEnd type="none" w="med" len="med"/>
+                    </a:lnR>
+                    <a:lnT w="12700" cap="flat" cmpd="sng" algn="ctr">
+                      <a:solidFill>
+                        <a:schemeClr val="tx1"/>
+                      </a:solidFill>
+                      <a:prstDash val="solid"/>
+                      <a:round/>
+                      <a:headEnd type="none" w="med" len="med"/>
+                      <a:tailEnd type="none" w="med" len="med"/>
+                    </a:lnT>
+                    <a:lnB w="12700" cap="flat" cmpd="sng" algn="ctr">
+                      <a:solidFill>
+                        <a:schemeClr val="tx1"/>
+                      </a:solidFill>
+                      <a:prstDash val="solid"/>
+                      <a:round/>
+                      <a:headEnd type="none" w="med" len="med"/>
+                      <a:tailEnd type="none" w="med" len="med"/>
+                    </a:lnB>
+                    <a:noFill/>
+                  </a:tcPr>
+                </a:tc>
+                <a:extLst>
+                  <a:ext uri="{0D108BD9-81ED-4DB2-BD59-A6C34878D82A}">
+                    <a16:rowId xmlns:a16="http://schemas.microsoft.com/office/drawing/2014/main" val="3666576205"/>
+                  </a:ext>
+                </a:extLst>
+              </a:tr>
+              <a:tr h="445855">
+                <a:tc>
+                  <a:txBody>
+                    <a:bodyPr/>
+                    <a:lstStyle/>
+                    <a:p>
+                      <a:pPr algn="ctr" fontAlgn="ctr">
+                        <a:buNone/>
+                      </a:pPr>
+                      <a:r>
+                        <a:rPr lang="en-US" sz="1600" b="0" i="0" u="none" strike="noStrike" baseline="0" dirty="0" err="1">
+                          <a:solidFill>
+                            <a:srgbClr val="000000"/>
+                          </a:solidFill>
+                          <a:effectLst/>
+                          <a:latin typeface="CMU Serif" panose="02000603000000000000" pitchFamily="2" charset="0"/>
+                          <a:ea typeface="標楷體" panose="03000509000000000000" pitchFamily="65" charset="-120"/>
+                        </a:rPr>
+                        <a:t>lm</a:t>
+                      </a:r>
+                      <a:endParaRPr lang="en-US" sz="1600" b="0" i="0" u="none" strike="noStrike" baseline="0" dirty="0">
+                        <a:solidFill>
+                          <a:srgbClr val="000000"/>
+                        </a:solidFill>
+                        <a:effectLst/>
+                        <a:latin typeface="CMU Serif" panose="02000603000000000000" pitchFamily="2" charset="0"/>
+                        <a:ea typeface="標楷體" panose="03000509000000000000" pitchFamily="65" charset="-120"/>
+                      </a:endParaRPr>
+                    </a:p>
+                  </a:txBody>
+                  <a:tcPr marL="5262" marR="5262" marT="5262" marB="0" anchor="ctr">
+                    <a:lnL w="12700" cap="flat" cmpd="sng" algn="ctr">
+                      <a:solidFill>
+                        <a:schemeClr val="tx1"/>
+                      </a:solidFill>
+                      <a:prstDash val="solid"/>
+                      <a:round/>
+                      <a:headEnd type="none" w="med" len="med"/>
+                      <a:tailEnd type="none" w="med" len="med"/>
+                    </a:lnL>
+                    <a:lnR w="12700" cap="flat" cmpd="sng" algn="ctr">
+                      <a:solidFill>
+                        <a:schemeClr val="tx1"/>
+                      </a:solidFill>
+                      <a:prstDash val="solid"/>
+                      <a:round/>
+                      <a:headEnd type="none" w="med" len="med"/>
+                      <a:tailEnd type="none" w="med" len="med"/>
+                    </a:lnR>
+                    <a:lnT w="12700" cap="flat" cmpd="sng" algn="ctr">
+                      <a:solidFill>
+                        <a:schemeClr val="tx1"/>
+                      </a:solidFill>
+                      <a:prstDash val="solid"/>
+                      <a:round/>
+                      <a:headEnd type="none" w="med" len="med"/>
+                      <a:tailEnd type="none" w="med" len="med"/>
+                    </a:lnT>
+                    <a:lnB w="12700" cap="flat" cmpd="sng" algn="ctr">
+                      <a:solidFill>
+                        <a:schemeClr val="tx1"/>
+                      </a:solidFill>
+                      <a:prstDash val="solid"/>
+                      <a:round/>
+                      <a:headEnd type="none" w="med" len="med"/>
+                      <a:tailEnd type="none" w="med" len="med"/>
+                    </a:lnB>
+                    <a:noFill/>
+                  </a:tcPr>
+                </a:tc>
+                <a:tc>
+                  <a:txBody>
+                    <a:bodyPr/>
+                    <a:lstStyle/>
+                    <a:p>
+                      <a:pPr algn="ctr" fontAlgn="ctr">
+                        <a:buNone/>
+                      </a:pPr>
+                      <a:r>
+                        <a:rPr lang="zh-TW" altLang="en-US" sz="1600" b="0" i="0" u="none" strike="noStrike" baseline="0" dirty="0">
+                          <a:solidFill>
+                            <a:srgbClr val="000000"/>
+                          </a:solidFill>
+                          <a:effectLst/>
+                          <a:latin typeface="CMU Serif" panose="02000603000000000000" pitchFamily="2" charset="0"/>
+                          <a:ea typeface="標楷體" panose="03000509000000000000" pitchFamily="65" charset="-120"/>
+                        </a:rPr>
+                        <a:t>對應的 </a:t>
+                      </a:r>
+                      <a:r>
+                        <a:rPr lang="en-US" sz="1600" b="0" i="0" u="none" strike="noStrike" baseline="0" dirty="0">
+                          <a:solidFill>
+                            <a:srgbClr val="000000"/>
+                          </a:solidFill>
+                          <a:effectLst/>
+                          <a:latin typeface="CMU Serif" panose="02000603000000000000" pitchFamily="2" charset="0"/>
+                          <a:ea typeface="標楷體" panose="03000509000000000000" pitchFamily="65" charset="-120"/>
+                        </a:rPr>
+                        <a:t>global linear regression </a:t>
+                      </a:r>
+                      <a:r>
+                        <a:rPr lang="zh-TW" altLang="en-US" sz="1600" b="0" i="0" u="none" strike="noStrike" baseline="0" dirty="0">
+                          <a:solidFill>
+                            <a:srgbClr val="000000"/>
+                          </a:solidFill>
+                          <a:effectLst/>
+                          <a:latin typeface="CMU Serif" panose="02000603000000000000" pitchFamily="2" charset="0"/>
+                          <a:ea typeface="標楷體" panose="03000509000000000000" pitchFamily="65" charset="-120"/>
+                        </a:rPr>
+                        <a:t>結果</a:t>
+                      </a:r>
+                    </a:p>
+                  </a:txBody>
+                  <a:tcPr marL="5262" marR="5262" marT="5262" marB="0" anchor="ctr">
+                    <a:lnL w="12700" cap="flat" cmpd="sng" algn="ctr">
+                      <a:solidFill>
+                        <a:schemeClr val="tx1"/>
+                      </a:solidFill>
+                      <a:prstDash val="solid"/>
+                      <a:round/>
+                      <a:headEnd type="none" w="med" len="med"/>
+                      <a:tailEnd type="none" w="med" len="med"/>
+                    </a:lnL>
+                    <a:lnR w="12700" cap="flat" cmpd="sng" algn="ctr">
+                      <a:solidFill>
+                        <a:schemeClr val="tx1"/>
+                      </a:solidFill>
+                      <a:prstDash val="solid"/>
+                      <a:round/>
+                      <a:headEnd type="none" w="med" len="med"/>
+                      <a:tailEnd type="none" w="med" len="med"/>
+                    </a:lnR>
+                    <a:lnT w="12700" cap="flat" cmpd="sng" algn="ctr">
+                      <a:solidFill>
+                        <a:schemeClr val="tx1"/>
+                      </a:solidFill>
+                      <a:prstDash val="solid"/>
+                      <a:round/>
+                      <a:headEnd type="none" w="med" len="med"/>
+                      <a:tailEnd type="none" w="med" len="med"/>
+                    </a:lnT>
+                    <a:lnB w="12700" cap="flat" cmpd="sng" algn="ctr">
+                      <a:solidFill>
+                        <a:schemeClr val="tx1"/>
+                      </a:solidFill>
+                      <a:prstDash val="solid"/>
+                      <a:round/>
+                      <a:headEnd type="none" w="med" len="med"/>
+                      <a:tailEnd type="none" w="med" len="med"/>
+                    </a:lnB>
+                    <a:noFill/>
+                  </a:tcPr>
+                </a:tc>
+                <a:tc>
+                  <a:txBody>
+                    <a:bodyPr/>
+                    <a:lstStyle/>
+                    <a:p>
+                      <a:pPr algn="ctr" fontAlgn="ctr">
+                        <a:buNone/>
+                      </a:pPr>
+                      <a:r>
+                        <a:rPr lang="en-US" sz="1600" b="0" i="0" u="none" strike="noStrike" baseline="0">
+                          <a:solidFill>
+                            <a:srgbClr val="000000"/>
+                          </a:solidFill>
+                          <a:effectLst/>
+                          <a:latin typeface="CMU Serif" panose="02000603000000000000" pitchFamily="2" charset="0"/>
+                          <a:ea typeface="標楷體" panose="03000509000000000000" pitchFamily="65" charset="-120"/>
+                        </a:rPr>
+                        <a:t>V</a:t>
+                      </a:r>
+                    </a:p>
+                  </a:txBody>
+                  <a:tcPr marL="5262" marR="5262" marT="5262" marB="0" anchor="ctr">
+                    <a:lnL w="12700" cap="flat" cmpd="sng" algn="ctr">
+                      <a:solidFill>
+                        <a:schemeClr val="tx1"/>
+                      </a:solidFill>
+                      <a:prstDash val="solid"/>
+                      <a:round/>
+                      <a:headEnd type="none" w="med" len="med"/>
+                      <a:tailEnd type="none" w="med" len="med"/>
+                    </a:lnL>
+                    <a:lnR w="12700" cap="flat" cmpd="sng" algn="ctr">
+                      <a:solidFill>
+                        <a:schemeClr val="tx1"/>
+                      </a:solidFill>
+                      <a:prstDash val="solid"/>
+                      <a:round/>
+                      <a:headEnd type="none" w="med" len="med"/>
+                      <a:tailEnd type="none" w="med" len="med"/>
+                    </a:lnR>
+                    <a:lnT w="12700" cap="flat" cmpd="sng" algn="ctr">
+                      <a:solidFill>
+                        <a:schemeClr val="tx1"/>
+                      </a:solidFill>
+                      <a:prstDash val="solid"/>
+                      <a:round/>
+                      <a:headEnd type="none" w="med" len="med"/>
+                      <a:tailEnd type="none" w="med" len="med"/>
+                    </a:lnT>
+                    <a:lnB w="12700" cap="flat" cmpd="sng" algn="ctr">
+                      <a:solidFill>
+                        <a:schemeClr val="tx1"/>
+                      </a:solidFill>
+                      <a:prstDash val="solid"/>
+                      <a:round/>
+                      <a:headEnd type="none" w="med" len="med"/>
+                      <a:tailEnd type="none" w="med" len="med"/>
+                    </a:lnB>
+                    <a:noFill/>
+                  </a:tcPr>
+                </a:tc>
+                <a:extLst>
+                  <a:ext uri="{0D108BD9-81ED-4DB2-BD59-A6C34878D82A}">
+                    <a16:rowId xmlns:a16="http://schemas.microsoft.com/office/drawing/2014/main" val="1725581906"/>
+                  </a:ext>
+                </a:extLst>
+              </a:tr>
+              <a:tr h="559489">
+                <a:tc>
+                  <a:txBody>
+                    <a:bodyPr/>
+                    <a:lstStyle/>
+                    <a:p>
+                      <a:pPr algn="ctr" fontAlgn="ctr">
+                        <a:buNone/>
+                      </a:pPr>
+                      <a:r>
+                        <a:rPr lang="en-US" sz="1600" b="0" i="0" u="none" strike="noStrike" baseline="0">
+                          <a:solidFill>
+                            <a:srgbClr val="000000"/>
+                          </a:solidFill>
+                          <a:effectLst/>
+                          <a:latin typeface="CMU Serif" panose="02000603000000000000" pitchFamily="2" charset="0"/>
+                          <a:ea typeface="標楷體" panose="03000509000000000000" pitchFamily="65" charset="-120"/>
+                        </a:rPr>
+                        <a:t>SDF</a:t>
+                      </a:r>
+                    </a:p>
+                  </a:txBody>
+                  <a:tcPr marL="5262" marR="5262" marT="5262" marB="0" anchor="ctr">
+                    <a:lnL w="12700" cap="flat" cmpd="sng" algn="ctr">
+                      <a:solidFill>
+                        <a:schemeClr val="tx1"/>
+                      </a:solidFill>
+                      <a:prstDash val="solid"/>
+                      <a:round/>
+                      <a:headEnd type="none" w="med" len="med"/>
+                      <a:tailEnd type="none" w="med" len="med"/>
+                    </a:lnL>
+                    <a:lnR w="12700" cap="flat" cmpd="sng" algn="ctr">
+                      <a:solidFill>
+                        <a:schemeClr val="tx1"/>
+                      </a:solidFill>
+                      <a:prstDash val="solid"/>
+                      <a:round/>
+                      <a:headEnd type="none" w="med" len="med"/>
+                      <a:tailEnd type="none" w="med" len="med"/>
+                    </a:lnR>
+                    <a:lnT w="12700" cap="flat" cmpd="sng" algn="ctr">
+                      <a:solidFill>
+                        <a:schemeClr val="tx1"/>
+                      </a:solidFill>
+                      <a:prstDash val="solid"/>
+                      <a:round/>
+                      <a:headEnd type="none" w="med" len="med"/>
+                      <a:tailEnd type="none" w="med" len="med"/>
+                    </a:lnT>
+                    <a:lnB w="12700" cap="flat" cmpd="sng" algn="ctr">
+                      <a:solidFill>
+                        <a:schemeClr val="tx1"/>
+                      </a:solidFill>
+                      <a:prstDash val="solid"/>
+                      <a:round/>
+                      <a:headEnd type="none" w="med" len="med"/>
+                      <a:tailEnd type="none" w="med" len="med"/>
+                    </a:lnB>
+                    <a:noFill/>
+                  </a:tcPr>
+                </a:tc>
+                <a:tc>
+                  <a:txBody>
+                    <a:bodyPr/>
+                    <a:lstStyle/>
+                    <a:p>
+                      <a:pPr algn="ctr" fontAlgn="ctr">
+                        <a:buNone/>
+                      </a:pPr>
+                      <a:r>
+                        <a:rPr lang="zh-TW" altLang="en-US" sz="1600" b="0" i="0" u="none" strike="noStrike" baseline="0" dirty="0">
+                          <a:solidFill>
+                            <a:srgbClr val="000000"/>
+                          </a:solidFill>
+                          <a:effectLst/>
+                          <a:latin typeface="CMU Serif" panose="02000603000000000000" pitchFamily="2" charset="0"/>
+                          <a:ea typeface="標楷體" panose="03000509000000000000" pitchFamily="65" charset="-120"/>
+                        </a:rPr>
+                        <a:t>最重要的輸出，包含每個地點的 </a:t>
+                      </a:r>
+                      <a:r>
+                        <a:rPr lang="en-US" sz="1600" b="0" i="0" u="none" strike="noStrike" baseline="0" dirty="0">
+                          <a:solidFill>
+                            <a:srgbClr val="000000"/>
+                          </a:solidFill>
+                          <a:effectLst/>
+                          <a:latin typeface="CMU Serif" panose="02000603000000000000" pitchFamily="2" charset="0"/>
+                          <a:ea typeface="標楷體" panose="03000509000000000000" pitchFamily="65" charset="-120"/>
+                        </a:rPr>
+                        <a:t>local </a:t>
+                      </a:r>
+                      <a:r>
+                        <a:rPr lang="en-US" sz="1600" b="0" i="0" u="none" strike="noStrike" baseline="0" dirty="0" err="1">
+                          <a:solidFill>
+                            <a:srgbClr val="000000"/>
+                          </a:solidFill>
+                          <a:effectLst/>
+                          <a:latin typeface="CMU Serif" panose="02000603000000000000" pitchFamily="2" charset="0"/>
+                          <a:ea typeface="標楷體" panose="03000509000000000000" pitchFamily="65" charset="-120"/>
+                        </a:rPr>
+                        <a:t>coefficients、yhat、residual、standard</a:t>
+                      </a:r>
+                      <a:r>
+                        <a:rPr lang="en-US" sz="1600" b="0" i="0" u="none" strike="noStrike" baseline="0" dirty="0">
+                          <a:solidFill>
+                            <a:srgbClr val="000000"/>
+                          </a:solidFill>
+                          <a:effectLst/>
+                          <a:latin typeface="CMU Serif" panose="02000603000000000000" pitchFamily="2" charset="0"/>
+                          <a:ea typeface="標楷體" panose="03000509000000000000" pitchFamily="65" charset="-120"/>
+                        </a:rPr>
+                        <a:t> </a:t>
+                      </a:r>
+                      <a:r>
+                        <a:rPr lang="en-US" sz="1600" b="0" i="0" u="none" strike="noStrike" baseline="0" dirty="0" err="1">
+                          <a:solidFill>
+                            <a:srgbClr val="000000"/>
+                          </a:solidFill>
+                          <a:effectLst/>
+                          <a:latin typeface="CMU Serif" panose="02000603000000000000" pitchFamily="2" charset="0"/>
+                          <a:ea typeface="標楷體" panose="03000509000000000000" pitchFamily="65" charset="-120"/>
+                        </a:rPr>
+                        <a:t>errors、t-values</a:t>
+                      </a:r>
+                      <a:r>
+                        <a:rPr lang="en-US" sz="1600" b="0" i="0" u="none" strike="noStrike" baseline="0" dirty="0">
+                          <a:solidFill>
+                            <a:srgbClr val="000000"/>
+                          </a:solidFill>
+                          <a:effectLst/>
+                          <a:latin typeface="CMU Serif" panose="02000603000000000000" pitchFamily="2" charset="0"/>
+                          <a:ea typeface="標楷體" panose="03000509000000000000" pitchFamily="65" charset="-120"/>
+                        </a:rPr>
+                        <a:t> </a:t>
+                      </a:r>
+                      <a:r>
+                        <a:rPr lang="zh-TW" altLang="en-US" sz="1600" b="0" i="0" u="none" strike="noStrike" baseline="0" dirty="0">
+                          <a:solidFill>
+                            <a:srgbClr val="000000"/>
+                          </a:solidFill>
+                          <a:effectLst/>
+                          <a:latin typeface="CMU Serif" panose="02000603000000000000" pitchFamily="2" charset="0"/>
+                          <a:ea typeface="標楷體" panose="03000509000000000000" pitchFamily="65" charset="-120"/>
+                        </a:rPr>
+                        <a:t>等</a:t>
+                      </a:r>
+                    </a:p>
+                  </a:txBody>
+                  <a:tcPr marL="5262" marR="5262" marT="5262" marB="0" anchor="ctr">
+                    <a:lnL w="12700" cap="flat" cmpd="sng" algn="ctr">
+                      <a:solidFill>
+                        <a:schemeClr val="tx1"/>
+                      </a:solidFill>
+                      <a:prstDash val="solid"/>
+                      <a:round/>
+                      <a:headEnd type="none" w="med" len="med"/>
+                      <a:tailEnd type="none" w="med" len="med"/>
+                    </a:lnL>
+                    <a:lnR w="12700" cap="flat" cmpd="sng" algn="ctr">
+                      <a:solidFill>
+                        <a:schemeClr val="tx1"/>
+                      </a:solidFill>
+                      <a:prstDash val="solid"/>
+                      <a:round/>
+                      <a:headEnd type="none" w="med" len="med"/>
+                      <a:tailEnd type="none" w="med" len="med"/>
+                    </a:lnR>
+                    <a:lnT w="12700" cap="flat" cmpd="sng" algn="ctr">
+                      <a:solidFill>
+                        <a:schemeClr val="tx1"/>
+                      </a:solidFill>
+                      <a:prstDash val="solid"/>
+                      <a:round/>
+                      <a:headEnd type="none" w="med" len="med"/>
+                      <a:tailEnd type="none" w="med" len="med"/>
+                    </a:lnT>
+                    <a:lnB w="12700" cap="flat" cmpd="sng" algn="ctr">
+                      <a:solidFill>
+                        <a:schemeClr val="tx1"/>
+                      </a:solidFill>
+                      <a:prstDash val="solid"/>
+                      <a:round/>
+                      <a:headEnd type="none" w="med" len="med"/>
+                      <a:tailEnd type="none" w="med" len="med"/>
+                    </a:lnB>
+                    <a:noFill/>
+                  </a:tcPr>
+                </a:tc>
+                <a:tc>
+                  <a:txBody>
+                    <a:bodyPr/>
+                    <a:lstStyle/>
+                    <a:p>
+                      <a:pPr algn="ctr" fontAlgn="ctr">
+                        <a:buNone/>
+                      </a:pPr>
+                      <a:r>
+                        <a:rPr lang="en-US" sz="1600" b="0" i="0" u="none" strike="noStrike" baseline="0">
+                          <a:solidFill>
+                            <a:srgbClr val="000000"/>
+                          </a:solidFill>
+                          <a:effectLst/>
+                          <a:latin typeface="CMU Serif" panose="02000603000000000000" pitchFamily="2" charset="0"/>
+                          <a:ea typeface="標楷體" panose="03000509000000000000" pitchFamily="65" charset="-120"/>
+                        </a:rPr>
+                        <a:t>V</a:t>
+                      </a:r>
+                    </a:p>
+                  </a:txBody>
+                  <a:tcPr marL="5262" marR="5262" marT="5262" marB="0" anchor="ctr">
+                    <a:lnL w="12700" cap="flat" cmpd="sng" algn="ctr">
+                      <a:solidFill>
+                        <a:schemeClr val="tx1"/>
+                      </a:solidFill>
+                      <a:prstDash val="solid"/>
+                      <a:round/>
+                      <a:headEnd type="none" w="med" len="med"/>
+                      <a:tailEnd type="none" w="med" len="med"/>
+                    </a:lnL>
+                    <a:lnR w="12700" cap="flat" cmpd="sng" algn="ctr">
+                      <a:solidFill>
+                        <a:schemeClr val="tx1"/>
+                      </a:solidFill>
+                      <a:prstDash val="solid"/>
+                      <a:round/>
+                      <a:headEnd type="none" w="med" len="med"/>
+                      <a:tailEnd type="none" w="med" len="med"/>
+                    </a:lnR>
+                    <a:lnT w="12700" cap="flat" cmpd="sng" algn="ctr">
+                      <a:solidFill>
+                        <a:schemeClr val="tx1"/>
+                      </a:solidFill>
+                      <a:prstDash val="solid"/>
+                      <a:round/>
+                      <a:headEnd type="none" w="med" len="med"/>
+                      <a:tailEnd type="none" w="med" len="med"/>
+                    </a:lnT>
+                    <a:lnB w="12700" cap="flat" cmpd="sng" algn="ctr">
+                      <a:solidFill>
+                        <a:schemeClr val="tx1"/>
+                      </a:solidFill>
+                      <a:prstDash val="solid"/>
+                      <a:round/>
+                      <a:headEnd type="none" w="med" len="med"/>
+                      <a:tailEnd type="none" w="med" len="med"/>
+                    </a:lnB>
+                    <a:noFill/>
+                  </a:tcPr>
+                </a:tc>
+                <a:extLst>
+                  <a:ext uri="{0D108BD9-81ED-4DB2-BD59-A6C34878D82A}">
+                    <a16:rowId xmlns:a16="http://schemas.microsoft.com/office/drawing/2014/main" val="1090317284"/>
+                  </a:ext>
+                </a:extLst>
+              </a:tr>
+              <a:tr h="445855">
+                <a:tc>
+                  <a:txBody>
+                    <a:bodyPr/>
+                    <a:lstStyle/>
+                    <a:p>
+                      <a:pPr algn="ctr" fontAlgn="ctr">
+                        <a:buNone/>
+                      </a:pPr>
+                      <a:r>
+                        <a:rPr lang="en-US" sz="1600" b="0" i="0" u="none" strike="noStrike" baseline="0">
+                          <a:solidFill>
+                            <a:srgbClr val="000000"/>
+                          </a:solidFill>
+                          <a:effectLst/>
+                          <a:latin typeface="CMU Serif" panose="02000603000000000000" pitchFamily="2" charset="0"/>
+                          <a:ea typeface="標楷體" panose="03000509000000000000" pitchFamily="65" charset="-120"/>
+                        </a:rPr>
+                        <a:t>timings</a:t>
+                      </a:r>
+                    </a:p>
+                  </a:txBody>
+                  <a:tcPr marL="5262" marR="5262" marT="5262" marB="0" anchor="ctr">
+                    <a:lnL w="12700" cap="flat" cmpd="sng" algn="ctr">
+                      <a:solidFill>
+                        <a:schemeClr val="tx1"/>
+                      </a:solidFill>
+                      <a:prstDash val="solid"/>
+                      <a:round/>
+                      <a:headEnd type="none" w="med" len="med"/>
+                      <a:tailEnd type="none" w="med" len="med"/>
+                    </a:lnL>
+                    <a:lnR w="12700" cap="flat" cmpd="sng" algn="ctr">
+                      <a:solidFill>
+                        <a:schemeClr val="tx1"/>
+                      </a:solidFill>
+                      <a:prstDash val="solid"/>
+                      <a:round/>
+                      <a:headEnd type="none" w="med" len="med"/>
+                      <a:tailEnd type="none" w="med" len="med"/>
+                    </a:lnR>
+                    <a:lnT w="12700" cap="flat" cmpd="sng" algn="ctr">
+                      <a:solidFill>
+                        <a:schemeClr val="tx1"/>
+                      </a:solidFill>
+                      <a:prstDash val="solid"/>
+                      <a:round/>
+                      <a:headEnd type="none" w="med" len="med"/>
+                      <a:tailEnd type="none" w="med" len="med"/>
+                    </a:lnT>
+                    <a:lnB w="12700" cap="flat" cmpd="sng" algn="ctr">
+                      <a:solidFill>
+                        <a:schemeClr val="tx1"/>
+                      </a:solidFill>
+                      <a:prstDash val="solid"/>
+                      <a:round/>
+                      <a:headEnd type="none" w="med" len="med"/>
+                      <a:tailEnd type="none" w="med" len="med"/>
+                    </a:lnB>
+                    <a:solidFill>
+                      <a:schemeClr val="bg1">
+                        <a:lumMod val="75000"/>
+                      </a:schemeClr>
+                    </a:solidFill>
+                  </a:tcPr>
+                </a:tc>
+                <a:tc>
+                  <a:txBody>
+                    <a:bodyPr/>
+                    <a:lstStyle/>
+                    <a:p>
+                      <a:pPr algn="ctr" fontAlgn="ctr">
+                        <a:buNone/>
+                      </a:pPr>
+                      <a:r>
+                        <a:rPr lang="zh-TW" altLang="en-US" sz="1600" b="0" i="0" u="none" strike="noStrike" baseline="0" dirty="0">
+                          <a:solidFill>
+                            <a:srgbClr val="000000"/>
+                          </a:solidFill>
+                          <a:effectLst/>
+                          <a:latin typeface="CMU Serif" panose="02000603000000000000" pitchFamily="2" charset="0"/>
+                          <a:ea typeface="標楷體" panose="03000509000000000000" pitchFamily="65" charset="-120"/>
+                        </a:rPr>
+                        <a:t>模型開始與結束時間</a:t>
+                      </a:r>
+                    </a:p>
+                  </a:txBody>
+                  <a:tcPr marL="5262" marR="5262" marT="5262" marB="0" anchor="ctr">
+                    <a:lnL w="12700" cap="flat" cmpd="sng" algn="ctr">
+                      <a:solidFill>
+                        <a:schemeClr val="tx1"/>
+                      </a:solidFill>
+                      <a:prstDash val="solid"/>
+                      <a:round/>
+                      <a:headEnd type="none" w="med" len="med"/>
+                      <a:tailEnd type="none" w="med" len="med"/>
+                    </a:lnL>
+                    <a:lnR w="12700" cap="flat" cmpd="sng" algn="ctr">
+                      <a:solidFill>
+                        <a:schemeClr val="tx1"/>
+                      </a:solidFill>
+                      <a:prstDash val="solid"/>
+                      <a:round/>
+                      <a:headEnd type="none" w="med" len="med"/>
+                      <a:tailEnd type="none" w="med" len="med"/>
+                    </a:lnR>
+                    <a:lnT w="12700" cap="flat" cmpd="sng" algn="ctr">
+                      <a:solidFill>
+                        <a:schemeClr val="tx1"/>
+                      </a:solidFill>
+                      <a:prstDash val="solid"/>
+                      <a:round/>
+                      <a:headEnd type="none" w="med" len="med"/>
+                      <a:tailEnd type="none" w="med" len="med"/>
+                    </a:lnT>
+                    <a:lnB w="12700" cap="flat" cmpd="sng" algn="ctr">
+                      <a:solidFill>
+                        <a:schemeClr val="tx1"/>
+                      </a:solidFill>
+                      <a:prstDash val="solid"/>
+                      <a:round/>
+                      <a:headEnd type="none" w="med" len="med"/>
+                      <a:tailEnd type="none" w="med" len="med"/>
+                    </a:lnB>
+                    <a:solidFill>
+                      <a:schemeClr val="bg1">
+                        <a:lumMod val="75000"/>
+                      </a:schemeClr>
+                    </a:solidFill>
+                  </a:tcPr>
+                </a:tc>
+                <a:tc>
+                  <a:txBody>
+                    <a:bodyPr/>
+                    <a:lstStyle/>
+                    <a:p>
+                      <a:pPr algn="ctr" fontAlgn="ctr">
+                        <a:buNone/>
+                      </a:pPr>
+                      <a:r>
+                        <a:rPr lang="en-US" sz="1600" b="0" i="0" u="none" strike="noStrike" baseline="0">
+                          <a:solidFill>
+                            <a:srgbClr val="000000"/>
+                          </a:solidFill>
+                          <a:effectLst/>
+                          <a:latin typeface="CMU Serif" panose="02000603000000000000" pitchFamily="2" charset="0"/>
+                          <a:ea typeface="標楷體" panose="03000509000000000000" pitchFamily="65" charset="-120"/>
+                        </a:rPr>
+                        <a:t>X</a:t>
+                      </a:r>
+                    </a:p>
+                  </a:txBody>
+                  <a:tcPr marL="5262" marR="5262" marT="5262" marB="0" anchor="ctr">
+                    <a:lnL w="12700" cap="flat" cmpd="sng" algn="ctr">
+                      <a:solidFill>
+                        <a:schemeClr val="tx1"/>
+                      </a:solidFill>
+                      <a:prstDash val="solid"/>
+                      <a:round/>
+                      <a:headEnd type="none" w="med" len="med"/>
+                      <a:tailEnd type="none" w="med" len="med"/>
+                    </a:lnL>
+                    <a:lnR w="12700" cap="flat" cmpd="sng" algn="ctr">
+                      <a:solidFill>
+                        <a:schemeClr val="tx1"/>
+                      </a:solidFill>
+                      <a:prstDash val="solid"/>
+                      <a:round/>
+                      <a:headEnd type="none" w="med" len="med"/>
+                      <a:tailEnd type="none" w="med" len="med"/>
+                    </a:lnR>
+                    <a:lnT w="12700" cap="flat" cmpd="sng" algn="ctr">
+                      <a:solidFill>
+                        <a:schemeClr val="tx1"/>
+                      </a:solidFill>
+                      <a:prstDash val="solid"/>
+                      <a:round/>
+                      <a:headEnd type="none" w="med" len="med"/>
+                      <a:tailEnd type="none" w="med" len="med"/>
+                    </a:lnT>
+                    <a:lnB w="12700" cap="flat" cmpd="sng" algn="ctr">
+                      <a:solidFill>
+                        <a:schemeClr val="tx1"/>
+                      </a:solidFill>
+                      <a:prstDash val="solid"/>
+                      <a:round/>
+                      <a:headEnd type="none" w="med" len="med"/>
+                      <a:tailEnd type="none" w="med" len="med"/>
+                    </a:lnB>
+                    <a:solidFill>
+                      <a:schemeClr val="bg1">
+                        <a:lumMod val="75000"/>
+                      </a:schemeClr>
+                    </a:solidFill>
+                  </a:tcPr>
+                </a:tc>
+                <a:extLst>
+                  <a:ext uri="{0D108BD9-81ED-4DB2-BD59-A6C34878D82A}">
+                    <a16:rowId xmlns:a16="http://schemas.microsoft.com/office/drawing/2014/main" val="1106755338"/>
+                  </a:ext>
+                </a:extLst>
+              </a:tr>
+              <a:tr h="445855">
+                <a:tc>
+                  <a:txBody>
+                    <a:bodyPr/>
+                    <a:lstStyle/>
+                    <a:p>
+                      <a:pPr algn="ctr" fontAlgn="ctr">
+                        <a:buNone/>
+                      </a:pPr>
+                      <a:r>
+                        <a:rPr lang="en-US" sz="1600" b="0" i="0" u="none" strike="noStrike" baseline="0">
+                          <a:solidFill>
+                            <a:srgbClr val="000000"/>
+                          </a:solidFill>
+                          <a:effectLst/>
+                          <a:latin typeface="CMU Serif" panose="02000603000000000000" pitchFamily="2" charset="0"/>
+                          <a:ea typeface="標楷體" panose="03000509000000000000" pitchFamily="65" charset="-120"/>
+                        </a:rPr>
+                        <a:t>this.call</a:t>
+                      </a:r>
+                    </a:p>
+                  </a:txBody>
+                  <a:tcPr marL="5262" marR="5262" marT="5262" marB="0" anchor="ctr">
+                    <a:lnL w="12700" cap="flat" cmpd="sng" algn="ctr">
+                      <a:solidFill>
+                        <a:schemeClr val="tx1"/>
+                      </a:solidFill>
+                      <a:prstDash val="solid"/>
+                      <a:round/>
+                      <a:headEnd type="none" w="med" len="med"/>
+                      <a:tailEnd type="none" w="med" len="med"/>
+                    </a:lnL>
+                    <a:lnR w="12700" cap="flat" cmpd="sng" algn="ctr">
+                      <a:solidFill>
+                        <a:schemeClr val="tx1"/>
+                      </a:solidFill>
+                      <a:prstDash val="solid"/>
+                      <a:round/>
+                      <a:headEnd type="none" w="med" len="med"/>
+                      <a:tailEnd type="none" w="med" len="med"/>
+                    </a:lnR>
+                    <a:lnT w="12700" cap="flat" cmpd="sng" algn="ctr">
+                      <a:solidFill>
+                        <a:schemeClr val="tx1"/>
+                      </a:solidFill>
+                      <a:prstDash val="solid"/>
+                      <a:round/>
+                      <a:headEnd type="none" w="med" len="med"/>
+                      <a:tailEnd type="none" w="med" len="med"/>
+                    </a:lnT>
+                    <a:lnB w="12700" cap="flat" cmpd="sng" algn="ctr">
+                      <a:solidFill>
+                        <a:schemeClr val="tx1"/>
+                      </a:solidFill>
+                      <a:prstDash val="solid"/>
+                      <a:round/>
+                      <a:headEnd type="none" w="med" len="med"/>
+                      <a:tailEnd type="none" w="med" len="med"/>
+                    </a:lnB>
+                    <a:solidFill>
+                      <a:schemeClr val="bg1">
+                        <a:lumMod val="75000"/>
+                      </a:schemeClr>
+                    </a:solidFill>
+                  </a:tcPr>
+                </a:tc>
+                <a:tc>
+                  <a:txBody>
+                    <a:bodyPr/>
+                    <a:lstStyle/>
+                    <a:p>
+                      <a:pPr algn="ctr" fontAlgn="ctr">
+                        <a:buNone/>
+                      </a:pPr>
+                      <a:r>
+                        <a:rPr lang="zh-TW" altLang="en-US" sz="1600" b="0" i="0" u="none" strike="noStrike" baseline="0">
+                          <a:solidFill>
+                            <a:srgbClr val="000000"/>
+                          </a:solidFill>
+                          <a:effectLst/>
+                          <a:latin typeface="CMU Serif" panose="02000603000000000000" pitchFamily="2" charset="0"/>
+                          <a:ea typeface="標楷體" panose="03000509000000000000" pitchFamily="65" charset="-120"/>
+                        </a:rPr>
+                        <a:t>當初執行的 </a:t>
+                      </a:r>
+                      <a:r>
+                        <a:rPr lang="en-US" sz="1600" b="0" i="0" u="none" strike="noStrike" baseline="0">
+                          <a:solidFill>
+                            <a:srgbClr val="000000"/>
+                          </a:solidFill>
+                          <a:effectLst/>
+                          <a:latin typeface="CMU Serif" panose="02000603000000000000" pitchFamily="2" charset="0"/>
+                          <a:ea typeface="標楷體" panose="03000509000000000000" pitchFamily="65" charset="-120"/>
+                        </a:rPr>
+                        <a:t>function call</a:t>
+                      </a:r>
+                    </a:p>
+                  </a:txBody>
+                  <a:tcPr marL="5262" marR="5262" marT="5262" marB="0" anchor="ctr">
+                    <a:lnL w="12700" cap="flat" cmpd="sng" algn="ctr">
+                      <a:solidFill>
+                        <a:schemeClr val="tx1"/>
+                      </a:solidFill>
+                      <a:prstDash val="solid"/>
+                      <a:round/>
+                      <a:headEnd type="none" w="med" len="med"/>
+                      <a:tailEnd type="none" w="med" len="med"/>
+                    </a:lnL>
+                    <a:lnR w="12700" cap="flat" cmpd="sng" algn="ctr">
+                      <a:solidFill>
+                        <a:schemeClr val="tx1"/>
+                      </a:solidFill>
+                      <a:prstDash val="solid"/>
+                      <a:round/>
+                      <a:headEnd type="none" w="med" len="med"/>
+                      <a:tailEnd type="none" w="med" len="med"/>
+                    </a:lnR>
+                    <a:lnT w="12700" cap="flat" cmpd="sng" algn="ctr">
+                      <a:solidFill>
+                        <a:schemeClr val="tx1"/>
+                      </a:solidFill>
+                      <a:prstDash val="solid"/>
+                      <a:round/>
+                      <a:headEnd type="none" w="med" len="med"/>
+                      <a:tailEnd type="none" w="med" len="med"/>
+                    </a:lnT>
+                    <a:lnB w="12700" cap="flat" cmpd="sng" algn="ctr">
+                      <a:solidFill>
+                        <a:schemeClr val="tx1"/>
+                      </a:solidFill>
+                      <a:prstDash val="solid"/>
+                      <a:round/>
+                      <a:headEnd type="none" w="med" len="med"/>
+                      <a:tailEnd type="none" w="med" len="med"/>
+                    </a:lnB>
+                    <a:solidFill>
+                      <a:schemeClr val="bg1">
+                        <a:lumMod val="75000"/>
+                      </a:schemeClr>
+                    </a:solidFill>
+                  </a:tcPr>
+                </a:tc>
+                <a:tc>
+                  <a:txBody>
+                    <a:bodyPr/>
+                    <a:lstStyle/>
+                    <a:p>
+                      <a:pPr algn="ctr" fontAlgn="ctr">
+                        <a:buNone/>
+                      </a:pPr>
+                      <a:r>
+                        <a:rPr lang="en-US" sz="1600" b="0" i="0" u="none" strike="noStrike" baseline="0" dirty="0">
+                          <a:solidFill>
+                            <a:srgbClr val="000000"/>
+                          </a:solidFill>
+                          <a:effectLst/>
+                          <a:latin typeface="CMU Serif" panose="02000603000000000000" pitchFamily="2" charset="0"/>
+                          <a:ea typeface="標楷體" panose="03000509000000000000" pitchFamily="65" charset="-120"/>
+                        </a:rPr>
+                        <a:t>X</a:t>
+                      </a:r>
+                    </a:p>
+                  </a:txBody>
+                  <a:tcPr marL="5262" marR="5262" marT="5262" marB="0" anchor="ctr">
+                    <a:lnL w="12700" cap="flat" cmpd="sng" algn="ctr">
+                      <a:solidFill>
+                        <a:schemeClr val="tx1"/>
+                      </a:solidFill>
+                      <a:prstDash val="solid"/>
+                      <a:round/>
+                      <a:headEnd type="none" w="med" len="med"/>
+                      <a:tailEnd type="none" w="med" len="med"/>
+                    </a:lnL>
+                    <a:lnR w="12700" cap="flat" cmpd="sng" algn="ctr">
+                      <a:solidFill>
+                        <a:schemeClr val="tx1"/>
+                      </a:solidFill>
+                      <a:prstDash val="solid"/>
+                      <a:round/>
+                      <a:headEnd type="none" w="med" len="med"/>
+                      <a:tailEnd type="none" w="med" len="med"/>
+                    </a:lnR>
+                    <a:lnT w="12700" cap="flat" cmpd="sng" algn="ctr">
+                      <a:solidFill>
+                        <a:schemeClr val="tx1"/>
+                      </a:solidFill>
+                      <a:prstDash val="solid"/>
+                      <a:round/>
+                      <a:headEnd type="none" w="med" len="med"/>
+                      <a:tailEnd type="none" w="med" len="med"/>
+                    </a:lnT>
+                    <a:lnB w="12700" cap="flat" cmpd="sng" algn="ctr">
+                      <a:solidFill>
+                        <a:schemeClr val="tx1"/>
+                      </a:solidFill>
+                      <a:prstDash val="solid"/>
+                      <a:round/>
+                      <a:headEnd type="none" w="med" len="med"/>
+                      <a:tailEnd type="none" w="med" len="med"/>
+                    </a:lnB>
+                    <a:solidFill>
+                      <a:schemeClr val="bg1">
+                        <a:lumMod val="75000"/>
+                      </a:schemeClr>
+                    </a:solidFill>
+                  </a:tcPr>
+                </a:tc>
+                <a:extLst>
+                  <a:ext uri="{0D108BD9-81ED-4DB2-BD59-A6C34878D82A}">
+                    <a16:rowId xmlns:a16="http://schemas.microsoft.com/office/drawing/2014/main" val="159445076"/>
+                  </a:ext>
+                </a:extLst>
+              </a:tr>
+              <a:tr h="445855">
+                <a:tc>
+                  <a:txBody>
+                    <a:bodyPr/>
+                    <a:lstStyle/>
+                    <a:p>
+                      <a:pPr algn="ctr" fontAlgn="ctr">
+                        <a:buNone/>
+                      </a:pPr>
+                      <a:r>
+                        <a:rPr lang="en-US" sz="1600" b="0" i="0" u="none" strike="noStrike" baseline="0">
+                          <a:solidFill>
+                            <a:srgbClr val="000000"/>
+                          </a:solidFill>
+                          <a:effectLst/>
+                          <a:latin typeface="CMU Serif" panose="02000603000000000000" pitchFamily="2" charset="0"/>
+                          <a:ea typeface="標楷體" panose="03000509000000000000" pitchFamily="65" charset="-120"/>
+                        </a:rPr>
+                        <a:t>Ftest.res</a:t>
+                      </a:r>
+                    </a:p>
+                  </a:txBody>
+                  <a:tcPr marL="5262" marR="5262" marT="5262" marB="0" anchor="ctr">
+                    <a:lnL w="12700" cap="flat" cmpd="sng" algn="ctr">
+                      <a:solidFill>
+                        <a:schemeClr val="tx1"/>
+                      </a:solidFill>
+                      <a:prstDash val="solid"/>
+                      <a:round/>
+                      <a:headEnd type="none" w="med" len="med"/>
+                      <a:tailEnd type="none" w="med" len="med"/>
+                    </a:lnL>
+                    <a:lnR w="12700" cap="flat" cmpd="sng" algn="ctr">
+                      <a:solidFill>
+                        <a:schemeClr val="tx1"/>
+                      </a:solidFill>
+                      <a:prstDash val="solid"/>
+                      <a:round/>
+                      <a:headEnd type="none" w="med" len="med"/>
+                      <a:tailEnd type="none" w="med" len="med"/>
+                    </a:lnR>
+                    <a:lnT w="12700" cap="flat" cmpd="sng" algn="ctr">
+                      <a:solidFill>
+                        <a:schemeClr val="tx1"/>
+                      </a:solidFill>
+                      <a:prstDash val="solid"/>
+                      <a:round/>
+                      <a:headEnd type="none" w="med" len="med"/>
+                      <a:tailEnd type="none" w="med" len="med"/>
+                    </a:lnT>
+                    <a:lnB w="12700" cap="flat" cmpd="sng" algn="ctr">
+                      <a:solidFill>
+                        <a:schemeClr val="tx1"/>
+                      </a:solidFill>
+                      <a:prstDash val="solid"/>
+                      <a:round/>
+                      <a:headEnd type="none" w="med" len="med"/>
+                      <a:tailEnd type="none" w="med" len="med"/>
+                    </a:lnB>
+                    <a:solidFill>
+                      <a:schemeClr val="bg1">
+                        <a:lumMod val="75000"/>
+                      </a:schemeClr>
+                    </a:solidFill>
+                  </a:tcPr>
+                </a:tc>
+                <a:tc>
+                  <a:txBody>
+                    <a:bodyPr/>
+                    <a:lstStyle/>
+                    <a:p>
+                      <a:pPr algn="ctr" fontAlgn="ctr">
+                        <a:buNone/>
+                      </a:pPr>
+                      <a:r>
+                        <a:rPr lang="zh-TW" altLang="en-US" sz="1600" b="0" i="0" u="none" strike="noStrike" baseline="0">
+                          <a:solidFill>
+                            <a:srgbClr val="000000"/>
+                          </a:solidFill>
+                          <a:effectLst/>
+                          <a:latin typeface="CMU Serif" panose="02000603000000000000" pitchFamily="2" charset="0"/>
+                          <a:ea typeface="標楷體" panose="03000509000000000000" pitchFamily="65" charset="-120"/>
+                        </a:rPr>
+                        <a:t>若 </a:t>
+                      </a:r>
+                      <a:r>
+                        <a:rPr lang="en-US" sz="1600" b="0" i="0" u="none" strike="noStrike" baseline="0">
+                          <a:solidFill>
+                            <a:srgbClr val="000000"/>
+                          </a:solidFill>
+                          <a:effectLst/>
+                          <a:latin typeface="CMU Serif" panose="02000603000000000000" pitchFamily="2" charset="0"/>
+                          <a:ea typeface="標楷體" panose="03000509000000000000" pitchFamily="65" charset="-120"/>
+                        </a:rPr>
+                        <a:t>F123.test = TRUE，</a:t>
+                      </a:r>
+                      <a:r>
+                        <a:rPr lang="zh-TW" altLang="en-US" sz="1600" b="0" i="0" u="none" strike="noStrike" baseline="0">
+                          <a:solidFill>
+                            <a:srgbClr val="000000"/>
+                          </a:solidFill>
+                          <a:effectLst/>
+                          <a:latin typeface="CMU Serif" panose="02000603000000000000" pitchFamily="2" charset="0"/>
+                          <a:ea typeface="標楷體" panose="03000509000000000000" pitchFamily="65" charset="-120"/>
+                        </a:rPr>
+                        <a:t>這裡會存 </a:t>
+                      </a:r>
+                      <a:r>
+                        <a:rPr lang="en-US" sz="1600" b="0" i="0" u="none" strike="noStrike" baseline="0">
+                          <a:solidFill>
+                            <a:srgbClr val="000000"/>
+                          </a:solidFill>
+                          <a:effectLst/>
+                          <a:latin typeface="CMU Serif" panose="02000603000000000000" pitchFamily="2" charset="0"/>
+                          <a:ea typeface="標楷體" panose="03000509000000000000" pitchFamily="65" charset="-120"/>
+                        </a:rPr>
+                        <a:t>Leung’s F-tests </a:t>
+                      </a:r>
+                      <a:r>
+                        <a:rPr lang="zh-TW" altLang="en-US" sz="1600" b="0" i="0" u="none" strike="noStrike" baseline="0">
+                          <a:solidFill>
+                            <a:srgbClr val="000000"/>
+                          </a:solidFill>
+                          <a:effectLst/>
+                          <a:latin typeface="CMU Serif" panose="02000603000000000000" pitchFamily="2" charset="0"/>
+                          <a:ea typeface="標楷體" panose="03000509000000000000" pitchFamily="65" charset="-120"/>
+                        </a:rPr>
+                        <a:t>結果</a:t>
+                      </a:r>
+                    </a:p>
+                  </a:txBody>
+                  <a:tcPr marL="5262" marR="5262" marT="5262" marB="0" anchor="ctr">
+                    <a:lnL w="12700" cap="flat" cmpd="sng" algn="ctr">
+                      <a:solidFill>
+                        <a:schemeClr val="tx1"/>
+                      </a:solidFill>
+                      <a:prstDash val="solid"/>
+                      <a:round/>
+                      <a:headEnd type="none" w="med" len="med"/>
+                      <a:tailEnd type="none" w="med" len="med"/>
+                    </a:lnL>
+                    <a:lnR w="12700" cap="flat" cmpd="sng" algn="ctr">
+                      <a:solidFill>
+                        <a:schemeClr val="tx1"/>
+                      </a:solidFill>
+                      <a:prstDash val="solid"/>
+                      <a:round/>
+                      <a:headEnd type="none" w="med" len="med"/>
+                      <a:tailEnd type="none" w="med" len="med"/>
+                    </a:lnR>
+                    <a:lnT w="12700" cap="flat" cmpd="sng" algn="ctr">
+                      <a:solidFill>
+                        <a:schemeClr val="tx1"/>
+                      </a:solidFill>
+                      <a:prstDash val="solid"/>
+                      <a:round/>
+                      <a:headEnd type="none" w="med" len="med"/>
+                      <a:tailEnd type="none" w="med" len="med"/>
+                    </a:lnT>
+                    <a:lnB w="12700" cap="flat" cmpd="sng" algn="ctr">
+                      <a:solidFill>
+                        <a:schemeClr val="tx1"/>
+                      </a:solidFill>
+                      <a:prstDash val="solid"/>
+                      <a:round/>
+                      <a:headEnd type="none" w="med" len="med"/>
+                      <a:tailEnd type="none" w="med" len="med"/>
+                    </a:lnB>
+                    <a:solidFill>
+                      <a:schemeClr val="bg1">
+                        <a:lumMod val="75000"/>
+                      </a:schemeClr>
+                    </a:solidFill>
+                  </a:tcPr>
+                </a:tc>
+                <a:tc>
+                  <a:txBody>
+                    <a:bodyPr/>
+                    <a:lstStyle/>
+                    <a:p>
+                      <a:pPr algn="ctr" fontAlgn="ctr">
+                        <a:buNone/>
+                      </a:pPr>
+                      <a:r>
+                        <a:rPr lang="en-US" sz="1600" b="0" i="0" u="none" strike="noStrike" baseline="0" dirty="0">
+                          <a:solidFill>
+                            <a:srgbClr val="000000"/>
+                          </a:solidFill>
+                          <a:effectLst/>
+                          <a:latin typeface="CMU Serif" panose="02000603000000000000" pitchFamily="2" charset="0"/>
+                          <a:ea typeface="標楷體" panose="03000509000000000000" pitchFamily="65" charset="-120"/>
+                        </a:rPr>
+                        <a:t>X</a:t>
+                      </a:r>
+                    </a:p>
+                  </a:txBody>
+                  <a:tcPr marL="5262" marR="5262" marT="5262" marB="0" anchor="ctr">
+                    <a:lnL w="12700" cap="flat" cmpd="sng" algn="ctr">
+                      <a:solidFill>
+                        <a:schemeClr val="tx1"/>
+                      </a:solidFill>
+                      <a:prstDash val="solid"/>
+                      <a:round/>
+                      <a:headEnd type="none" w="med" len="med"/>
+                      <a:tailEnd type="none" w="med" len="med"/>
+                    </a:lnL>
+                    <a:lnR w="12700" cap="flat" cmpd="sng" algn="ctr">
+                      <a:solidFill>
+                        <a:schemeClr val="tx1"/>
+                      </a:solidFill>
+                      <a:prstDash val="solid"/>
+                      <a:round/>
+                      <a:headEnd type="none" w="med" len="med"/>
+                      <a:tailEnd type="none" w="med" len="med"/>
+                    </a:lnR>
+                    <a:lnT w="12700" cap="flat" cmpd="sng" algn="ctr">
+                      <a:solidFill>
+                        <a:schemeClr val="tx1"/>
+                      </a:solidFill>
+                      <a:prstDash val="solid"/>
+                      <a:round/>
+                      <a:headEnd type="none" w="med" len="med"/>
+                      <a:tailEnd type="none" w="med" len="med"/>
+                    </a:lnT>
+                    <a:lnB w="12700" cap="flat" cmpd="sng" algn="ctr">
+                      <a:solidFill>
+                        <a:schemeClr val="tx1"/>
+                      </a:solidFill>
+                      <a:prstDash val="solid"/>
+                      <a:round/>
+                      <a:headEnd type="none" w="med" len="med"/>
+                      <a:tailEnd type="none" w="med" len="med"/>
+                    </a:lnB>
+                    <a:solidFill>
+                      <a:schemeClr val="bg1">
+                        <a:lumMod val="75000"/>
+                      </a:schemeClr>
+                    </a:solidFill>
+                  </a:tcPr>
+                </a:tc>
+                <a:extLst>
+                  <a:ext uri="{0D108BD9-81ED-4DB2-BD59-A6C34878D82A}">
+                    <a16:rowId xmlns:a16="http://schemas.microsoft.com/office/drawing/2014/main" val="1669230428"/>
+                  </a:ext>
+                </a:extLst>
+              </a:tr>
+            </a:tbl>
+          </a:graphicData>
+        </a:graphic>
+      </p:graphicFrame>
     </p:spTree>
     <p:extLst>
       <p:ext uri="{BB962C8B-B14F-4D97-AF65-F5344CB8AC3E}">
-        <p14:creationId xmlns:p14="http://schemas.microsoft.com/office/powerpoint/2010/main" val="4027056687"/>
+        <p14:creationId xmlns:p14="http://schemas.microsoft.com/office/powerpoint/2010/main" val="1503102211"/>
       </p:ext>
     </p:extLst>
   </p:cSld>
